--- a/upload/Titan_-Dorozhnaya_karta_fin_20.08.2026.pptx
+++ b/upload/Titan_-Dorozhnaya_karta_fin_20.08.2026.pptx
@@ -6,10 +6,10 @@
     <p:sldMasterId id="2147483660" r:id="rId2"/>
   </p:sldMasterIdLst>
   <p:notesMasterIdLst>
-    <p:notesMasterId r:id="rId22"/>
+    <p:notesMasterId r:id="rId23"/>
   </p:notesMasterIdLst>
   <p:handoutMasterIdLst>
-    <p:handoutMasterId r:id="rId23"/>
+    <p:handoutMasterId r:id="rId24"/>
   </p:handoutMasterIdLst>
   <p:sldIdLst>
     <p:sldId id="271" r:id="rId3"/>
@@ -28,9 +28,10 @@
     <p:sldId id="295" r:id="rId16"/>
     <p:sldId id="296" r:id="rId17"/>
     <p:sldId id="299" r:id="rId18"/>
-    <p:sldId id="292" r:id="rId19"/>
-    <p:sldId id="293" r:id="rId20"/>
-    <p:sldId id="294" r:id="rId21"/>
+    <p:sldId id="300" r:id="rId19"/>
+    <p:sldId id="292" r:id="rId20"/>
+    <p:sldId id="293" r:id="rId21"/>
+    <p:sldId id="294" r:id="rId22"/>
   </p:sldIdLst>
   <p:sldSz cx="12192000" cy="6858000"/>
   <p:notesSz cx="9926638" cy="6797675"/>
@@ -214,7 +215,7 @@
           <a:p>
             <a:fld id="{0407A6CA-850D-4EF3-A94A-A906330D8CBA}" type="datetimeFigureOut">
               <a:rPr lang="ru-RU" smtClean="0"/>
-              <a:t>20.08.2026</a:t>
+              <a:t>16.09.2026</a:t>
             </a:fld>
             <a:endParaRPr lang="ru-RU"/>
           </a:p>
@@ -379,7 +380,7 @@
           <a:p>
             <a:fld id="{A112E25D-78B6-4A07-B316-4AE7887BB689}" type="datetimeFigureOut">
               <a:rPr lang="ru-RU" smtClean="0"/>
-              <a:t>20.08.2026</a:t>
+              <a:t>16.09.2026</a:t>
             </a:fld>
             <a:endParaRPr lang="ru-RU"/>
           </a:p>
@@ -810,7 +811,7 @@
                 </a:solidFill>
               </a:rPr>
               <a:pPr/>
-              <a:t>19</a:t>
+              <a:t>20</a:t>
             </a:fld>
             <a:endParaRPr lang="en-US">
               <a:solidFill>
@@ -1686,7 +1687,7 @@
           <a:p>
             <a:fld id="{5BCAD085-E8A6-8845-BD4E-CB4CCA059FC4}" type="datetimeFigureOut">
               <a:rPr lang="en-US" smtClean="0"/>
-              <a:t>8/20/2026</a:t>
+              <a:t>9/16/2026</a:t>
             </a:fld>
             <a:endParaRPr lang="en-US"/>
           </a:p>
@@ -1856,7 +1857,7 @@
           <a:p>
             <a:fld id="{5BCAD085-E8A6-8845-BD4E-CB4CCA059FC4}" type="datetimeFigureOut">
               <a:rPr lang="en-US" smtClean="0"/>
-              <a:t>8/20/2026</a:t>
+              <a:t>9/16/2026</a:t>
             </a:fld>
             <a:endParaRPr lang="en-US"/>
           </a:p>
@@ -2036,7 +2037,7 @@
           <a:p>
             <a:fld id="{5BCAD085-E8A6-8845-BD4E-CB4CCA059FC4}" type="datetimeFigureOut">
               <a:rPr lang="en-US" smtClean="0"/>
-              <a:t>8/20/2026</a:t>
+              <a:t>9/16/2026</a:t>
             </a:fld>
             <a:endParaRPr lang="en-US"/>
           </a:p>
@@ -2266,7 +2267,7 @@
           <a:p>
             <a:fld id="{5BCAD085-E8A6-8845-BD4E-CB4CCA059FC4}" type="datetimeFigureOut">
               <a:rPr lang="en-US" smtClean="0"/>
-              <a:t>8/20/2026</a:t>
+              <a:t>9/16/2026</a:t>
             </a:fld>
             <a:endParaRPr lang="en-US"/>
           </a:p>
@@ -2512,7 +2513,7 @@
           <a:p>
             <a:fld id="{5BCAD085-E8A6-8845-BD4E-CB4CCA059FC4}" type="datetimeFigureOut">
               <a:rPr lang="en-US" smtClean="0"/>
-              <a:t>8/20/2026</a:t>
+              <a:t>9/16/2026</a:t>
             </a:fld>
             <a:endParaRPr lang="en-US"/>
           </a:p>
@@ -2800,7 +2801,7 @@
           <a:p>
             <a:fld id="{5BCAD085-E8A6-8845-BD4E-CB4CCA059FC4}" type="datetimeFigureOut">
               <a:rPr lang="en-US" smtClean="0"/>
-              <a:t>8/20/2026</a:t>
+              <a:t>9/16/2026</a:t>
             </a:fld>
             <a:endParaRPr lang="en-US"/>
           </a:p>
@@ -3222,7 +3223,7 @@
           <a:p>
             <a:fld id="{5BCAD085-E8A6-8845-BD4E-CB4CCA059FC4}" type="datetimeFigureOut">
               <a:rPr lang="en-US" smtClean="0"/>
-              <a:t>8/20/2026</a:t>
+              <a:t>9/16/2026</a:t>
             </a:fld>
             <a:endParaRPr lang="en-US"/>
           </a:p>
@@ -3340,7 +3341,7 @@
           <a:p>
             <a:fld id="{5BCAD085-E8A6-8845-BD4E-CB4CCA059FC4}" type="datetimeFigureOut">
               <a:rPr lang="en-US" smtClean="0"/>
-              <a:t>8/20/2026</a:t>
+              <a:t>9/16/2026</a:t>
             </a:fld>
             <a:endParaRPr lang="en-US"/>
           </a:p>
@@ -3435,7 +3436,7 @@
           <a:p>
             <a:fld id="{5BCAD085-E8A6-8845-BD4E-CB4CCA059FC4}" type="datetimeFigureOut">
               <a:rPr lang="en-US" smtClean="0"/>
-              <a:t>8/20/2026</a:t>
+              <a:t>9/16/2026</a:t>
             </a:fld>
             <a:endParaRPr lang="en-US"/>
           </a:p>
@@ -3712,7 +3713,7 @@
           <a:p>
             <a:fld id="{5BCAD085-E8A6-8845-BD4E-CB4CCA059FC4}" type="datetimeFigureOut">
               <a:rPr lang="en-US" smtClean="0"/>
-              <a:t>8/20/2026</a:t>
+              <a:t>9/16/2026</a:t>
             </a:fld>
             <a:endParaRPr lang="en-US"/>
           </a:p>
@@ -3965,7 +3966,7 @@
           <a:p>
             <a:fld id="{5BCAD085-E8A6-8845-BD4E-CB4CCA059FC4}" type="datetimeFigureOut">
               <a:rPr lang="en-US" smtClean="0"/>
-              <a:t>8/20/2026</a:t>
+              <a:t>9/16/2026</a:t>
             </a:fld>
             <a:endParaRPr lang="en-US"/>
           </a:p>
@@ -4178,7 +4179,7 @@
           <a:p>
             <a:fld id="{5BCAD085-E8A6-8845-BD4E-CB4CCA059FC4}" type="datetimeFigureOut">
               <a:rPr lang="en-US" smtClean="0"/>
-              <a:t>8/20/2026</a:t>
+              <a:t>9/16/2026</a:t>
             </a:fld>
             <a:endParaRPr lang="en-US"/>
           </a:p>
@@ -23001,67 +23002,2215 @@
       </p:grpSpPr>
       <p:sp>
         <p:nvSpPr>
-          <p:cNvPr id="2" name="TextBox 1"/>
+          <p:cNvPr id="2" name="Rectangle 1"/>
+          <p:cNvSpPr/>
+          <p:nvPr/>
+        </p:nvSpPr>
+        <p:spPr>
+          <a:xfrm>
+            <a:off x="0" y="0"/>
+            <a:ext cx="12192000" cy="6858000"/>
+          </a:xfrm>
+          <a:prstGeom prst="rect">
+            <a:avLst/>
+          </a:prstGeom>
+          <a:solidFill>
+            <a:srgbClr val="FFFFFF"/>
+          </a:solidFill>
+          <a:ln>
+            <a:noFill/>
+          </a:ln>
+          <a:effectLst/>
+        </p:spPr>
+        <p:style>
+          <a:lnRef idx="1">
+            <a:schemeClr val="accent1"/>
+          </a:lnRef>
+          <a:fillRef idx="3">
+            <a:schemeClr val="accent1"/>
+          </a:fillRef>
+          <a:effectRef idx="2">
+            <a:schemeClr val="accent1"/>
+          </a:effectRef>
+          <a:fontRef idx="minor">
+            <a:schemeClr val="lt1"/>
+          </a:fontRef>
+        </p:style>
+        <p:txBody>
+          <a:bodyPr lIns="117226" tIns="58613" rIns="117226" bIns="58613" rtlCol="0" anchor="ctr"/>
+          <a:lstStyle/>
+          <a:p>
+            <a:pPr algn="ctr"/>
+            <a:endParaRPr/>
+          </a:p>
+        </p:txBody>
+      </p:sp>
+      <p:sp>
+        <p:nvSpPr>
+          <p:cNvPr id="3" name="Rectangle 2"/>
+          <p:cNvSpPr/>
+          <p:nvPr/>
+        </p:nvSpPr>
+        <p:spPr>
+          <a:xfrm>
+            <a:off x="0" y="0"/>
+            <a:ext cx="12192000" cy="592531"/>
+          </a:xfrm>
+          <a:prstGeom prst="rect">
+            <a:avLst/>
+          </a:prstGeom>
+          <a:solidFill>
+            <a:srgbClr val="C00000"/>
+          </a:solidFill>
+          <a:ln>
+            <a:noFill/>
+          </a:ln>
+          <a:effectLst/>
+        </p:spPr>
+        <p:style>
+          <a:lnRef idx="1">
+            <a:schemeClr val="accent1"/>
+          </a:lnRef>
+          <a:fillRef idx="3">
+            <a:schemeClr val="accent1"/>
+          </a:fillRef>
+          <a:effectRef idx="2">
+            <a:schemeClr val="accent1"/>
+          </a:effectRef>
+          <a:fontRef idx="minor">
+            <a:schemeClr val="lt1"/>
+          </a:fontRef>
+        </p:style>
+        <p:txBody>
+          <a:bodyPr lIns="117226" tIns="58613" rIns="117226" bIns="58613" rtlCol="0" anchor="ctr"/>
+          <a:lstStyle/>
+          <a:p>
+            <a:pPr algn="ctr"/>
+            <a:endParaRPr/>
+          </a:p>
+        </p:txBody>
+      </p:sp>
+      <p:sp>
+        <p:nvSpPr>
+          <p:cNvPr id="4" name="Rectangle 3"/>
+          <p:cNvSpPr/>
+          <p:nvPr/>
+        </p:nvSpPr>
+        <p:spPr>
+          <a:xfrm>
+            <a:off x="0" y="592531"/>
+            <a:ext cx="12192000" cy="32918"/>
+          </a:xfrm>
+          <a:prstGeom prst="rect">
+            <a:avLst/>
+          </a:prstGeom>
+          <a:solidFill>
+            <a:srgbClr val="FBBF24"/>
+          </a:solidFill>
+          <a:ln>
+            <a:noFill/>
+          </a:ln>
+          <a:effectLst/>
+        </p:spPr>
+        <p:style>
+          <a:lnRef idx="1">
+            <a:schemeClr val="accent1"/>
+          </a:lnRef>
+          <a:fillRef idx="3">
+            <a:schemeClr val="accent1"/>
+          </a:fillRef>
+          <a:effectRef idx="2">
+            <a:schemeClr val="accent1"/>
+          </a:effectRef>
+          <a:fontRef idx="minor">
+            <a:schemeClr val="lt1"/>
+          </a:fontRef>
+        </p:style>
+        <p:txBody>
+          <a:bodyPr lIns="117226" tIns="58613" rIns="117226" bIns="58613" rtlCol="0" anchor="ctr"/>
+          <a:lstStyle/>
+          <a:p>
+            <a:pPr algn="ctr"/>
+            <a:endParaRPr/>
+          </a:p>
+        </p:txBody>
+      </p:sp>
+      <p:sp>
+        <p:nvSpPr>
+          <p:cNvPr id="5" name="TextBox 4"/>
           <p:cNvSpPr txBox="1"/>
           <p:nvPr/>
         </p:nvSpPr>
         <p:spPr>
           <a:xfrm>
-            <a:off x="1200149" y="2644103"/>
-            <a:ext cx="10020301" cy="1015663"/>
-          </a:xfrm>
-          <a:prstGeom prst="rect">
-            <a:avLst/>
-          </a:prstGeom>
-          <a:noFill/>
-        </p:spPr>
-        <p:txBody>
-          <a:bodyPr wrap="square" anchor="ctr">
+            <a:off x="365760" y="62635"/>
+            <a:ext cx="7315200" cy="478235"/>
+          </a:xfrm>
+          <a:prstGeom prst="rect">
+            <a:avLst/>
+          </a:prstGeom>
+          <a:solidFill>
+            <a:srgbClr val="C00000"/>
+          </a:solidFill>
+        </p:spPr>
+        <p:txBody>
+          <a:bodyPr wrap="square" lIns="58613" tIns="23445" rIns="58613" bIns="23445" anchor="ctr">
             <a:spAutoFit/>
           </a:bodyPr>
           <a:lstStyle/>
           <a:p>
-            <a:pPr algn="ctr"/>
-            <a:r>
-              <a:rPr lang="en-US" sz="6000" b="1" dirty="0" smtClean="0">
-                <a:solidFill>
-                  <a:srgbClr val="F47629"/>
-                </a:solidFill>
-                <a:latin typeface="+mj-lt"/>
-              </a:rPr>
-              <a:t>B2B</a:t>
-            </a:r>
-            <a:r>
-              <a:rPr lang="ru-RU" sz="6000" b="1" dirty="0" smtClean="0">
-                <a:solidFill>
-                  <a:srgbClr val="F47629"/>
-                </a:solidFill>
-                <a:latin typeface="+mj-lt"/>
-              </a:rPr>
-              <a:t> Канал</a:t>
-            </a:r>
-            <a:r>
-              <a:rPr lang="en-US" sz="6000" b="1" dirty="0" smtClean="0">
-                <a:solidFill>
-                  <a:srgbClr val="F47629"/>
-                </a:solidFill>
-                <a:latin typeface="+mj-lt"/>
-              </a:rPr>
-              <a:t> </a:t>
-            </a:r>
-            <a:endParaRPr sz="6000" b="1" dirty="0">
-              <a:solidFill>
-                <a:srgbClr val="F47629"/>
-              </a:solidFill>
-              <a:latin typeface="+mj-lt"/>
-            </a:endParaRPr>
+            <a:pPr algn="l"/>
+            <a:r>
+              <a:rPr sz="2800" b="1" dirty="0">
+                <a:solidFill>
+                  <a:srgbClr val="FFFFFF"/>
+                </a:solidFill>
+                <a:latin typeface="Arial"/>
+              </a:rPr>
+              <a:t>KPI МАГАЗИНА СЕТИ</a:t>
+            </a:r>
+          </a:p>
+        </p:txBody>
+      </p:sp>
+      <p:sp>
+        <p:nvSpPr>
+          <p:cNvPr id="7" name="Rectangle 6"/>
+          <p:cNvSpPr/>
+          <p:nvPr/>
+        </p:nvSpPr>
+        <p:spPr>
+          <a:xfrm>
+            <a:off x="335360" y="1301109"/>
+            <a:ext cx="11460480" cy="373075"/>
+          </a:xfrm>
+          <a:prstGeom prst="rect">
+            <a:avLst/>
+          </a:prstGeom>
+          <a:solidFill>
+            <a:srgbClr val="DBEAFE"/>
+          </a:solidFill>
+          <a:ln>
+            <a:noFill/>
+          </a:ln>
+          <a:effectLst/>
+        </p:spPr>
+        <p:style>
+          <a:lnRef idx="1">
+            <a:schemeClr val="accent1"/>
+          </a:lnRef>
+          <a:fillRef idx="3">
+            <a:schemeClr val="accent1"/>
+          </a:fillRef>
+          <a:effectRef idx="2">
+            <a:schemeClr val="accent1"/>
+          </a:effectRef>
+          <a:fontRef idx="minor">
+            <a:schemeClr val="lt1"/>
+          </a:fontRef>
+        </p:style>
+        <p:txBody>
+          <a:bodyPr lIns="117226" tIns="58613" rIns="117226" bIns="58613" rtlCol="0" anchor="ctr"/>
+          <a:lstStyle/>
+          <a:p>
+            <a:pPr algn="ctr"/>
+            <a:endParaRPr/>
+          </a:p>
+        </p:txBody>
+      </p:sp>
+      <p:sp>
+        <p:nvSpPr>
+          <p:cNvPr id="8" name="TextBox 7"/>
+          <p:cNvSpPr txBox="1"/>
+          <p:nvPr/>
+        </p:nvSpPr>
+        <p:spPr>
+          <a:xfrm>
+            <a:off x="335360" y="1274959"/>
+            <a:ext cx="11460480" cy="370513"/>
+          </a:xfrm>
+          <a:prstGeom prst="rect">
+            <a:avLst/>
+          </a:prstGeom>
+          <a:noFill/>
+        </p:spPr>
+        <p:txBody>
+          <a:bodyPr wrap="square" lIns="58613" tIns="23445" rIns="58613" bIns="23445" anchor="ctr">
+            <a:spAutoFit/>
+          </a:bodyPr>
+          <a:lstStyle/>
+          <a:p>
+            <a:pPr algn="l"/>
+            <a:r>
+              <a:rPr sz="2100" b="1">
+                <a:solidFill>
+                  <a:srgbClr val="1E3A5F"/>
+                </a:solidFill>
+                <a:latin typeface="Arial"/>
+              </a:rPr>
+              <a:t>Параметры оценки одного магазина Лемана Про</a:t>
+            </a:r>
+          </a:p>
+        </p:txBody>
+      </p:sp>
+      <p:sp>
+        <p:nvSpPr>
+          <p:cNvPr id="10" name="Rectangle 9"/>
+          <p:cNvSpPr/>
+          <p:nvPr/>
+        </p:nvSpPr>
+        <p:spPr>
+          <a:xfrm>
+            <a:off x="335360" y="2418719"/>
+            <a:ext cx="731520" cy="416966"/>
+          </a:xfrm>
+          <a:prstGeom prst="rect">
+            <a:avLst/>
+          </a:prstGeom>
+          <a:solidFill>
+            <a:srgbClr val="1E3A5F"/>
+          </a:solidFill>
+          <a:ln>
+            <a:noFill/>
+          </a:ln>
+          <a:effectLst/>
+        </p:spPr>
+        <p:style>
+          <a:lnRef idx="1">
+            <a:schemeClr val="accent1"/>
+          </a:lnRef>
+          <a:fillRef idx="3">
+            <a:schemeClr val="accent1"/>
+          </a:fillRef>
+          <a:effectRef idx="2">
+            <a:schemeClr val="accent1"/>
+          </a:effectRef>
+          <a:fontRef idx="minor">
+            <a:schemeClr val="lt1"/>
+          </a:fontRef>
+        </p:style>
+        <p:txBody>
+          <a:bodyPr lIns="117226" tIns="58613" rIns="117226" bIns="58613" rtlCol="0" anchor="ctr"/>
+          <a:lstStyle/>
+          <a:p>
+            <a:pPr algn="ctr"/>
+            <a:endParaRPr/>
+          </a:p>
+        </p:txBody>
+      </p:sp>
+      <p:sp>
+        <p:nvSpPr>
+          <p:cNvPr id="11" name="TextBox 10"/>
+          <p:cNvSpPr txBox="1"/>
+          <p:nvPr/>
+        </p:nvSpPr>
+        <p:spPr>
+          <a:xfrm>
+            <a:off x="335360" y="2495806"/>
+            <a:ext cx="731520" cy="262792"/>
+          </a:xfrm>
+          <a:prstGeom prst="rect">
+            <a:avLst/>
+          </a:prstGeom>
+          <a:noFill/>
+        </p:spPr>
+        <p:txBody>
+          <a:bodyPr wrap="square" lIns="58613" tIns="23445" rIns="58613" bIns="23445" anchor="ctr">
+            <a:spAutoFit/>
+          </a:bodyPr>
+          <a:lstStyle/>
+          <a:p>
+            <a:pPr algn="ctr"/>
+            <a:r>
+              <a:rPr sz="1400" b="1">
+                <a:solidFill>
+                  <a:srgbClr val="FFFFFF"/>
+                </a:solidFill>
+                <a:latin typeface="Arial"/>
+              </a:rPr>
+              <a:t>Этап</a:t>
+            </a:r>
+          </a:p>
+        </p:txBody>
+      </p:sp>
+      <p:sp>
+        <p:nvSpPr>
+          <p:cNvPr id="12" name="Rectangle 11"/>
+          <p:cNvSpPr/>
+          <p:nvPr/>
+        </p:nvSpPr>
+        <p:spPr>
+          <a:xfrm>
+            <a:off x="1066880" y="2418719"/>
+            <a:ext cx="4572000" cy="416966"/>
+          </a:xfrm>
+          <a:prstGeom prst="rect">
+            <a:avLst/>
+          </a:prstGeom>
+          <a:solidFill>
+            <a:srgbClr val="1E3A5F"/>
+          </a:solidFill>
+          <a:ln>
+            <a:noFill/>
+          </a:ln>
+          <a:effectLst/>
+        </p:spPr>
+        <p:style>
+          <a:lnRef idx="1">
+            <a:schemeClr val="accent1"/>
+          </a:lnRef>
+          <a:fillRef idx="3">
+            <a:schemeClr val="accent1"/>
+          </a:fillRef>
+          <a:effectRef idx="2">
+            <a:schemeClr val="accent1"/>
+          </a:effectRef>
+          <a:fontRef idx="minor">
+            <a:schemeClr val="lt1"/>
+          </a:fontRef>
+        </p:style>
+        <p:txBody>
+          <a:bodyPr lIns="117226" tIns="58613" rIns="117226" bIns="58613" rtlCol="0" anchor="ctr"/>
+          <a:lstStyle/>
+          <a:p>
+            <a:pPr algn="ctr"/>
+            <a:endParaRPr/>
+          </a:p>
+        </p:txBody>
+      </p:sp>
+      <p:sp>
+        <p:nvSpPr>
+          <p:cNvPr id="13" name="TextBox 12"/>
+          <p:cNvSpPr txBox="1"/>
+          <p:nvPr/>
+        </p:nvSpPr>
+        <p:spPr>
+          <a:xfrm>
+            <a:off x="1066880" y="2495806"/>
+            <a:ext cx="4572000" cy="262792"/>
+          </a:xfrm>
+          <a:prstGeom prst="rect">
+            <a:avLst/>
+          </a:prstGeom>
+          <a:noFill/>
+        </p:spPr>
+        <p:txBody>
+          <a:bodyPr wrap="square" lIns="58613" tIns="23445" rIns="58613" bIns="23445" anchor="ctr">
+            <a:spAutoFit/>
+          </a:bodyPr>
+          <a:lstStyle/>
+          <a:p>
+            <a:pPr algn="ctr"/>
+            <a:r>
+              <a:rPr sz="1400" b="1">
+                <a:solidFill>
+                  <a:srgbClr val="FFFFFF"/>
+                </a:solidFill>
+                <a:latin typeface="Arial"/>
+              </a:rPr>
+              <a:t>Метрика</a:t>
+            </a:r>
+          </a:p>
+        </p:txBody>
+      </p:sp>
+      <p:sp>
+        <p:nvSpPr>
+          <p:cNvPr id="14" name="Rectangle 13"/>
+          <p:cNvSpPr/>
+          <p:nvPr/>
+        </p:nvSpPr>
+        <p:spPr>
+          <a:xfrm>
+            <a:off x="5638880" y="2418719"/>
+            <a:ext cx="3657600" cy="416966"/>
+          </a:xfrm>
+          <a:prstGeom prst="rect">
+            <a:avLst/>
+          </a:prstGeom>
+          <a:solidFill>
+            <a:srgbClr val="1E3A5F"/>
+          </a:solidFill>
+          <a:ln>
+            <a:noFill/>
+          </a:ln>
+          <a:effectLst/>
+        </p:spPr>
+        <p:style>
+          <a:lnRef idx="1">
+            <a:schemeClr val="accent1"/>
+          </a:lnRef>
+          <a:fillRef idx="3">
+            <a:schemeClr val="accent1"/>
+          </a:fillRef>
+          <a:effectRef idx="2">
+            <a:schemeClr val="accent1"/>
+          </a:effectRef>
+          <a:fontRef idx="minor">
+            <a:schemeClr val="lt1"/>
+          </a:fontRef>
+        </p:style>
+        <p:txBody>
+          <a:bodyPr lIns="117226" tIns="58613" rIns="117226" bIns="58613" rtlCol="0" anchor="ctr"/>
+          <a:lstStyle/>
+          <a:p>
+            <a:pPr algn="ctr"/>
+            <a:endParaRPr/>
+          </a:p>
+        </p:txBody>
+      </p:sp>
+      <p:sp>
+        <p:nvSpPr>
+          <p:cNvPr id="15" name="TextBox 14"/>
+          <p:cNvSpPr txBox="1"/>
+          <p:nvPr/>
+        </p:nvSpPr>
+        <p:spPr>
+          <a:xfrm>
+            <a:off x="5638880" y="2495806"/>
+            <a:ext cx="3657600" cy="262792"/>
+          </a:xfrm>
+          <a:prstGeom prst="rect">
+            <a:avLst/>
+          </a:prstGeom>
+          <a:noFill/>
+        </p:spPr>
+        <p:txBody>
+          <a:bodyPr wrap="square" lIns="58613" tIns="23445" rIns="58613" bIns="23445" anchor="ctr">
+            <a:spAutoFit/>
+          </a:bodyPr>
+          <a:lstStyle/>
+          <a:p>
+            <a:pPr algn="ctr"/>
+            <a:r>
+              <a:rPr sz="1400" b="1">
+                <a:solidFill>
+                  <a:srgbClr val="FFFFFF"/>
+                </a:solidFill>
+                <a:latin typeface="Arial"/>
+              </a:rPr>
+              <a:t>Целевое значение</a:t>
+            </a:r>
+          </a:p>
+        </p:txBody>
+      </p:sp>
+      <p:sp>
+        <p:nvSpPr>
+          <p:cNvPr id="16" name="Rectangle 15"/>
+          <p:cNvSpPr/>
+          <p:nvPr/>
+        </p:nvSpPr>
+        <p:spPr>
+          <a:xfrm>
+            <a:off x="9296480" y="2418719"/>
+            <a:ext cx="2462784" cy="416966"/>
+          </a:xfrm>
+          <a:prstGeom prst="rect">
+            <a:avLst/>
+          </a:prstGeom>
+          <a:solidFill>
+            <a:srgbClr val="1E3A5F"/>
+          </a:solidFill>
+          <a:ln>
+            <a:noFill/>
+          </a:ln>
+          <a:effectLst/>
+        </p:spPr>
+        <p:style>
+          <a:lnRef idx="1">
+            <a:schemeClr val="accent1"/>
+          </a:lnRef>
+          <a:fillRef idx="3">
+            <a:schemeClr val="accent1"/>
+          </a:fillRef>
+          <a:effectRef idx="2">
+            <a:schemeClr val="accent1"/>
+          </a:effectRef>
+          <a:fontRef idx="minor">
+            <a:schemeClr val="lt1"/>
+          </a:fontRef>
+        </p:style>
+        <p:txBody>
+          <a:bodyPr lIns="117226" tIns="58613" rIns="117226" bIns="58613" rtlCol="0" anchor="ctr"/>
+          <a:lstStyle/>
+          <a:p>
+            <a:pPr algn="ctr"/>
+            <a:endParaRPr/>
+          </a:p>
+        </p:txBody>
+      </p:sp>
+      <p:sp>
+        <p:nvSpPr>
+          <p:cNvPr id="17" name="TextBox 16"/>
+          <p:cNvSpPr txBox="1"/>
+          <p:nvPr/>
+        </p:nvSpPr>
+        <p:spPr>
+          <a:xfrm>
+            <a:off x="9296480" y="2495806"/>
+            <a:ext cx="2462784" cy="262792"/>
+          </a:xfrm>
+          <a:prstGeom prst="rect">
+            <a:avLst/>
+          </a:prstGeom>
+          <a:noFill/>
+        </p:spPr>
+        <p:txBody>
+          <a:bodyPr wrap="square" lIns="58613" tIns="23445" rIns="58613" bIns="23445" anchor="ctr">
+            <a:spAutoFit/>
+          </a:bodyPr>
+          <a:lstStyle/>
+          <a:p>
+            <a:pPr algn="ctr"/>
+            <a:r>
+              <a:rPr sz="1400" b="1">
+                <a:solidFill>
+                  <a:srgbClr val="FFFFFF"/>
+                </a:solidFill>
+                <a:latin typeface="Arial"/>
+              </a:rPr>
+              <a:t>Периодичность</a:t>
+            </a:r>
+          </a:p>
+        </p:txBody>
+      </p:sp>
+      <p:sp>
+        <p:nvSpPr>
+          <p:cNvPr id="18" name="Rectangle 17"/>
+          <p:cNvSpPr/>
+          <p:nvPr/>
+        </p:nvSpPr>
+        <p:spPr>
+          <a:xfrm>
+            <a:off x="335360" y="2879576"/>
+            <a:ext cx="731520" cy="460858"/>
+          </a:xfrm>
+          <a:prstGeom prst="rect">
+            <a:avLst/>
+          </a:prstGeom>
+          <a:solidFill>
+            <a:srgbClr val="C62828"/>
+          </a:solidFill>
+          <a:ln>
+            <a:noFill/>
+          </a:ln>
+          <a:effectLst/>
+        </p:spPr>
+        <p:style>
+          <a:lnRef idx="1">
+            <a:schemeClr val="accent1"/>
+          </a:lnRef>
+          <a:fillRef idx="3">
+            <a:schemeClr val="accent1"/>
+          </a:fillRef>
+          <a:effectRef idx="2">
+            <a:schemeClr val="accent1"/>
+          </a:effectRef>
+          <a:fontRef idx="minor">
+            <a:schemeClr val="lt1"/>
+          </a:fontRef>
+        </p:style>
+        <p:txBody>
+          <a:bodyPr lIns="117226" tIns="58613" rIns="117226" bIns="58613" rtlCol="0" anchor="ctr"/>
+          <a:lstStyle/>
+          <a:p>
+            <a:pPr algn="ctr"/>
+            <a:endParaRPr/>
+          </a:p>
+        </p:txBody>
+      </p:sp>
+      <p:sp>
+        <p:nvSpPr>
+          <p:cNvPr id="19" name="TextBox 18"/>
+          <p:cNvSpPr txBox="1"/>
+          <p:nvPr/>
+        </p:nvSpPr>
+        <p:spPr>
+          <a:xfrm>
+            <a:off x="335360" y="2947831"/>
+            <a:ext cx="731520" cy="324347"/>
+          </a:xfrm>
+          <a:prstGeom prst="rect">
+            <a:avLst/>
+          </a:prstGeom>
+          <a:noFill/>
+        </p:spPr>
+        <p:txBody>
+          <a:bodyPr wrap="square" lIns="58613" tIns="23445" rIns="58613" bIns="23445" anchor="ctr">
+            <a:spAutoFit/>
+          </a:bodyPr>
+          <a:lstStyle/>
+          <a:p>
+            <a:pPr algn="ctr"/>
+            <a:r>
+              <a:rPr b="1">
+                <a:solidFill>
+                  <a:srgbClr val="FFFFFF"/>
+                </a:solidFill>
+                <a:latin typeface="Arial"/>
+              </a:rPr>
+              <a:t>1</a:t>
+            </a:r>
+          </a:p>
+        </p:txBody>
+      </p:sp>
+      <p:sp>
+        <p:nvSpPr>
+          <p:cNvPr id="20" name="Rectangle 19"/>
+          <p:cNvSpPr/>
+          <p:nvPr/>
+        </p:nvSpPr>
+        <p:spPr>
+          <a:xfrm>
+            <a:off x="1066880" y="2879576"/>
+            <a:ext cx="4572000" cy="460858"/>
+          </a:xfrm>
+          <a:prstGeom prst="rect">
+            <a:avLst/>
+          </a:prstGeom>
+          <a:solidFill>
+            <a:srgbClr val="E5E7EB"/>
+          </a:solidFill>
+          <a:ln>
+            <a:noFill/>
+          </a:ln>
+          <a:effectLst/>
+        </p:spPr>
+        <p:style>
+          <a:lnRef idx="1">
+            <a:schemeClr val="accent1"/>
+          </a:lnRef>
+          <a:fillRef idx="3">
+            <a:schemeClr val="accent1"/>
+          </a:fillRef>
+          <a:effectRef idx="2">
+            <a:schemeClr val="accent1"/>
+          </a:effectRef>
+          <a:fontRef idx="minor">
+            <a:schemeClr val="lt1"/>
+          </a:fontRef>
+        </p:style>
+        <p:txBody>
+          <a:bodyPr lIns="117226" tIns="58613" rIns="117226" bIns="58613" rtlCol="0" anchor="ctr"/>
+          <a:lstStyle/>
+          <a:p>
+            <a:pPr algn="ctr"/>
+            <a:endParaRPr/>
+          </a:p>
+        </p:txBody>
+      </p:sp>
+      <p:sp>
+        <p:nvSpPr>
+          <p:cNvPr id="21" name="TextBox 20"/>
+          <p:cNvSpPr txBox="1"/>
+          <p:nvPr/>
+        </p:nvSpPr>
+        <p:spPr>
+          <a:xfrm>
+            <a:off x="1152224" y="2986304"/>
+            <a:ext cx="4389120" cy="247403"/>
+          </a:xfrm>
+          <a:prstGeom prst="rect">
+            <a:avLst/>
+          </a:prstGeom>
+          <a:noFill/>
+        </p:spPr>
+        <p:txBody>
+          <a:bodyPr wrap="square" lIns="58613" tIns="23445" rIns="58613" bIns="23445" anchor="ctr">
+            <a:spAutoFit/>
+          </a:bodyPr>
+          <a:lstStyle/>
+          <a:p>
+            <a:pPr algn="l"/>
+            <a:r>
+              <a:rPr sz="1300" b="1">
+                <a:solidFill>
+                  <a:srgbClr val="1A1F36"/>
+                </a:solidFill>
+                <a:latin typeface="Arial"/>
+              </a:rPr>
+              <a:t>Соблюдение планограммы TITAN</a:t>
+            </a:r>
+          </a:p>
+        </p:txBody>
+      </p:sp>
+      <p:sp>
+        <p:nvSpPr>
+          <p:cNvPr id="22" name="Rectangle 21"/>
+          <p:cNvSpPr/>
+          <p:nvPr/>
+        </p:nvSpPr>
+        <p:spPr>
+          <a:xfrm>
+            <a:off x="5638880" y="2879576"/>
+            <a:ext cx="3657600" cy="460858"/>
+          </a:xfrm>
+          <a:prstGeom prst="rect">
+            <a:avLst/>
+          </a:prstGeom>
+          <a:solidFill>
+            <a:srgbClr val="E5E7EB"/>
+          </a:solidFill>
+          <a:ln>
+            <a:noFill/>
+          </a:ln>
+          <a:effectLst/>
+        </p:spPr>
+        <p:style>
+          <a:lnRef idx="1">
+            <a:schemeClr val="accent1"/>
+          </a:lnRef>
+          <a:fillRef idx="3">
+            <a:schemeClr val="accent1"/>
+          </a:fillRef>
+          <a:effectRef idx="2">
+            <a:schemeClr val="accent1"/>
+          </a:effectRef>
+          <a:fontRef idx="minor">
+            <a:schemeClr val="lt1"/>
+          </a:fontRef>
+        </p:style>
+        <p:txBody>
+          <a:bodyPr lIns="117226" tIns="58613" rIns="117226" bIns="58613" rtlCol="0" anchor="ctr"/>
+          <a:lstStyle/>
+          <a:p>
+            <a:pPr algn="ctr"/>
+            <a:endParaRPr/>
+          </a:p>
+        </p:txBody>
+      </p:sp>
+      <p:sp>
+        <p:nvSpPr>
+          <p:cNvPr id="23" name="TextBox 22"/>
+          <p:cNvSpPr txBox="1"/>
+          <p:nvPr/>
+        </p:nvSpPr>
+        <p:spPr>
+          <a:xfrm>
+            <a:off x="5724224" y="2986304"/>
+            <a:ext cx="3474720" cy="247403"/>
+          </a:xfrm>
+          <a:prstGeom prst="rect">
+            <a:avLst/>
+          </a:prstGeom>
+          <a:noFill/>
+        </p:spPr>
+        <p:txBody>
+          <a:bodyPr wrap="square" lIns="58613" tIns="23445" rIns="58613" bIns="23445" anchor="ctr">
+            <a:spAutoFit/>
+          </a:bodyPr>
+          <a:lstStyle/>
+          <a:p>
+            <a:pPr algn="l"/>
+            <a:r>
+              <a:rPr sz="1300" b="1">
+                <a:solidFill>
+                  <a:srgbClr val="C62828"/>
+                </a:solidFill>
+                <a:latin typeface="Arial"/>
+              </a:rPr>
+              <a:t>95% SKU по эталону</a:t>
+            </a:r>
+          </a:p>
+        </p:txBody>
+      </p:sp>
+      <p:sp>
+        <p:nvSpPr>
+          <p:cNvPr id="24" name="Rectangle 23"/>
+          <p:cNvSpPr/>
+          <p:nvPr/>
+        </p:nvSpPr>
+        <p:spPr>
+          <a:xfrm>
+            <a:off x="9296480" y="2879576"/>
+            <a:ext cx="2462784" cy="460858"/>
+          </a:xfrm>
+          <a:prstGeom prst="rect">
+            <a:avLst/>
+          </a:prstGeom>
+          <a:solidFill>
+            <a:srgbClr val="E5E7EB"/>
+          </a:solidFill>
+          <a:ln>
+            <a:noFill/>
+          </a:ln>
+          <a:effectLst/>
+        </p:spPr>
+        <p:style>
+          <a:lnRef idx="1">
+            <a:schemeClr val="accent1"/>
+          </a:lnRef>
+          <a:fillRef idx="3">
+            <a:schemeClr val="accent1"/>
+          </a:fillRef>
+          <a:effectRef idx="2">
+            <a:schemeClr val="accent1"/>
+          </a:effectRef>
+          <a:fontRef idx="minor">
+            <a:schemeClr val="lt1"/>
+          </a:fontRef>
+        </p:style>
+        <p:txBody>
+          <a:bodyPr lIns="117226" tIns="58613" rIns="117226" bIns="58613" rtlCol="0" anchor="ctr"/>
+          <a:lstStyle/>
+          <a:p>
+            <a:pPr algn="ctr"/>
+            <a:endParaRPr/>
+          </a:p>
+        </p:txBody>
+      </p:sp>
+      <p:sp>
+        <p:nvSpPr>
+          <p:cNvPr id="25" name="TextBox 24"/>
+          <p:cNvSpPr txBox="1"/>
+          <p:nvPr/>
+        </p:nvSpPr>
+        <p:spPr>
+          <a:xfrm>
+            <a:off x="9381824" y="2993998"/>
+            <a:ext cx="2292096" cy="232014"/>
+          </a:xfrm>
+          <a:prstGeom prst="rect">
+            <a:avLst/>
+          </a:prstGeom>
+          <a:noFill/>
+        </p:spPr>
+        <p:txBody>
+          <a:bodyPr wrap="square" lIns="58613" tIns="23445" rIns="58613" bIns="23445" anchor="ctr">
+            <a:spAutoFit/>
+          </a:bodyPr>
+          <a:lstStyle/>
+          <a:p>
+            <a:pPr algn="l"/>
+            <a:r>
+              <a:rPr sz="1200">
+                <a:solidFill>
+                  <a:srgbClr val="9CA3AF"/>
+                </a:solidFill>
+                <a:latin typeface="Arial"/>
+              </a:rPr>
+              <a:t>Еженедельно</a:t>
+            </a:r>
+          </a:p>
+        </p:txBody>
+      </p:sp>
+      <p:sp>
+        <p:nvSpPr>
+          <p:cNvPr id="26" name="Rectangle 25"/>
+          <p:cNvSpPr/>
+          <p:nvPr/>
+        </p:nvSpPr>
+        <p:spPr>
+          <a:xfrm>
+            <a:off x="335360" y="3340434"/>
+            <a:ext cx="731520" cy="460858"/>
+          </a:xfrm>
+          <a:prstGeom prst="rect">
+            <a:avLst/>
+          </a:prstGeom>
+          <a:solidFill>
+            <a:srgbClr val="C62828"/>
+          </a:solidFill>
+          <a:ln>
+            <a:noFill/>
+          </a:ln>
+          <a:effectLst/>
+        </p:spPr>
+        <p:style>
+          <a:lnRef idx="1">
+            <a:schemeClr val="accent1"/>
+          </a:lnRef>
+          <a:fillRef idx="3">
+            <a:schemeClr val="accent1"/>
+          </a:fillRef>
+          <a:effectRef idx="2">
+            <a:schemeClr val="accent1"/>
+          </a:effectRef>
+          <a:fontRef idx="minor">
+            <a:schemeClr val="lt1"/>
+          </a:fontRef>
+        </p:style>
+        <p:txBody>
+          <a:bodyPr lIns="117226" tIns="58613" rIns="117226" bIns="58613" rtlCol="0" anchor="ctr"/>
+          <a:lstStyle/>
+          <a:p>
+            <a:pPr algn="ctr"/>
+            <a:endParaRPr/>
+          </a:p>
+        </p:txBody>
+      </p:sp>
+      <p:sp>
+        <p:nvSpPr>
+          <p:cNvPr id="27" name="TextBox 26"/>
+          <p:cNvSpPr txBox="1"/>
+          <p:nvPr/>
+        </p:nvSpPr>
+        <p:spPr>
+          <a:xfrm>
+            <a:off x="335360" y="3408689"/>
+            <a:ext cx="731520" cy="324347"/>
+          </a:xfrm>
+          <a:prstGeom prst="rect">
+            <a:avLst/>
+          </a:prstGeom>
+          <a:noFill/>
+        </p:spPr>
+        <p:txBody>
+          <a:bodyPr wrap="square" lIns="58613" tIns="23445" rIns="58613" bIns="23445" anchor="ctr">
+            <a:spAutoFit/>
+          </a:bodyPr>
+          <a:lstStyle/>
+          <a:p>
+            <a:pPr algn="ctr"/>
+            <a:r>
+              <a:rPr b="1">
+                <a:solidFill>
+                  <a:srgbClr val="FFFFFF"/>
+                </a:solidFill>
+                <a:latin typeface="Arial"/>
+              </a:rPr>
+              <a:t>1</a:t>
+            </a:r>
+          </a:p>
+        </p:txBody>
+      </p:sp>
+      <p:sp>
+        <p:nvSpPr>
+          <p:cNvPr id="28" name="Rectangle 27"/>
+          <p:cNvSpPr/>
+          <p:nvPr/>
+        </p:nvSpPr>
+        <p:spPr>
+          <a:xfrm>
+            <a:off x="1066880" y="3340434"/>
+            <a:ext cx="4572000" cy="460858"/>
+          </a:xfrm>
+          <a:prstGeom prst="rect">
+            <a:avLst/>
+          </a:prstGeom>
+          <a:solidFill>
+            <a:srgbClr val="FFFFFF"/>
+          </a:solidFill>
+          <a:ln>
+            <a:noFill/>
+          </a:ln>
+          <a:effectLst/>
+        </p:spPr>
+        <p:style>
+          <a:lnRef idx="1">
+            <a:schemeClr val="accent1"/>
+          </a:lnRef>
+          <a:fillRef idx="3">
+            <a:schemeClr val="accent1"/>
+          </a:fillRef>
+          <a:effectRef idx="2">
+            <a:schemeClr val="accent1"/>
+          </a:effectRef>
+          <a:fontRef idx="minor">
+            <a:schemeClr val="lt1"/>
+          </a:fontRef>
+        </p:style>
+        <p:txBody>
+          <a:bodyPr lIns="117226" tIns="58613" rIns="117226" bIns="58613" rtlCol="0" anchor="ctr"/>
+          <a:lstStyle/>
+          <a:p>
+            <a:pPr algn="ctr"/>
+            <a:endParaRPr/>
+          </a:p>
+        </p:txBody>
+      </p:sp>
+      <p:sp>
+        <p:nvSpPr>
+          <p:cNvPr id="29" name="TextBox 28"/>
+          <p:cNvSpPr txBox="1"/>
+          <p:nvPr/>
+        </p:nvSpPr>
+        <p:spPr>
+          <a:xfrm>
+            <a:off x="1152224" y="3447162"/>
+            <a:ext cx="4389120" cy="247403"/>
+          </a:xfrm>
+          <a:prstGeom prst="rect">
+            <a:avLst/>
+          </a:prstGeom>
+          <a:noFill/>
+        </p:spPr>
+        <p:txBody>
+          <a:bodyPr wrap="square" lIns="58613" tIns="23445" rIns="58613" bIns="23445" anchor="ctr">
+            <a:spAutoFit/>
+          </a:bodyPr>
+          <a:lstStyle/>
+          <a:p>
+            <a:pPr algn="l"/>
+            <a:r>
+              <a:rPr sz="1300" b="1">
+                <a:solidFill>
+                  <a:srgbClr val="1A1F36"/>
+                </a:solidFill>
+                <a:latin typeface="Arial"/>
+              </a:rPr>
+              <a:t>Наличие топ-5 цветов RAL</a:t>
+            </a:r>
+          </a:p>
+        </p:txBody>
+      </p:sp>
+      <p:sp>
+        <p:nvSpPr>
+          <p:cNvPr id="30" name="Rectangle 29"/>
+          <p:cNvSpPr/>
+          <p:nvPr/>
+        </p:nvSpPr>
+        <p:spPr>
+          <a:xfrm>
+            <a:off x="5638880" y="3340434"/>
+            <a:ext cx="3657600" cy="460858"/>
+          </a:xfrm>
+          <a:prstGeom prst="rect">
+            <a:avLst/>
+          </a:prstGeom>
+          <a:solidFill>
+            <a:srgbClr val="FFFFFF"/>
+          </a:solidFill>
+          <a:ln>
+            <a:noFill/>
+          </a:ln>
+          <a:effectLst/>
+        </p:spPr>
+        <p:style>
+          <a:lnRef idx="1">
+            <a:schemeClr val="accent1"/>
+          </a:lnRef>
+          <a:fillRef idx="3">
+            <a:schemeClr val="accent1"/>
+          </a:fillRef>
+          <a:effectRef idx="2">
+            <a:schemeClr val="accent1"/>
+          </a:effectRef>
+          <a:fontRef idx="minor">
+            <a:schemeClr val="lt1"/>
+          </a:fontRef>
+        </p:style>
+        <p:txBody>
+          <a:bodyPr lIns="117226" tIns="58613" rIns="117226" bIns="58613" rtlCol="0" anchor="ctr"/>
+          <a:lstStyle/>
+          <a:p>
+            <a:pPr algn="ctr"/>
+            <a:endParaRPr/>
+          </a:p>
+        </p:txBody>
+      </p:sp>
+      <p:sp>
+        <p:nvSpPr>
+          <p:cNvPr id="31" name="TextBox 30"/>
+          <p:cNvSpPr txBox="1"/>
+          <p:nvPr/>
+        </p:nvSpPr>
+        <p:spPr>
+          <a:xfrm>
+            <a:off x="5724224" y="3447162"/>
+            <a:ext cx="3474720" cy="247403"/>
+          </a:xfrm>
+          <a:prstGeom prst="rect">
+            <a:avLst/>
+          </a:prstGeom>
+          <a:noFill/>
+        </p:spPr>
+        <p:txBody>
+          <a:bodyPr wrap="square" lIns="58613" tIns="23445" rIns="58613" bIns="23445" anchor="ctr">
+            <a:spAutoFit/>
+          </a:bodyPr>
+          <a:lstStyle/>
+          <a:p>
+            <a:pPr algn="l"/>
+            <a:r>
+              <a:rPr sz="1300" b="1">
+                <a:solidFill>
+                  <a:srgbClr val="C62828"/>
+                </a:solidFill>
+                <a:latin typeface="Arial"/>
+              </a:rPr>
+              <a:t>5 из 5 SKU в наличии</a:t>
+            </a:r>
+          </a:p>
+        </p:txBody>
+      </p:sp>
+      <p:sp>
+        <p:nvSpPr>
+          <p:cNvPr id="32" name="Rectangle 31"/>
+          <p:cNvSpPr/>
+          <p:nvPr/>
+        </p:nvSpPr>
+        <p:spPr>
+          <a:xfrm>
+            <a:off x="9296480" y="3340434"/>
+            <a:ext cx="2462784" cy="460858"/>
+          </a:xfrm>
+          <a:prstGeom prst="rect">
+            <a:avLst/>
+          </a:prstGeom>
+          <a:solidFill>
+            <a:srgbClr val="FFFFFF"/>
+          </a:solidFill>
+          <a:ln>
+            <a:noFill/>
+          </a:ln>
+          <a:effectLst/>
+        </p:spPr>
+        <p:style>
+          <a:lnRef idx="1">
+            <a:schemeClr val="accent1"/>
+          </a:lnRef>
+          <a:fillRef idx="3">
+            <a:schemeClr val="accent1"/>
+          </a:fillRef>
+          <a:effectRef idx="2">
+            <a:schemeClr val="accent1"/>
+          </a:effectRef>
+          <a:fontRef idx="minor">
+            <a:schemeClr val="lt1"/>
+          </a:fontRef>
+        </p:style>
+        <p:txBody>
+          <a:bodyPr lIns="117226" tIns="58613" rIns="117226" bIns="58613" rtlCol="0" anchor="ctr"/>
+          <a:lstStyle/>
+          <a:p>
+            <a:pPr algn="ctr"/>
+            <a:endParaRPr/>
+          </a:p>
+        </p:txBody>
+      </p:sp>
+      <p:sp>
+        <p:nvSpPr>
+          <p:cNvPr id="33" name="TextBox 32"/>
+          <p:cNvSpPr txBox="1"/>
+          <p:nvPr/>
+        </p:nvSpPr>
+        <p:spPr>
+          <a:xfrm>
+            <a:off x="9381824" y="3454856"/>
+            <a:ext cx="2292096" cy="232014"/>
+          </a:xfrm>
+          <a:prstGeom prst="rect">
+            <a:avLst/>
+          </a:prstGeom>
+          <a:noFill/>
+        </p:spPr>
+        <p:txBody>
+          <a:bodyPr wrap="square" lIns="58613" tIns="23445" rIns="58613" bIns="23445" anchor="ctr">
+            <a:spAutoFit/>
+          </a:bodyPr>
+          <a:lstStyle/>
+          <a:p>
+            <a:pPr algn="l"/>
+            <a:r>
+              <a:rPr sz="1200">
+                <a:solidFill>
+                  <a:srgbClr val="9CA3AF"/>
+                </a:solidFill>
+                <a:latin typeface="Arial"/>
+              </a:rPr>
+              <a:t>Еженедельно</a:t>
+            </a:r>
+          </a:p>
+        </p:txBody>
+      </p:sp>
+      <p:sp>
+        <p:nvSpPr>
+          <p:cNvPr id="34" name="Rectangle 33"/>
+          <p:cNvSpPr/>
+          <p:nvPr/>
+        </p:nvSpPr>
+        <p:spPr>
+          <a:xfrm>
+            <a:off x="335360" y="3801291"/>
+            <a:ext cx="731520" cy="460858"/>
+          </a:xfrm>
+          <a:prstGeom prst="rect">
+            <a:avLst/>
+          </a:prstGeom>
+          <a:solidFill>
+            <a:srgbClr val="C62828"/>
+          </a:solidFill>
+          <a:ln>
+            <a:noFill/>
+          </a:ln>
+          <a:effectLst/>
+        </p:spPr>
+        <p:style>
+          <a:lnRef idx="1">
+            <a:schemeClr val="accent1"/>
+          </a:lnRef>
+          <a:fillRef idx="3">
+            <a:schemeClr val="accent1"/>
+          </a:fillRef>
+          <a:effectRef idx="2">
+            <a:schemeClr val="accent1"/>
+          </a:effectRef>
+          <a:fontRef idx="minor">
+            <a:schemeClr val="lt1"/>
+          </a:fontRef>
+        </p:style>
+        <p:txBody>
+          <a:bodyPr lIns="117226" tIns="58613" rIns="117226" bIns="58613" rtlCol="0" anchor="ctr"/>
+          <a:lstStyle/>
+          <a:p>
+            <a:pPr algn="ctr"/>
+            <a:endParaRPr/>
+          </a:p>
+        </p:txBody>
+      </p:sp>
+      <p:sp>
+        <p:nvSpPr>
+          <p:cNvPr id="35" name="TextBox 34"/>
+          <p:cNvSpPr txBox="1"/>
+          <p:nvPr/>
+        </p:nvSpPr>
+        <p:spPr>
+          <a:xfrm>
+            <a:off x="335360" y="3869546"/>
+            <a:ext cx="731520" cy="324347"/>
+          </a:xfrm>
+          <a:prstGeom prst="rect">
+            <a:avLst/>
+          </a:prstGeom>
+          <a:noFill/>
+        </p:spPr>
+        <p:txBody>
+          <a:bodyPr wrap="square" lIns="58613" tIns="23445" rIns="58613" bIns="23445" anchor="ctr">
+            <a:spAutoFit/>
+          </a:bodyPr>
+          <a:lstStyle/>
+          <a:p>
+            <a:pPr algn="ctr"/>
+            <a:r>
+              <a:rPr b="1">
+                <a:solidFill>
+                  <a:srgbClr val="FFFFFF"/>
+                </a:solidFill>
+                <a:latin typeface="Arial"/>
+              </a:rPr>
+              <a:t>1</a:t>
+            </a:r>
+          </a:p>
+        </p:txBody>
+      </p:sp>
+      <p:sp>
+        <p:nvSpPr>
+          <p:cNvPr id="36" name="Rectangle 35"/>
+          <p:cNvSpPr/>
+          <p:nvPr/>
+        </p:nvSpPr>
+        <p:spPr>
+          <a:xfrm>
+            <a:off x="1066880" y="3801291"/>
+            <a:ext cx="4572000" cy="460858"/>
+          </a:xfrm>
+          <a:prstGeom prst="rect">
+            <a:avLst/>
+          </a:prstGeom>
+          <a:solidFill>
+            <a:srgbClr val="E5E7EB"/>
+          </a:solidFill>
+          <a:ln>
+            <a:noFill/>
+          </a:ln>
+          <a:effectLst/>
+        </p:spPr>
+        <p:style>
+          <a:lnRef idx="1">
+            <a:schemeClr val="accent1"/>
+          </a:lnRef>
+          <a:fillRef idx="3">
+            <a:schemeClr val="accent1"/>
+          </a:fillRef>
+          <a:effectRef idx="2">
+            <a:schemeClr val="accent1"/>
+          </a:effectRef>
+          <a:fontRef idx="minor">
+            <a:schemeClr val="lt1"/>
+          </a:fontRef>
+        </p:style>
+        <p:txBody>
+          <a:bodyPr lIns="117226" tIns="58613" rIns="117226" bIns="58613" rtlCol="0" anchor="ctr"/>
+          <a:lstStyle/>
+          <a:p>
+            <a:pPr algn="ctr"/>
+            <a:endParaRPr/>
+          </a:p>
+        </p:txBody>
+      </p:sp>
+      <p:sp>
+        <p:nvSpPr>
+          <p:cNvPr id="37" name="TextBox 36"/>
+          <p:cNvSpPr txBox="1"/>
+          <p:nvPr/>
+        </p:nvSpPr>
+        <p:spPr>
+          <a:xfrm>
+            <a:off x="1152224" y="3908019"/>
+            <a:ext cx="4389120" cy="247403"/>
+          </a:xfrm>
+          <a:prstGeom prst="rect">
+            <a:avLst/>
+          </a:prstGeom>
+          <a:noFill/>
+        </p:spPr>
+        <p:txBody>
+          <a:bodyPr wrap="square" lIns="58613" tIns="23445" rIns="58613" bIns="23445" anchor="ctr">
+            <a:spAutoFit/>
+          </a:bodyPr>
+          <a:lstStyle/>
+          <a:p>
+            <a:pPr algn="l"/>
+            <a:r>
+              <a:rPr sz="1300" b="1">
+                <a:solidFill>
+                  <a:srgbClr val="1A1F36"/>
+                </a:solidFill>
+                <a:latin typeface="Arial"/>
+              </a:rPr>
+              <a:t>Out-of-Stock по топ-SKU</a:t>
+            </a:r>
+          </a:p>
+        </p:txBody>
+      </p:sp>
+      <p:sp>
+        <p:nvSpPr>
+          <p:cNvPr id="38" name="Rectangle 37"/>
+          <p:cNvSpPr/>
+          <p:nvPr/>
+        </p:nvSpPr>
+        <p:spPr>
+          <a:xfrm>
+            <a:off x="5638880" y="3801291"/>
+            <a:ext cx="3657600" cy="460858"/>
+          </a:xfrm>
+          <a:prstGeom prst="rect">
+            <a:avLst/>
+          </a:prstGeom>
+          <a:solidFill>
+            <a:srgbClr val="E5E7EB"/>
+          </a:solidFill>
+          <a:ln>
+            <a:noFill/>
+          </a:ln>
+          <a:effectLst/>
+        </p:spPr>
+        <p:style>
+          <a:lnRef idx="1">
+            <a:schemeClr val="accent1"/>
+          </a:lnRef>
+          <a:fillRef idx="3">
+            <a:schemeClr val="accent1"/>
+          </a:fillRef>
+          <a:effectRef idx="2">
+            <a:schemeClr val="accent1"/>
+          </a:effectRef>
+          <a:fontRef idx="minor">
+            <a:schemeClr val="lt1"/>
+          </a:fontRef>
+        </p:style>
+        <p:txBody>
+          <a:bodyPr lIns="117226" tIns="58613" rIns="117226" bIns="58613" rtlCol="0" anchor="ctr"/>
+          <a:lstStyle/>
+          <a:p>
+            <a:pPr algn="ctr"/>
+            <a:endParaRPr/>
+          </a:p>
+        </p:txBody>
+      </p:sp>
+      <p:sp>
+        <p:nvSpPr>
+          <p:cNvPr id="39" name="TextBox 38"/>
+          <p:cNvSpPr txBox="1"/>
+          <p:nvPr/>
+        </p:nvSpPr>
+        <p:spPr>
+          <a:xfrm>
+            <a:off x="5724224" y="3908019"/>
+            <a:ext cx="3474720" cy="247403"/>
+          </a:xfrm>
+          <a:prstGeom prst="rect">
+            <a:avLst/>
+          </a:prstGeom>
+          <a:noFill/>
+        </p:spPr>
+        <p:txBody>
+          <a:bodyPr wrap="square" lIns="58613" tIns="23445" rIns="58613" bIns="23445" anchor="ctr">
+            <a:spAutoFit/>
+          </a:bodyPr>
+          <a:lstStyle/>
+          <a:p>
+            <a:pPr algn="l"/>
+            <a:r>
+              <a:rPr sz="1300" b="1">
+                <a:solidFill>
+                  <a:srgbClr val="C62828"/>
+                </a:solidFill>
+                <a:latin typeface="Arial"/>
+              </a:rPr>
+              <a:t>0 SKU отсутствует</a:t>
+            </a:r>
+          </a:p>
+        </p:txBody>
+      </p:sp>
+      <p:sp>
+        <p:nvSpPr>
+          <p:cNvPr id="40" name="Rectangle 39"/>
+          <p:cNvSpPr/>
+          <p:nvPr/>
+        </p:nvSpPr>
+        <p:spPr>
+          <a:xfrm>
+            <a:off x="9296480" y="3801291"/>
+            <a:ext cx="2462784" cy="460858"/>
+          </a:xfrm>
+          <a:prstGeom prst="rect">
+            <a:avLst/>
+          </a:prstGeom>
+          <a:solidFill>
+            <a:srgbClr val="E5E7EB"/>
+          </a:solidFill>
+          <a:ln>
+            <a:noFill/>
+          </a:ln>
+          <a:effectLst/>
+        </p:spPr>
+        <p:style>
+          <a:lnRef idx="1">
+            <a:schemeClr val="accent1"/>
+          </a:lnRef>
+          <a:fillRef idx="3">
+            <a:schemeClr val="accent1"/>
+          </a:fillRef>
+          <a:effectRef idx="2">
+            <a:schemeClr val="accent1"/>
+          </a:effectRef>
+          <a:fontRef idx="minor">
+            <a:schemeClr val="lt1"/>
+          </a:fontRef>
+        </p:style>
+        <p:txBody>
+          <a:bodyPr lIns="117226" tIns="58613" rIns="117226" bIns="58613" rtlCol="0" anchor="ctr"/>
+          <a:lstStyle/>
+          <a:p>
+            <a:pPr algn="ctr"/>
+            <a:endParaRPr/>
+          </a:p>
+        </p:txBody>
+      </p:sp>
+      <p:sp>
+        <p:nvSpPr>
+          <p:cNvPr id="41" name="TextBox 40"/>
+          <p:cNvSpPr txBox="1"/>
+          <p:nvPr/>
+        </p:nvSpPr>
+        <p:spPr>
+          <a:xfrm>
+            <a:off x="9381824" y="3915713"/>
+            <a:ext cx="2292096" cy="232014"/>
+          </a:xfrm>
+          <a:prstGeom prst="rect">
+            <a:avLst/>
+          </a:prstGeom>
+          <a:noFill/>
+        </p:spPr>
+        <p:txBody>
+          <a:bodyPr wrap="square" lIns="58613" tIns="23445" rIns="58613" bIns="23445" anchor="ctr">
+            <a:spAutoFit/>
+          </a:bodyPr>
+          <a:lstStyle/>
+          <a:p>
+            <a:pPr algn="l"/>
+            <a:r>
+              <a:rPr sz="1200">
+                <a:solidFill>
+                  <a:srgbClr val="9CA3AF"/>
+                </a:solidFill>
+                <a:latin typeface="Arial"/>
+              </a:rPr>
+              <a:t>Ежедневно</a:t>
+            </a:r>
+          </a:p>
+        </p:txBody>
+      </p:sp>
+      <p:sp>
+        <p:nvSpPr>
+          <p:cNvPr id="58" name="Rectangle 57"/>
+          <p:cNvSpPr/>
+          <p:nvPr/>
+        </p:nvSpPr>
+        <p:spPr>
+          <a:xfrm>
+            <a:off x="335360" y="4262186"/>
+            <a:ext cx="731520" cy="460858"/>
+          </a:xfrm>
+          <a:prstGeom prst="rect">
+            <a:avLst/>
+          </a:prstGeom>
+          <a:solidFill>
+            <a:srgbClr val="F47920"/>
+          </a:solidFill>
+          <a:ln>
+            <a:noFill/>
+          </a:ln>
+          <a:effectLst/>
+        </p:spPr>
+        <p:style>
+          <a:lnRef idx="1">
+            <a:schemeClr val="accent1"/>
+          </a:lnRef>
+          <a:fillRef idx="3">
+            <a:schemeClr val="accent1"/>
+          </a:fillRef>
+          <a:effectRef idx="2">
+            <a:schemeClr val="accent1"/>
+          </a:effectRef>
+          <a:fontRef idx="minor">
+            <a:schemeClr val="lt1"/>
+          </a:fontRef>
+        </p:style>
+        <p:txBody>
+          <a:bodyPr lIns="117226" tIns="58613" rIns="117226" bIns="58613" rtlCol="0" anchor="ctr"/>
+          <a:lstStyle/>
+          <a:p>
+            <a:pPr algn="ctr"/>
+            <a:endParaRPr/>
+          </a:p>
+        </p:txBody>
+      </p:sp>
+      <p:sp>
+        <p:nvSpPr>
+          <p:cNvPr id="59" name="TextBox 58"/>
+          <p:cNvSpPr txBox="1"/>
+          <p:nvPr/>
+        </p:nvSpPr>
+        <p:spPr>
+          <a:xfrm>
+            <a:off x="335360" y="4330441"/>
+            <a:ext cx="731520" cy="324347"/>
+          </a:xfrm>
+          <a:prstGeom prst="rect">
+            <a:avLst/>
+          </a:prstGeom>
+          <a:noFill/>
+        </p:spPr>
+        <p:txBody>
+          <a:bodyPr wrap="square" lIns="58613" tIns="23445" rIns="58613" bIns="23445" anchor="ctr">
+            <a:spAutoFit/>
+          </a:bodyPr>
+          <a:lstStyle/>
+          <a:p>
+            <a:pPr algn="ctr"/>
+            <a:r>
+              <a:rPr b="1">
+                <a:solidFill>
+                  <a:srgbClr val="FFFFFF"/>
+                </a:solidFill>
+                <a:latin typeface="Arial"/>
+              </a:rPr>
+              <a:t>2</a:t>
+            </a:r>
+          </a:p>
+        </p:txBody>
+      </p:sp>
+      <p:sp>
+        <p:nvSpPr>
+          <p:cNvPr id="60" name="Rectangle 59"/>
+          <p:cNvSpPr/>
+          <p:nvPr/>
+        </p:nvSpPr>
+        <p:spPr>
+          <a:xfrm>
+            <a:off x="1066880" y="4262186"/>
+            <a:ext cx="4572000" cy="460858"/>
+          </a:xfrm>
+          <a:prstGeom prst="rect">
+            <a:avLst/>
+          </a:prstGeom>
+          <a:solidFill>
+            <a:srgbClr val="FFFFFF"/>
+          </a:solidFill>
+          <a:ln>
+            <a:noFill/>
+          </a:ln>
+          <a:effectLst/>
+        </p:spPr>
+        <p:style>
+          <a:lnRef idx="1">
+            <a:schemeClr val="accent1"/>
+          </a:lnRef>
+          <a:fillRef idx="3">
+            <a:schemeClr val="accent1"/>
+          </a:fillRef>
+          <a:effectRef idx="2">
+            <a:schemeClr val="accent1"/>
+          </a:effectRef>
+          <a:fontRef idx="minor">
+            <a:schemeClr val="lt1"/>
+          </a:fontRef>
+        </p:style>
+        <p:txBody>
+          <a:bodyPr lIns="117226" tIns="58613" rIns="117226" bIns="58613" rtlCol="0" anchor="ctr"/>
+          <a:lstStyle/>
+          <a:p>
+            <a:pPr algn="ctr"/>
+            <a:endParaRPr/>
+          </a:p>
+        </p:txBody>
+      </p:sp>
+      <p:sp>
+        <p:nvSpPr>
+          <p:cNvPr id="61" name="TextBox 60"/>
+          <p:cNvSpPr txBox="1"/>
+          <p:nvPr/>
+        </p:nvSpPr>
+        <p:spPr>
+          <a:xfrm>
+            <a:off x="1152224" y="4368914"/>
+            <a:ext cx="4389120" cy="247403"/>
+          </a:xfrm>
+          <a:prstGeom prst="rect">
+            <a:avLst/>
+          </a:prstGeom>
+          <a:noFill/>
+        </p:spPr>
+        <p:txBody>
+          <a:bodyPr wrap="square" lIns="58613" tIns="23445" rIns="58613" bIns="23445" anchor="ctr">
+            <a:spAutoFit/>
+          </a:bodyPr>
+          <a:lstStyle/>
+          <a:p>
+            <a:pPr algn="l"/>
+            <a:r>
+              <a:rPr sz="1300" b="1">
+                <a:solidFill>
+                  <a:srgbClr val="1A1F36"/>
+                </a:solidFill>
+                <a:latin typeface="Arial"/>
+              </a:rPr>
+              <a:t>Внедрение промо сети</a:t>
+            </a:r>
+          </a:p>
+        </p:txBody>
+      </p:sp>
+      <p:sp>
+        <p:nvSpPr>
+          <p:cNvPr id="62" name="Rectangle 61"/>
+          <p:cNvSpPr/>
+          <p:nvPr/>
+        </p:nvSpPr>
+        <p:spPr>
+          <a:xfrm>
+            <a:off x="5638880" y="4262186"/>
+            <a:ext cx="3657600" cy="460858"/>
+          </a:xfrm>
+          <a:prstGeom prst="rect">
+            <a:avLst/>
+          </a:prstGeom>
+          <a:solidFill>
+            <a:srgbClr val="FFFFFF"/>
+          </a:solidFill>
+          <a:ln>
+            <a:noFill/>
+          </a:ln>
+          <a:effectLst/>
+        </p:spPr>
+        <p:style>
+          <a:lnRef idx="1">
+            <a:schemeClr val="accent1"/>
+          </a:lnRef>
+          <a:fillRef idx="3">
+            <a:schemeClr val="accent1"/>
+          </a:fillRef>
+          <a:effectRef idx="2">
+            <a:schemeClr val="accent1"/>
+          </a:effectRef>
+          <a:fontRef idx="minor">
+            <a:schemeClr val="lt1"/>
+          </a:fontRef>
+        </p:style>
+        <p:txBody>
+          <a:bodyPr lIns="117226" tIns="58613" rIns="117226" bIns="58613" rtlCol="0" anchor="ctr"/>
+          <a:lstStyle/>
+          <a:p>
+            <a:pPr algn="ctr"/>
+            <a:endParaRPr/>
+          </a:p>
+        </p:txBody>
+      </p:sp>
+      <p:sp>
+        <p:nvSpPr>
+          <p:cNvPr id="63" name="TextBox 62"/>
+          <p:cNvSpPr txBox="1"/>
+          <p:nvPr/>
+        </p:nvSpPr>
+        <p:spPr>
+          <a:xfrm>
+            <a:off x="5724224" y="4368914"/>
+            <a:ext cx="3474720" cy="247403"/>
+          </a:xfrm>
+          <a:prstGeom prst="rect">
+            <a:avLst/>
+          </a:prstGeom>
+          <a:noFill/>
+        </p:spPr>
+        <p:txBody>
+          <a:bodyPr wrap="square" lIns="58613" tIns="23445" rIns="58613" bIns="23445" anchor="ctr">
+            <a:spAutoFit/>
+          </a:bodyPr>
+          <a:lstStyle/>
+          <a:p>
+            <a:pPr algn="l"/>
+            <a:r>
+              <a:rPr sz="1300" b="1">
+                <a:solidFill>
+                  <a:srgbClr val="F47920"/>
+                </a:solidFill>
+                <a:latin typeface="Arial"/>
+              </a:rPr>
+              <a:t>100% акций в срок</a:t>
+            </a:r>
+          </a:p>
+        </p:txBody>
+      </p:sp>
+      <p:sp>
+        <p:nvSpPr>
+          <p:cNvPr id="64" name="Rectangle 63"/>
+          <p:cNvSpPr/>
+          <p:nvPr/>
+        </p:nvSpPr>
+        <p:spPr>
+          <a:xfrm>
+            <a:off x="9296480" y="4262186"/>
+            <a:ext cx="2462784" cy="460858"/>
+          </a:xfrm>
+          <a:prstGeom prst="rect">
+            <a:avLst/>
+          </a:prstGeom>
+          <a:solidFill>
+            <a:srgbClr val="FFFFFF"/>
+          </a:solidFill>
+          <a:ln>
+            <a:noFill/>
+          </a:ln>
+          <a:effectLst/>
+        </p:spPr>
+        <p:style>
+          <a:lnRef idx="1">
+            <a:schemeClr val="accent1"/>
+          </a:lnRef>
+          <a:fillRef idx="3">
+            <a:schemeClr val="accent1"/>
+          </a:fillRef>
+          <a:effectRef idx="2">
+            <a:schemeClr val="accent1"/>
+          </a:effectRef>
+          <a:fontRef idx="minor">
+            <a:schemeClr val="lt1"/>
+          </a:fontRef>
+        </p:style>
+        <p:txBody>
+          <a:bodyPr lIns="117226" tIns="58613" rIns="117226" bIns="58613" rtlCol="0" anchor="ctr"/>
+          <a:lstStyle/>
+          <a:p>
+            <a:pPr algn="ctr"/>
+            <a:endParaRPr/>
+          </a:p>
+        </p:txBody>
+      </p:sp>
+      <p:sp>
+        <p:nvSpPr>
+          <p:cNvPr id="65" name="TextBox 64"/>
+          <p:cNvSpPr txBox="1"/>
+          <p:nvPr/>
+        </p:nvSpPr>
+        <p:spPr>
+          <a:xfrm>
+            <a:off x="9381824" y="4376608"/>
+            <a:ext cx="2292096" cy="232014"/>
+          </a:xfrm>
+          <a:prstGeom prst="rect">
+            <a:avLst/>
+          </a:prstGeom>
+          <a:noFill/>
+        </p:spPr>
+        <p:txBody>
+          <a:bodyPr wrap="square" lIns="58613" tIns="23445" rIns="58613" bIns="23445" anchor="ctr">
+            <a:spAutoFit/>
+          </a:bodyPr>
+          <a:lstStyle/>
+          <a:p>
+            <a:pPr algn="l"/>
+            <a:r>
+              <a:rPr sz="1200">
+                <a:solidFill>
+                  <a:srgbClr val="9CA3AF"/>
+                </a:solidFill>
+                <a:latin typeface="Arial"/>
+              </a:rPr>
+              <a:t>По акциям</a:t>
+            </a:r>
+          </a:p>
+        </p:txBody>
+      </p:sp>
+      <p:sp>
+        <p:nvSpPr>
+          <p:cNvPr id="74" name="Rectangle 73"/>
+          <p:cNvSpPr/>
+          <p:nvPr/>
+        </p:nvSpPr>
+        <p:spPr>
+          <a:xfrm>
+            <a:off x="335360" y="4723063"/>
+            <a:ext cx="731520" cy="460858"/>
+          </a:xfrm>
+          <a:prstGeom prst="rect">
+            <a:avLst/>
+          </a:prstGeom>
+          <a:solidFill>
+            <a:srgbClr val="16A34A"/>
+          </a:solidFill>
+          <a:ln>
+            <a:noFill/>
+          </a:ln>
+          <a:effectLst/>
+        </p:spPr>
+        <p:style>
+          <a:lnRef idx="1">
+            <a:schemeClr val="accent1"/>
+          </a:lnRef>
+          <a:fillRef idx="3">
+            <a:schemeClr val="accent1"/>
+          </a:fillRef>
+          <a:effectRef idx="2">
+            <a:schemeClr val="accent1"/>
+          </a:effectRef>
+          <a:fontRef idx="minor">
+            <a:schemeClr val="lt1"/>
+          </a:fontRef>
+        </p:style>
+        <p:txBody>
+          <a:bodyPr lIns="117226" tIns="58613" rIns="117226" bIns="58613" rtlCol="0" anchor="ctr"/>
+          <a:lstStyle/>
+          <a:p>
+            <a:pPr algn="ctr"/>
+            <a:endParaRPr/>
+          </a:p>
+        </p:txBody>
+      </p:sp>
+      <p:sp>
+        <p:nvSpPr>
+          <p:cNvPr id="75" name="TextBox 74"/>
+          <p:cNvSpPr txBox="1"/>
+          <p:nvPr/>
+        </p:nvSpPr>
+        <p:spPr>
+          <a:xfrm>
+            <a:off x="335360" y="4791318"/>
+            <a:ext cx="731520" cy="324347"/>
+          </a:xfrm>
+          <a:prstGeom prst="rect">
+            <a:avLst/>
+          </a:prstGeom>
+          <a:noFill/>
+        </p:spPr>
+        <p:txBody>
+          <a:bodyPr wrap="square" lIns="58613" tIns="23445" rIns="58613" bIns="23445" anchor="ctr">
+            <a:spAutoFit/>
+          </a:bodyPr>
+          <a:lstStyle/>
+          <a:p>
+            <a:pPr algn="ctr"/>
+            <a:r>
+              <a:rPr b="1">
+                <a:solidFill>
+                  <a:srgbClr val="FFFFFF"/>
+                </a:solidFill>
+                <a:latin typeface="Arial"/>
+              </a:rPr>
+              <a:t>3</a:t>
+            </a:r>
+          </a:p>
+        </p:txBody>
+      </p:sp>
+      <p:sp>
+        <p:nvSpPr>
+          <p:cNvPr id="76" name="Rectangle 75"/>
+          <p:cNvSpPr/>
+          <p:nvPr/>
+        </p:nvSpPr>
+        <p:spPr>
+          <a:xfrm>
+            <a:off x="1066880" y="4723063"/>
+            <a:ext cx="4572000" cy="460858"/>
+          </a:xfrm>
+          <a:prstGeom prst="rect">
+            <a:avLst/>
+          </a:prstGeom>
+          <a:solidFill>
+            <a:srgbClr val="FFFFFF"/>
+          </a:solidFill>
+          <a:ln>
+            <a:noFill/>
+          </a:ln>
+          <a:effectLst/>
+        </p:spPr>
+        <p:style>
+          <a:lnRef idx="1">
+            <a:schemeClr val="accent1"/>
+          </a:lnRef>
+          <a:fillRef idx="3">
+            <a:schemeClr val="accent1"/>
+          </a:fillRef>
+          <a:effectRef idx="2">
+            <a:schemeClr val="accent1"/>
+          </a:effectRef>
+          <a:fontRef idx="minor">
+            <a:schemeClr val="lt1"/>
+          </a:fontRef>
+        </p:style>
+        <p:txBody>
+          <a:bodyPr lIns="117226" tIns="58613" rIns="117226" bIns="58613" rtlCol="0" anchor="ctr"/>
+          <a:lstStyle/>
+          <a:p>
+            <a:pPr algn="ctr"/>
+            <a:endParaRPr/>
+          </a:p>
+        </p:txBody>
+      </p:sp>
+      <p:sp>
+        <p:nvSpPr>
+          <p:cNvPr id="77" name="TextBox 76"/>
+          <p:cNvSpPr txBox="1"/>
+          <p:nvPr/>
+        </p:nvSpPr>
+        <p:spPr>
+          <a:xfrm>
+            <a:off x="1152224" y="4829791"/>
+            <a:ext cx="4389120" cy="247403"/>
+          </a:xfrm>
+          <a:prstGeom prst="rect">
+            <a:avLst/>
+          </a:prstGeom>
+          <a:noFill/>
+        </p:spPr>
+        <p:txBody>
+          <a:bodyPr wrap="square" lIns="58613" tIns="23445" rIns="58613" bIns="23445" anchor="ctr">
+            <a:spAutoFit/>
+          </a:bodyPr>
+          <a:lstStyle/>
+          <a:p>
+            <a:pPr algn="l"/>
+            <a:r>
+              <a:rPr sz="1300" b="1">
+                <a:solidFill>
+                  <a:srgbClr val="1A1F36"/>
+                </a:solidFill>
+                <a:latin typeface="Arial"/>
+              </a:rPr>
+              <a:t>Оборот TITAN в магазине</a:t>
+            </a:r>
+          </a:p>
+        </p:txBody>
+      </p:sp>
+      <p:sp>
+        <p:nvSpPr>
+          <p:cNvPr id="78" name="Rectangle 77"/>
+          <p:cNvSpPr/>
+          <p:nvPr/>
+        </p:nvSpPr>
+        <p:spPr>
+          <a:xfrm>
+            <a:off x="5638880" y="4723063"/>
+            <a:ext cx="3657600" cy="460858"/>
+          </a:xfrm>
+          <a:prstGeom prst="rect">
+            <a:avLst/>
+          </a:prstGeom>
+          <a:solidFill>
+            <a:srgbClr val="FFFFFF"/>
+          </a:solidFill>
+          <a:ln>
+            <a:noFill/>
+          </a:ln>
+          <a:effectLst/>
+        </p:spPr>
+        <p:style>
+          <a:lnRef idx="1">
+            <a:schemeClr val="accent1"/>
+          </a:lnRef>
+          <a:fillRef idx="3">
+            <a:schemeClr val="accent1"/>
+          </a:fillRef>
+          <a:effectRef idx="2">
+            <a:schemeClr val="accent1"/>
+          </a:effectRef>
+          <a:fontRef idx="minor">
+            <a:schemeClr val="lt1"/>
+          </a:fontRef>
+        </p:style>
+        <p:txBody>
+          <a:bodyPr lIns="117226" tIns="58613" rIns="117226" bIns="58613" rtlCol="0" anchor="ctr"/>
+          <a:lstStyle/>
+          <a:p>
+            <a:pPr algn="ctr"/>
+            <a:endParaRPr/>
+          </a:p>
+        </p:txBody>
+      </p:sp>
+      <p:sp>
+        <p:nvSpPr>
+          <p:cNvPr id="79" name="TextBox 78"/>
+          <p:cNvSpPr txBox="1"/>
+          <p:nvPr/>
+        </p:nvSpPr>
+        <p:spPr>
+          <a:xfrm>
+            <a:off x="5724224" y="4829791"/>
+            <a:ext cx="3474720" cy="247403"/>
+          </a:xfrm>
+          <a:prstGeom prst="rect">
+            <a:avLst/>
+          </a:prstGeom>
+          <a:noFill/>
+        </p:spPr>
+        <p:txBody>
+          <a:bodyPr wrap="square" lIns="58613" tIns="23445" rIns="58613" bIns="23445" anchor="ctr">
+            <a:spAutoFit/>
+          </a:bodyPr>
+          <a:lstStyle/>
+          <a:p>
+            <a:pPr algn="l"/>
+            <a:r>
+              <a:rPr sz="1300" b="1">
+                <a:solidFill>
+                  <a:srgbClr val="16A34A"/>
+                </a:solidFill>
+                <a:latin typeface="Arial"/>
+              </a:rPr>
+              <a:t>+__ % к базовому периоду</a:t>
+            </a:r>
+          </a:p>
+        </p:txBody>
+      </p:sp>
+      <p:sp>
+        <p:nvSpPr>
+          <p:cNvPr id="80" name="Rectangle 79"/>
+          <p:cNvSpPr/>
+          <p:nvPr/>
+        </p:nvSpPr>
+        <p:spPr>
+          <a:xfrm>
+            <a:off x="9296480" y="4723063"/>
+            <a:ext cx="2462784" cy="460858"/>
+          </a:xfrm>
+          <a:prstGeom prst="rect">
+            <a:avLst/>
+          </a:prstGeom>
+          <a:solidFill>
+            <a:srgbClr val="FFFFFF"/>
+          </a:solidFill>
+          <a:ln>
+            <a:noFill/>
+          </a:ln>
+          <a:effectLst/>
+        </p:spPr>
+        <p:style>
+          <a:lnRef idx="1">
+            <a:schemeClr val="accent1"/>
+          </a:lnRef>
+          <a:fillRef idx="3">
+            <a:schemeClr val="accent1"/>
+          </a:fillRef>
+          <a:effectRef idx="2">
+            <a:schemeClr val="accent1"/>
+          </a:effectRef>
+          <a:fontRef idx="minor">
+            <a:schemeClr val="lt1"/>
+          </a:fontRef>
+        </p:style>
+        <p:txBody>
+          <a:bodyPr lIns="117226" tIns="58613" rIns="117226" bIns="58613" rtlCol="0" anchor="ctr"/>
+          <a:lstStyle/>
+          <a:p>
+            <a:pPr algn="ctr"/>
+            <a:endParaRPr/>
+          </a:p>
+        </p:txBody>
+      </p:sp>
+      <p:sp>
+        <p:nvSpPr>
+          <p:cNvPr id="81" name="TextBox 80"/>
+          <p:cNvSpPr txBox="1"/>
+          <p:nvPr/>
+        </p:nvSpPr>
+        <p:spPr>
+          <a:xfrm>
+            <a:off x="9381824" y="4837485"/>
+            <a:ext cx="2292096" cy="232014"/>
+          </a:xfrm>
+          <a:prstGeom prst="rect">
+            <a:avLst/>
+          </a:prstGeom>
+          <a:noFill/>
+        </p:spPr>
+        <p:txBody>
+          <a:bodyPr wrap="square" lIns="58613" tIns="23445" rIns="58613" bIns="23445" anchor="ctr">
+            <a:spAutoFit/>
+          </a:bodyPr>
+          <a:lstStyle/>
+          <a:p>
+            <a:pPr algn="l"/>
+            <a:r>
+              <a:rPr sz="1200">
+                <a:solidFill>
+                  <a:srgbClr val="9CA3AF"/>
+                </a:solidFill>
+                <a:latin typeface="Arial"/>
+              </a:rPr>
+              <a:t>Ежемесячно</a:t>
+            </a:r>
+          </a:p>
+        </p:txBody>
+      </p:sp>
+      <p:sp>
+        <p:nvSpPr>
+          <p:cNvPr id="90" name="TextBox 89"/>
+          <p:cNvSpPr txBox="1"/>
+          <p:nvPr/>
+        </p:nvSpPr>
+        <p:spPr>
+          <a:xfrm>
+            <a:off x="365760" y="6889056"/>
+            <a:ext cx="11460480" cy="201236"/>
+          </a:xfrm>
+          <a:prstGeom prst="rect">
+            <a:avLst/>
+          </a:prstGeom>
+          <a:noFill/>
+        </p:spPr>
+        <p:txBody>
+          <a:bodyPr wrap="square" lIns="58613" tIns="23445" rIns="58613" bIns="23445" anchor="ctr">
+            <a:spAutoFit/>
+          </a:bodyPr>
+          <a:lstStyle/>
+          <a:p>
+            <a:pPr algn="l"/>
+            <a:r>
+              <a:rPr sz="1000" i="1">
+                <a:solidFill>
+                  <a:srgbClr val="6B7280"/>
+                </a:solidFill>
+                <a:latin typeface="Arial"/>
+              </a:rPr>
+              <a:t>Источник данных: фотоотчёт ТП по графику  ·  CIS-Link по SKU  ·  отчёт Лемана Про по кэшбеку и промо  ·  тест продавца в LMS</a:t>
+            </a:r>
           </a:p>
         </p:txBody>
       </p:sp>
     </p:spTree>
     <p:extLst>
       <p:ext uri="{BB962C8B-B14F-4D97-AF65-F5344CB8AC3E}">
-        <p14:creationId xmlns:p14="http://schemas.microsoft.com/office/powerpoint/2010/main" val="1111050169"/>
+        <p14:creationId xmlns:p14="http://schemas.microsoft.com/office/powerpoint/2010/main" val="392301606"/>
       </p:ext>
     </p:extLst>
   </p:cSld>
@@ -23090,104 +25239,14 @@
       </p:grpSpPr>
       <p:sp>
         <p:nvSpPr>
-          <p:cNvPr id="2" name="Rectangle 1"/>
-          <p:cNvSpPr/>
-          <p:nvPr/>
-        </p:nvSpPr>
-        <p:spPr>
-          <a:xfrm>
-            <a:off x="-183871" y="0"/>
-            <a:ext cx="12191695" cy="6858000"/>
-          </a:xfrm>
-          <a:prstGeom prst="rect">
-            <a:avLst/>
-          </a:prstGeom>
-          <a:solidFill>
-            <a:srgbClr val="FAFAFA"/>
-          </a:solidFill>
-          <a:ln>
-            <a:noFill/>
-          </a:ln>
-          <a:effectLst/>
-        </p:spPr>
-        <p:style>
-          <a:lnRef idx="1">
-            <a:schemeClr val="accent1"/>
-          </a:lnRef>
-          <a:fillRef idx="3">
-            <a:schemeClr val="accent1"/>
-          </a:fillRef>
-          <a:effectRef idx="2">
-            <a:schemeClr val="accent1"/>
-          </a:effectRef>
-          <a:fontRef idx="minor">
-            <a:schemeClr val="lt1"/>
-          </a:fontRef>
-        </p:style>
-        <p:txBody>
-          <a:bodyPr rtlCol="0" anchor="ctr"/>
-          <a:lstStyle/>
-          <a:p>
-            <a:pPr algn="ctr"/>
-            <a:endParaRPr/>
-          </a:p>
-        </p:txBody>
-      </p:sp>
-      <p:sp>
-        <p:nvSpPr>
-          <p:cNvPr id="3" name="Rectangle 2"/>
-          <p:cNvSpPr/>
-          <p:nvPr/>
-        </p:nvSpPr>
-        <p:spPr>
-          <a:xfrm>
-            <a:off x="0" y="0"/>
-            <a:ext cx="12191695" cy="109728"/>
-          </a:xfrm>
-          <a:prstGeom prst="rect">
-            <a:avLst/>
-          </a:prstGeom>
-          <a:solidFill>
-            <a:srgbClr val="F47629"/>
-          </a:solidFill>
-          <a:ln>
-            <a:noFill/>
-          </a:ln>
-          <a:effectLst/>
-        </p:spPr>
-        <p:style>
-          <a:lnRef idx="1">
-            <a:schemeClr val="accent1"/>
-          </a:lnRef>
-          <a:fillRef idx="3">
-            <a:schemeClr val="accent1"/>
-          </a:fillRef>
-          <a:effectRef idx="2">
-            <a:schemeClr val="accent1"/>
-          </a:effectRef>
-          <a:fontRef idx="minor">
-            <a:schemeClr val="lt1"/>
-          </a:fontRef>
-        </p:style>
-        <p:txBody>
-          <a:bodyPr rtlCol="0" anchor="ctr"/>
-          <a:lstStyle/>
-          <a:p>
-            <a:pPr algn="ctr"/>
-            <a:endParaRPr/>
-          </a:p>
-        </p:txBody>
-      </p:sp>
-      <p:sp>
-        <p:nvSpPr>
-          <p:cNvPr id="4" name="TextBox 3"/>
+          <p:cNvPr id="2" name="TextBox 1"/>
           <p:cNvSpPr txBox="1"/>
           <p:nvPr/>
         </p:nvSpPr>
         <p:spPr>
           <a:xfrm>
-            <a:off x="457200" y="201168"/>
-            <a:ext cx="10058400" cy="411480"/>
+            <a:off x="1200149" y="2644103"/>
+            <a:ext cx="10020301" cy="1015663"/>
           </a:xfrm>
           <a:prstGeom prst="rect">
             <a:avLst/>
@@ -23195,2515 +25254,44 @@
           <a:noFill/>
         </p:spPr>
         <p:txBody>
-          <a:bodyPr wrap="square" lIns="0" tIns="0" rIns="0" bIns="0" anchor="ctr">
+          <a:bodyPr wrap="square" anchor="ctr">
             <a:spAutoFit/>
           </a:bodyPr>
           <a:lstStyle/>
           <a:p>
-            <a:pPr algn="l">
-              <a:lnSpc>
-                <a:spcPct val="100000"/>
-              </a:lnSpc>
-            </a:pPr>
-            <a:r>
-              <a:rPr sz="1900" b="1" i="0">
-                <a:solidFill>
-                  <a:srgbClr val="313131"/>
-                </a:solidFill>
-                <a:latin typeface="Calibri"/>
-              </a:rPr>
-              <a:t>TITAN B2B — ЧТО НУЖНО СДЕЛАТЬ, ЧТОБЫ ПАРТНЁРЫ ЗАХОТЕЛИ</a:t>
-            </a:r>
-          </a:p>
-        </p:txBody>
-      </p:sp>
-      <p:sp>
-        <p:nvSpPr>
-          <p:cNvPr id="6" name="TextBox 5"/>
-          <p:cNvSpPr txBox="1"/>
-          <p:nvPr/>
-        </p:nvSpPr>
-        <p:spPr>
-          <a:xfrm>
-            <a:off x="10058400" y="201168"/>
-            <a:ext cx="1828800" cy="411480"/>
-          </a:xfrm>
-          <a:prstGeom prst="rect">
-            <a:avLst/>
-          </a:prstGeom>
-          <a:noFill/>
-        </p:spPr>
-        <p:txBody>
-          <a:bodyPr wrap="square" lIns="0" tIns="0" rIns="0" bIns="0" anchor="ctr">
-            <a:spAutoFit/>
-          </a:bodyPr>
-          <a:lstStyle/>
-          <a:p>
-            <a:pPr algn="r">
-              <a:lnSpc>
-                <a:spcPct val="100000"/>
-              </a:lnSpc>
-            </a:pPr>
-            <a:r>
-              <a:rPr sz="1200" b="1" i="0">
+            <a:pPr algn="ctr"/>
+            <a:r>
+              <a:rPr lang="en-US" sz="6000" b="1" dirty="0" smtClean="0">
                 <a:solidFill>
                   <a:srgbClr val="F47629"/>
                 </a:solidFill>
-                <a:latin typeface="Calibri"/>
-              </a:rPr>
-              <a:t>TITAN · B2B</a:t>
-            </a:r>
-          </a:p>
-        </p:txBody>
-      </p:sp>
-      <p:sp>
-        <p:nvSpPr>
-          <p:cNvPr id="9" name="Rounded Rectangle 8"/>
-          <p:cNvSpPr/>
-          <p:nvPr/>
-        </p:nvSpPr>
-        <p:spPr>
-          <a:xfrm>
-            <a:off x="1492123" y="3647186"/>
-            <a:ext cx="2788920" cy="2011680"/>
-          </a:xfrm>
-          <a:prstGeom prst="roundRect">
-            <a:avLst>
-              <a:gd name="adj" fmla="val 5000"/>
-            </a:avLst>
-          </a:prstGeom>
-          <a:solidFill>
-            <a:srgbClr val="FFFFFF"/>
-          </a:solidFill>
-          <a:ln w="9525">
-            <a:solidFill>
-              <a:srgbClr val="F5F5F5"/>
-            </a:solidFill>
-          </a:ln>
-          <a:effectLst/>
-        </p:spPr>
-        <p:style>
-          <a:lnRef idx="1">
-            <a:schemeClr val="accent1"/>
-          </a:lnRef>
-          <a:fillRef idx="3">
-            <a:schemeClr val="accent1"/>
-          </a:fillRef>
-          <a:effectRef idx="2">
-            <a:schemeClr val="accent1"/>
-          </a:effectRef>
-          <a:fontRef idx="minor">
-            <a:schemeClr val="lt1"/>
-          </a:fontRef>
-        </p:style>
-        <p:txBody>
-          <a:bodyPr rtlCol="0" anchor="ctr"/>
-          <a:lstStyle/>
-          <a:p>
-            <a:pPr algn="ctr"/>
-            <a:endParaRPr/>
-          </a:p>
-        </p:txBody>
-      </p:sp>
-      <p:sp>
-        <p:nvSpPr>
-          <p:cNvPr id="10" name="Rectangle 9"/>
-          <p:cNvSpPr/>
-          <p:nvPr/>
-        </p:nvSpPr>
-        <p:spPr>
-          <a:xfrm>
-            <a:off x="1492123" y="3647186"/>
-            <a:ext cx="73152" cy="2011680"/>
-          </a:xfrm>
-          <a:prstGeom prst="rect">
-            <a:avLst/>
-          </a:prstGeom>
-          <a:solidFill>
-            <a:srgbClr val="F47629"/>
-          </a:solidFill>
-          <a:ln>
-            <a:noFill/>
-          </a:ln>
-          <a:effectLst/>
-        </p:spPr>
-        <p:style>
-          <a:lnRef idx="1">
-            <a:schemeClr val="accent1"/>
-          </a:lnRef>
-          <a:fillRef idx="3">
-            <a:schemeClr val="accent1"/>
-          </a:fillRef>
-          <a:effectRef idx="2">
-            <a:schemeClr val="accent1"/>
-          </a:effectRef>
-          <a:fontRef idx="minor">
-            <a:schemeClr val="lt1"/>
-          </a:fontRef>
-        </p:style>
-        <p:txBody>
-          <a:bodyPr rtlCol="0" anchor="ctr"/>
-          <a:lstStyle/>
-          <a:p>
-            <a:pPr algn="ctr"/>
-            <a:endParaRPr/>
-          </a:p>
-        </p:txBody>
-      </p:sp>
-      <p:sp>
-        <p:nvSpPr>
-          <p:cNvPr id="11" name="TextBox 10"/>
-          <p:cNvSpPr txBox="1"/>
-          <p:nvPr/>
-        </p:nvSpPr>
-        <p:spPr>
-          <a:xfrm>
-            <a:off x="1675003" y="3738626"/>
-            <a:ext cx="640080" cy="274320"/>
-          </a:xfrm>
-          <a:prstGeom prst="rect">
-            <a:avLst/>
-          </a:prstGeom>
-          <a:noFill/>
-        </p:spPr>
-        <p:txBody>
-          <a:bodyPr wrap="square" lIns="0" tIns="0" rIns="0" bIns="0" anchor="t">
-            <a:spAutoFit/>
-          </a:bodyPr>
-          <a:lstStyle/>
-          <a:p>
-            <a:pPr algn="l">
-              <a:lnSpc>
-                <a:spcPct val="100000"/>
-              </a:lnSpc>
-            </a:pPr>
-            <a:r>
-              <a:rPr sz="1800" b="1" i="0" dirty="0" smtClean="0">
+                <a:latin typeface="+mj-lt"/>
+              </a:rPr>
+              <a:t>B2B</a:t>
+            </a:r>
+            <a:r>
+              <a:rPr lang="ru-RU" sz="6000" b="1" dirty="0" smtClean="0">
                 <a:solidFill>
                   <a:srgbClr val="F47629"/>
                 </a:solidFill>
-                <a:latin typeface="Calibri"/>
-              </a:rPr>
-              <a:t>0</a:t>
-            </a:r>
-            <a:r>
-              <a:rPr lang="en-US" sz="1800" b="1" i="0" dirty="0" smtClean="0">
+                <a:latin typeface="+mj-lt"/>
+              </a:rPr>
+              <a:t> Канал</a:t>
+            </a:r>
+            <a:r>
+              <a:rPr lang="en-US" sz="6000" b="1" dirty="0" smtClean="0">
                 <a:solidFill>
                   <a:srgbClr val="F47629"/>
                 </a:solidFill>
-                <a:latin typeface="Calibri"/>
-              </a:rPr>
-              <a:t>4</a:t>
-            </a:r>
-            <a:endParaRPr sz="1800" b="1" i="0" dirty="0">
+                <a:latin typeface="+mj-lt"/>
+              </a:rPr>
+              <a:t> </a:t>
+            </a:r>
+            <a:endParaRPr sz="6000" b="1" dirty="0">
               <a:solidFill>
                 <a:srgbClr val="F47629"/>
               </a:solidFill>
-              <a:latin typeface="Calibri"/>
-            </a:endParaRPr>
-          </a:p>
-        </p:txBody>
-      </p:sp>
-      <p:sp>
-        <p:nvSpPr>
-          <p:cNvPr id="12" name="TextBox 11"/>
-          <p:cNvSpPr txBox="1"/>
-          <p:nvPr/>
-        </p:nvSpPr>
-        <p:spPr>
-          <a:xfrm>
-            <a:off x="2360803" y="3766058"/>
-            <a:ext cx="1783080" cy="228600"/>
-          </a:xfrm>
-          <a:prstGeom prst="rect">
-            <a:avLst/>
-          </a:prstGeom>
-          <a:noFill/>
-        </p:spPr>
-        <p:txBody>
-          <a:bodyPr wrap="square" lIns="0" tIns="0" rIns="0" bIns="0" anchor="t">
-            <a:spAutoFit/>
-          </a:bodyPr>
-          <a:lstStyle/>
-          <a:p>
-            <a:pPr algn="r">
-              <a:lnSpc>
-                <a:spcPct val="100000"/>
-              </a:lnSpc>
-            </a:pPr>
-            <a:r>
-              <a:rPr sz="800" b="1" i="0">
-                <a:solidFill>
-                  <a:srgbClr val="6B6B6B"/>
-                </a:solidFill>
-                <a:latin typeface="Calibri"/>
-              </a:rPr>
-              <a:t>МОТИВАЦИЯ</a:t>
-            </a:r>
-          </a:p>
-        </p:txBody>
-      </p:sp>
-      <p:sp>
-        <p:nvSpPr>
-          <p:cNvPr id="13" name="TextBox 12"/>
-          <p:cNvSpPr txBox="1"/>
-          <p:nvPr/>
-        </p:nvSpPr>
-        <p:spPr>
-          <a:xfrm>
-            <a:off x="1675003" y="4104386"/>
-            <a:ext cx="2468880" cy="411480"/>
-          </a:xfrm>
-          <a:prstGeom prst="rect">
-            <a:avLst/>
-          </a:prstGeom>
-          <a:noFill/>
-        </p:spPr>
-        <p:txBody>
-          <a:bodyPr wrap="square" lIns="0" tIns="0" rIns="0" bIns="0" anchor="t">
-            <a:spAutoFit/>
-          </a:bodyPr>
-          <a:lstStyle/>
-          <a:p>
-            <a:pPr algn="l">
-              <a:lnSpc>
-                <a:spcPct val="110000"/>
-              </a:lnSpc>
-            </a:pPr>
-            <a:r>
-              <a:rPr sz="1100" b="1" i="0">
-                <a:solidFill>
-                  <a:srgbClr val="313131"/>
-                </a:solidFill>
-                <a:latin typeface="Calibri"/>
-              </a:rPr>
-              <a:t>Доходность для дистрибьютора</a:t>
-            </a:r>
-          </a:p>
-        </p:txBody>
-      </p:sp>
-      <p:sp>
-        <p:nvSpPr>
-          <p:cNvPr id="14" name="TextBox 13"/>
-          <p:cNvSpPr txBox="1"/>
-          <p:nvPr/>
-        </p:nvSpPr>
-        <p:spPr>
-          <a:xfrm>
-            <a:off x="1675003" y="4515866"/>
-            <a:ext cx="2468880" cy="1051560"/>
-          </a:xfrm>
-          <a:prstGeom prst="rect">
-            <a:avLst/>
-          </a:prstGeom>
-          <a:noFill/>
-        </p:spPr>
-        <p:txBody>
-          <a:bodyPr wrap="square" lIns="0" tIns="0" rIns="0" bIns="0" anchor="t">
-            <a:spAutoFit/>
-          </a:bodyPr>
-          <a:lstStyle/>
-          <a:p>
-            <a:pPr algn="l">
-              <a:lnSpc>
-                <a:spcPct val="125000"/>
-              </a:lnSpc>
-            </a:pPr>
-            <a:r>
-              <a:rPr sz="850" b="0" i="0">
-                <a:solidFill>
-                  <a:srgbClr val="6B6B6B"/>
-                </a:solidFill>
-                <a:latin typeface="Calibri"/>
-              </a:rPr>
-              <a:t>Расчёт маржинальности B2B-канала. Демонстрируем дистрибьютору, что работа с B2B-партнёрами выгодна — доходность выше, чем в рознице, при меньших операционных затратах</a:t>
-            </a:r>
-          </a:p>
-        </p:txBody>
-      </p:sp>
-      <p:sp>
-        <p:nvSpPr>
-          <p:cNvPr id="15" name="Rounded Rectangle 14"/>
-          <p:cNvSpPr/>
-          <p:nvPr/>
-        </p:nvSpPr>
-        <p:spPr>
-          <a:xfrm>
-            <a:off x="1492123" y="1510665"/>
-            <a:ext cx="2788920" cy="2011680"/>
-          </a:xfrm>
-          <a:prstGeom prst="roundRect">
-            <a:avLst>
-              <a:gd name="adj" fmla="val 5000"/>
-            </a:avLst>
-          </a:prstGeom>
-          <a:solidFill>
-            <a:srgbClr val="FFFFFF"/>
-          </a:solidFill>
-          <a:ln w="9525">
-            <a:solidFill>
-              <a:srgbClr val="F5F5F5"/>
-            </a:solidFill>
-          </a:ln>
-          <a:effectLst/>
-        </p:spPr>
-        <p:style>
-          <a:lnRef idx="1">
-            <a:schemeClr val="accent1"/>
-          </a:lnRef>
-          <a:fillRef idx="3">
-            <a:schemeClr val="accent1"/>
-          </a:fillRef>
-          <a:effectRef idx="2">
-            <a:schemeClr val="accent1"/>
-          </a:effectRef>
-          <a:fontRef idx="minor">
-            <a:schemeClr val="lt1"/>
-          </a:fontRef>
-        </p:style>
-        <p:txBody>
-          <a:bodyPr rtlCol="0" anchor="ctr"/>
-          <a:lstStyle/>
-          <a:p>
-            <a:pPr algn="ctr"/>
-            <a:endParaRPr/>
-          </a:p>
-        </p:txBody>
-      </p:sp>
-      <p:sp>
-        <p:nvSpPr>
-          <p:cNvPr id="16" name="Rectangle 15"/>
-          <p:cNvSpPr/>
-          <p:nvPr/>
-        </p:nvSpPr>
-        <p:spPr>
-          <a:xfrm>
-            <a:off x="1492123" y="1510665"/>
-            <a:ext cx="73152" cy="2011680"/>
-          </a:xfrm>
-          <a:prstGeom prst="rect">
-            <a:avLst/>
-          </a:prstGeom>
-          <a:solidFill>
-            <a:srgbClr val="D55E0A"/>
-          </a:solidFill>
-          <a:ln>
-            <a:noFill/>
-          </a:ln>
-          <a:effectLst/>
-        </p:spPr>
-        <p:style>
-          <a:lnRef idx="1">
-            <a:schemeClr val="accent1"/>
-          </a:lnRef>
-          <a:fillRef idx="3">
-            <a:schemeClr val="accent1"/>
-          </a:fillRef>
-          <a:effectRef idx="2">
-            <a:schemeClr val="accent1"/>
-          </a:effectRef>
-          <a:fontRef idx="minor">
-            <a:schemeClr val="lt1"/>
-          </a:fontRef>
-        </p:style>
-        <p:txBody>
-          <a:bodyPr rtlCol="0" anchor="ctr"/>
-          <a:lstStyle/>
-          <a:p>
-            <a:pPr algn="ctr"/>
-            <a:endParaRPr/>
-          </a:p>
-        </p:txBody>
-      </p:sp>
-      <p:sp>
-        <p:nvSpPr>
-          <p:cNvPr id="17" name="TextBox 16"/>
-          <p:cNvSpPr txBox="1"/>
-          <p:nvPr/>
-        </p:nvSpPr>
-        <p:spPr>
-          <a:xfrm>
-            <a:off x="1675003" y="1602105"/>
-            <a:ext cx="640080" cy="274320"/>
-          </a:xfrm>
-          <a:prstGeom prst="rect">
-            <a:avLst/>
-          </a:prstGeom>
-          <a:noFill/>
-        </p:spPr>
-        <p:txBody>
-          <a:bodyPr wrap="square" lIns="0" tIns="0" rIns="0" bIns="0" anchor="t">
-            <a:spAutoFit/>
-          </a:bodyPr>
-          <a:lstStyle/>
-          <a:p>
-            <a:pPr algn="l">
-              <a:lnSpc>
-                <a:spcPct val="100000"/>
-              </a:lnSpc>
-            </a:pPr>
-            <a:r>
-              <a:rPr sz="1800" b="1" i="0" dirty="0" smtClean="0">
-                <a:solidFill>
-                  <a:srgbClr val="D55E0A"/>
-                </a:solidFill>
-                <a:latin typeface="Calibri"/>
-              </a:rPr>
-              <a:t>0</a:t>
-            </a:r>
-            <a:r>
-              <a:rPr lang="en-US" sz="1800" b="1" i="0" dirty="0" smtClean="0">
-                <a:solidFill>
-                  <a:srgbClr val="D55E0A"/>
-                </a:solidFill>
-                <a:latin typeface="Calibri"/>
-              </a:rPr>
-              <a:t>1</a:t>
-            </a:r>
-            <a:endParaRPr sz="1800" b="1" i="0" dirty="0">
-              <a:solidFill>
-                <a:srgbClr val="D55E0A"/>
-              </a:solidFill>
-              <a:latin typeface="Calibri"/>
-            </a:endParaRPr>
-          </a:p>
-        </p:txBody>
-      </p:sp>
-      <p:sp>
-        <p:nvSpPr>
-          <p:cNvPr id="18" name="TextBox 17"/>
-          <p:cNvSpPr txBox="1"/>
-          <p:nvPr/>
-        </p:nvSpPr>
-        <p:spPr>
-          <a:xfrm>
-            <a:off x="2360803" y="1629537"/>
-            <a:ext cx="1783080" cy="228600"/>
-          </a:xfrm>
-          <a:prstGeom prst="rect">
-            <a:avLst/>
-          </a:prstGeom>
-          <a:noFill/>
-        </p:spPr>
-        <p:txBody>
-          <a:bodyPr wrap="square" lIns="0" tIns="0" rIns="0" bIns="0" anchor="t">
-            <a:spAutoFit/>
-          </a:bodyPr>
-          <a:lstStyle/>
-          <a:p>
-            <a:pPr algn="r">
-              <a:lnSpc>
-                <a:spcPct val="100000"/>
-              </a:lnSpc>
-            </a:pPr>
-            <a:r>
-              <a:rPr sz="800" b="1" i="0">
-                <a:solidFill>
-                  <a:srgbClr val="6B6B6B"/>
-                </a:solidFill>
-                <a:latin typeface="Calibri"/>
-              </a:rPr>
-              <a:t>ТЕСТ-ОБРАЗЕЦ</a:t>
-            </a:r>
-          </a:p>
-        </p:txBody>
-      </p:sp>
-      <p:sp>
-        <p:nvSpPr>
-          <p:cNvPr id="19" name="TextBox 18"/>
-          <p:cNvSpPr txBox="1"/>
-          <p:nvPr/>
-        </p:nvSpPr>
-        <p:spPr>
-          <a:xfrm>
-            <a:off x="1675003" y="1967865"/>
-            <a:ext cx="2468880" cy="372410"/>
-          </a:xfrm>
-          <a:prstGeom prst="rect">
-            <a:avLst/>
-          </a:prstGeom>
-          <a:noFill/>
-        </p:spPr>
-        <p:txBody>
-          <a:bodyPr wrap="square" lIns="0" tIns="0" rIns="0" bIns="0" anchor="t">
-            <a:spAutoFit/>
-          </a:bodyPr>
-          <a:lstStyle/>
-          <a:p>
-            <a:pPr algn="l">
-              <a:lnSpc>
-                <a:spcPct val="110000"/>
-              </a:lnSpc>
-            </a:pPr>
-            <a:r>
-              <a:rPr sz="1100" b="1" i="0" dirty="0" err="1">
-                <a:solidFill>
-                  <a:srgbClr val="313131"/>
-                </a:solidFill>
-                <a:latin typeface="Calibri"/>
-              </a:rPr>
-              <a:t>Пробник</a:t>
-            </a:r>
-            <a:r>
-              <a:rPr sz="1100" b="1" i="0" dirty="0">
-                <a:solidFill>
-                  <a:srgbClr val="313131"/>
-                </a:solidFill>
-                <a:latin typeface="Calibri"/>
-              </a:rPr>
-              <a:t> TITAN 0,4 л (</a:t>
-            </a:r>
-            <a:r>
-              <a:rPr sz="1100" b="1" i="0" dirty="0" err="1">
-                <a:solidFill>
-                  <a:srgbClr val="313131"/>
-                </a:solidFill>
-                <a:latin typeface="Calibri"/>
-              </a:rPr>
-              <a:t>глянец</a:t>
-            </a:r>
-            <a:r>
-              <a:rPr sz="1100" b="1" i="0" dirty="0" smtClean="0">
-                <a:solidFill>
-                  <a:srgbClr val="313131"/>
-                </a:solidFill>
-                <a:latin typeface="Calibri"/>
-              </a:rPr>
-              <a:t>)</a:t>
-            </a:r>
-            <a:r>
-              <a:rPr lang="ru-RU" sz="1100" b="1" i="0" dirty="0" smtClean="0">
-                <a:solidFill>
-                  <a:srgbClr val="313131"/>
-                </a:solidFill>
-                <a:latin typeface="Calibri"/>
-              </a:rPr>
-              <a:t> + веерные железные </a:t>
-            </a:r>
-            <a:r>
-              <a:rPr lang="ru-RU" sz="1100" b="1" i="0" dirty="0" err="1" smtClean="0">
-                <a:solidFill>
-                  <a:srgbClr val="313131"/>
-                </a:solidFill>
-                <a:latin typeface="Calibri"/>
-              </a:rPr>
-              <a:t>выкрасы</a:t>
-            </a:r>
-            <a:endParaRPr sz="1100" b="1" i="0" dirty="0">
-              <a:solidFill>
-                <a:srgbClr val="313131"/>
-              </a:solidFill>
-              <a:latin typeface="Calibri"/>
-            </a:endParaRPr>
-          </a:p>
-        </p:txBody>
-      </p:sp>
-      <p:sp>
-        <p:nvSpPr>
-          <p:cNvPr id="20" name="TextBox 19"/>
-          <p:cNvSpPr txBox="1"/>
-          <p:nvPr/>
-        </p:nvSpPr>
-        <p:spPr>
-          <a:xfrm>
-            <a:off x="1675003" y="2379345"/>
-            <a:ext cx="2468880" cy="817531"/>
-          </a:xfrm>
-          <a:prstGeom prst="rect">
-            <a:avLst/>
-          </a:prstGeom>
-          <a:noFill/>
-        </p:spPr>
-        <p:txBody>
-          <a:bodyPr wrap="square" lIns="0" tIns="0" rIns="0" bIns="0" anchor="t">
-            <a:spAutoFit/>
-          </a:bodyPr>
-          <a:lstStyle/>
-          <a:p>
-            <a:pPr algn="l">
-              <a:lnSpc>
-                <a:spcPct val="125000"/>
-              </a:lnSpc>
-            </a:pPr>
-            <a:r>
-              <a:rPr sz="850" b="0" i="0" dirty="0" err="1">
-                <a:solidFill>
-                  <a:srgbClr val="6B6B6B"/>
-                </a:solidFill>
-                <a:latin typeface="Calibri"/>
-              </a:rPr>
-              <a:t>Тестовый</a:t>
-            </a:r>
-            <a:r>
-              <a:rPr sz="850" b="0" i="0" dirty="0">
-                <a:solidFill>
-                  <a:srgbClr val="6B6B6B"/>
-                </a:solidFill>
-                <a:latin typeface="Calibri"/>
-              </a:rPr>
-              <a:t> </a:t>
-            </a:r>
-            <a:r>
-              <a:rPr sz="850" b="0" i="0" dirty="0" err="1">
-                <a:solidFill>
-                  <a:srgbClr val="6B6B6B"/>
-                </a:solidFill>
-                <a:latin typeface="Calibri"/>
-              </a:rPr>
-              <a:t>образец</a:t>
-            </a:r>
-            <a:r>
-              <a:rPr sz="850" b="0" i="0" dirty="0">
-                <a:solidFill>
-                  <a:srgbClr val="6B6B6B"/>
-                </a:solidFill>
-                <a:latin typeface="Calibri"/>
-              </a:rPr>
-              <a:t> </a:t>
-            </a:r>
-            <a:r>
-              <a:rPr sz="850" b="0" i="0" dirty="0" err="1">
-                <a:solidFill>
-                  <a:srgbClr val="6B6B6B"/>
-                </a:solidFill>
-                <a:latin typeface="Calibri"/>
-              </a:rPr>
-              <a:t>для</a:t>
-            </a:r>
-            <a:r>
-              <a:rPr sz="850" b="0" i="0" dirty="0">
-                <a:solidFill>
-                  <a:srgbClr val="6B6B6B"/>
-                </a:solidFill>
-                <a:latin typeface="Calibri"/>
-              </a:rPr>
-              <a:t> B2B-партнёра. </a:t>
-            </a:r>
-            <a:r>
-              <a:rPr sz="850" b="0" i="0" dirty="0" err="1">
-                <a:solidFill>
-                  <a:srgbClr val="6B6B6B"/>
-                </a:solidFill>
-                <a:latin typeface="Calibri"/>
-              </a:rPr>
-              <a:t>Малая</a:t>
-            </a:r>
-            <a:r>
-              <a:rPr sz="850" b="0" i="0" dirty="0">
-                <a:solidFill>
-                  <a:srgbClr val="6B6B6B"/>
-                </a:solidFill>
-                <a:latin typeface="Calibri"/>
-              </a:rPr>
-              <a:t> </a:t>
-            </a:r>
-            <a:r>
-              <a:rPr sz="850" b="0" i="0" dirty="0" err="1">
-                <a:solidFill>
-                  <a:srgbClr val="6B6B6B"/>
-                </a:solidFill>
-                <a:latin typeface="Calibri"/>
-              </a:rPr>
-              <a:t>фасовка</a:t>
-            </a:r>
-            <a:r>
-              <a:rPr sz="850" b="0" i="0" dirty="0">
-                <a:solidFill>
-                  <a:srgbClr val="6B6B6B"/>
-                </a:solidFill>
-                <a:latin typeface="Calibri"/>
-              </a:rPr>
-              <a:t> — </a:t>
-            </a:r>
-            <a:r>
-              <a:rPr sz="850" b="0" i="0" dirty="0" err="1">
-                <a:solidFill>
-                  <a:srgbClr val="6B6B6B"/>
-                </a:solidFill>
-                <a:latin typeface="Calibri"/>
-              </a:rPr>
-              <a:t>низкий</a:t>
-            </a:r>
-            <a:r>
-              <a:rPr sz="850" b="0" i="0" dirty="0">
-                <a:solidFill>
-                  <a:srgbClr val="6B6B6B"/>
-                </a:solidFill>
-                <a:latin typeface="Calibri"/>
-              </a:rPr>
-              <a:t> </a:t>
-            </a:r>
-            <a:r>
-              <a:rPr sz="850" b="0" i="0" dirty="0" err="1">
-                <a:solidFill>
-                  <a:srgbClr val="6B6B6B"/>
-                </a:solidFill>
-                <a:latin typeface="Calibri"/>
-              </a:rPr>
-              <a:t>порог</a:t>
-            </a:r>
-            <a:r>
-              <a:rPr sz="850" b="0" i="0" dirty="0">
-                <a:solidFill>
-                  <a:srgbClr val="6B6B6B"/>
-                </a:solidFill>
-                <a:latin typeface="Calibri"/>
-              </a:rPr>
-              <a:t> </a:t>
-            </a:r>
-            <a:r>
-              <a:rPr sz="850" b="0" i="0" dirty="0" err="1">
-                <a:solidFill>
-                  <a:srgbClr val="6B6B6B"/>
-                </a:solidFill>
-                <a:latin typeface="Calibri"/>
-              </a:rPr>
-              <a:t>входа</a:t>
-            </a:r>
-            <a:r>
-              <a:rPr sz="850" b="0" i="0" dirty="0">
-                <a:solidFill>
-                  <a:srgbClr val="6B6B6B"/>
-                </a:solidFill>
-                <a:latin typeface="Calibri"/>
-              </a:rPr>
-              <a:t>. </a:t>
-            </a:r>
-            <a:r>
-              <a:rPr sz="850" b="0" i="0" dirty="0" err="1">
-                <a:solidFill>
-                  <a:srgbClr val="6B6B6B"/>
-                </a:solidFill>
-                <a:latin typeface="Calibri"/>
-              </a:rPr>
-              <a:t>Партнёр</a:t>
-            </a:r>
-            <a:r>
-              <a:rPr sz="850" b="0" i="0" dirty="0">
-                <a:solidFill>
-                  <a:srgbClr val="6B6B6B"/>
-                </a:solidFill>
-                <a:latin typeface="Calibri"/>
-              </a:rPr>
-              <a:t> </a:t>
-            </a:r>
-            <a:r>
-              <a:rPr sz="850" b="0" i="0" dirty="0" err="1">
-                <a:solidFill>
-                  <a:srgbClr val="6B6B6B"/>
-                </a:solidFill>
-                <a:latin typeface="Calibri"/>
-              </a:rPr>
-              <a:t>может</a:t>
-            </a:r>
-            <a:r>
-              <a:rPr sz="850" b="0" i="0" dirty="0">
-                <a:solidFill>
-                  <a:srgbClr val="6B6B6B"/>
-                </a:solidFill>
-                <a:latin typeface="Calibri"/>
-              </a:rPr>
-              <a:t> </a:t>
-            </a:r>
-            <a:r>
-              <a:rPr sz="850" b="0" i="0" dirty="0" err="1">
-                <a:solidFill>
-                  <a:srgbClr val="6B6B6B"/>
-                </a:solidFill>
-                <a:latin typeface="Calibri"/>
-              </a:rPr>
-              <a:t>попробовать</a:t>
-            </a:r>
-            <a:r>
-              <a:rPr sz="850" b="0" i="0" dirty="0">
-                <a:solidFill>
-                  <a:srgbClr val="6B6B6B"/>
-                </a:solidFill>
-                <a:latin typeface="Calibri"/>
-              </a:rPr>
-              <a:t> </a:t>
-            </a:r>
-            <a:r>
-              <a:rPr sz="850" b="0" i="0" dirty="0" err="1">
-                <a:solidFill>
-                  <a:srgbClr val="6B6B6B"/>
-                </a:solidFill>
-                <a:latin typeface="Calibri"/>
-              </a:rPr>
-              <a:t>продукт</a:t>
-            </a:r>
-            <a:r>
-              <a:rPr sz="850" b="0" i="0" dirty="0">
-                <a:solidFill>
-                  <a:srgbClr val="6B6B6B"/>
-                </a:solidFill>
-                <a:latin typeface="Calibri"/>
-              </a:rPr>
-              <a:t> </a:t>
-            </a:r>
-            <a:r>
-              <a:rPr sz="850" b="0" i="0" dirty="0" err="1">
-                <a:solidFill>
-                  <a:srgbClr val="6B6B6B"/>
-                </a:solidFill>
-                <a:latin typeface="Calibri"/>
-              </a:rPr>
-              <a:t>без</a:t>
-            </a:r>
-            <a:r>
-              <a:rPr sz="850" b="0" i="0" dirty="0">
-                <a:solidFill>
-                  <a:srgbClr val="6B6B6B"/>
-                </a:solidFill>
-                <a:latin typeface="Calibri"/>
-              </a:rPr>
-              <a:t> </a:t>
-            </a:r>
-            <a:r>
-              <a:rPr sz="850" b="0" i="0" dirty="0" err="1">
-                <a:solidFill>
-                  <a:srgbClr val="6B6B6B"/>
-                </a:solidFill>
-                <a:latin typeface="Calibri"/>
-              </a:rPr>
-              <a:t>больших</a:t>
-            </a:r>
-            <a:r>
-              <a:rPr sz="850" b="0" i="0" dirty="0">
-                <a:solidFill>
-                  <a:srgbClr val="6B6B6B"/>
-                </a:solidFill>
-                <a:latin typeface="Calibri"/>
-              </a:rPr>
-              <a:t> </a:t>
-            </a:r>
-            <a:r>
-              <a:rPr sz="850" b="0" i="0" dirty="0" err="1">
-                <a:solidFill>
-                  <a:srgbClr val="6B6B6B"/>
-                </a:solidFill>
-                <a:latin typeface="Calibri"/>
-              </a:rPr>
-              <a:t>затрат</a:t>
-            </a:r>
-            <a:r>
-              <a:rPr sz="850" b="0" i="0" dirty="0">
-                <a:solidFill>
-                  <a:srgbClr val="6B6B6B"/>
-                </a:solidFill>
-                <a:latin typeface="Calibri"/>
-              </a:rPr>
-              <a:t>, </a:t>
-            </a:r>
-            <a:r>
-              <a:rPr sz="850" b="0" i="0" dirty="0" err="1">
-                <a:solidFill>
-                  <a:srgbClr val="6B6B6B"/>
-                </a:solidFill>
-                <a:latin typeface="Calibri"/>
-              </a:rPr>
-              <a:t>оценить</a:t>
-            </a:r>
-            <a:r>
-              <a:rPr sz="850" b="0" i="0" dirty="0">
-                <a:solidFill>
-                  <a:srgbClr val="6B6B6B"/>
-                </a:solidFill>
-                <a:latin typeface="Calibri"/>
-              </a:rPr>
-              <a:t> </a:t>
-            </a:r>
-            <a:r>
-              <a:rPr sz="850" b="0" i="0" dirty="0" err="1">
-                <a:solidFill>
-                  <a:srgbClr val="6B6B6B"/>
-                </a:solidFill>
-                <a:latin typeface="Calibri"/>
-              </a:rPr>
-              <a:t>качество</a:t>
-            </a:r>
-            <a:r>
-              <a:rPr sz="850" b="0" i="0" dirty="0">
-                <a:solidFill>
-                  <a:srgbClr val="6B6B6B"/>
-                </a:solidFill>
-                <a:latin typeface="Calibri"/>
-              </a:rPr>
-              <a:t> и </a:t>
-            </a:r>
-            <a:r>
-              <a:rPr sz="850" b="0" i="0" dirty="0" err="1">
-                <a:solidFill>
-                  <a:srgbClr val="6B6B6B"/>
-                </a:solidFill>
-                <a:latin typeface="Calibri"/>
-              </a:rPr>
-              <a:t>принять</a:t>
-            </a:r>
-            <a:r>
-              <a:rPr sz="850" b="0" i="0" dirty="0">
-                <a:solidFill>
-                  <a:srgbClr val="6B6B6B"/>
-                </a:solidFill>
-                <a:latin typeface="Calibri"/>
-              </a:rPr>
-              <a:t> </a:t>
-            </a:r>
-            <a:r>
-              <a:rPr sz="850" b="0" i="0" dirty="0" err="1">
-                <a:solidFill>
-                  <a:srgbClr val="6B6B6B"/>
-                </a:solidFill>
-                <a:latin typeface="Calibri"/>
-              </a:rPr>
-              <a:t>решение</a:t>
-            </a:r>
-            <a:r>
-              <a:rPr sz="850" b="0" i="0" dirty="0">
-                <a:solidFill>
-                  <a:srgbClr val="6B6B6B"/>
-                </a:solidFill>
-                <a:latin typeface="Calibri"/>
-              </a:rPr>
-              <a:t> о </a:t>
-            </a:r>
-            <a:r>
-              <a:rPr sz="850" b="0" i="0" dirty="0" err="1" smtClean="0">
-                <a:solidFill>
-                  <a:srgbClr val="6B6B6B"/>
-                </a:solidFill>
-                <a:latin typeface="Calibri"/>
-              </a:rPr>
-              <a:t>закупке</a:t>
-            </a:r>
-            <a:r>
-              <a:rPr lang="ru-RU" sz="850" dirty="0" smtClean="0">
-                <a:solidFill>
-                  <a:srgbClr val="6B6B6B"/>
-                </a:solidFill>
-                <a:latin typeface="Calibri"/>
-              </a:rPr>
-              <a:t>. Также ознакомиться с цветовой палитрой.</a:t>
-            </a:r>
-            <a:endParaRPr sz="850" b="0" i="0" dirty="0">
-              <a:solidFill>
-                <a:srgbClr val="6B6B6B"/>
-              </a:solidFill>
-              <a:latin typeface="Calibri"/>
-            </a:endParaRPr>
-          </a:p>
-        </p:txBody>
-      </p:sp>
-      <p:sp>
-        <p:nvSpPr>
-          <p:cNvPr id="21" name="Rounded Rectangle 20"/>
-          <p:cNvSpPr/>
-          <p:nvPr/>
-        </p:nvSpPr>
-        <p:spPr>
-          <a:xfrm>
-            <a:off x="4390771" y="1510665"/>
-            <a:ext cx="2788920" cy="2011680"/>
-          </a:xfrm>
-          <a:prstGeom prst="roundRect">
-            <a:avLst>
-              <a:gd name="adj" fmla="val 5000"/>
-            </a:avLst>
-          </a:prstGeom>
-          <a:solidFill>
-            <a:srgbClr val="FFFFFF"/>
-          </a:solidFill>
-          <a:ln w="9525">
-            <a:solidFill>
-              <a:srgbClr val="F5F5F5"/>
-            </a:solidFill>
-          </a:ln>
-          <a:effectLst/>
-        </p:spPr>
-        <p:style>
-          <a:lnRef idx="1">
-            <a:schemeClr val="accent1"/>
-          </a:lnRef>
-          <a:fillRef idx="3">
-            <a:schemeClr val="accent1"/>
-          </a:fillRef>
-          <a:effectRef idx="2">
-            <a:schemeClr val="accent1"/>
-          </a:effectRef>
-          <a:fontRef idx="minor">
-            <a:schemeClr val="lt1"/>
-          </a:fontRef>
-        </p:style>
-        <p:txBody>
-          <a:bodyPr rtlCol="0" anchor="ctr"/>
-          <a:lstStyle/>
-          <a:p>
-            <a:pPr algn="ctr"/>
-            <a:endParaRPr/>
-          </a:p>
-        </p:txBody>
-      </p:sp>
-      <p:sp>
-        <p:nvSpPr>
-          <p:cNvPr id="22" name="Rectangle 21"/>
-          <p:cNvSpPr/>
-          <p:nvPr/>
-        </p:nvSpPr>
-        <p:spPr>
-          <a:xfrm>
-            <a:off x="4390771" y="1510665"/>
-            <a:ext cx="73152" cy="2011680"/>
-          </a:xfrm>
-          <a:prstGeom prst="rect">
-            <a:avLst/>
-          </a:prstGeom>
-          <a:solidFill>
-            <a:srgbClr val="F47629"/>
-          </a:solidFill>
-          <a:ln>
-            <a:noFill/>
-          </a:ln>
-          <a:effectLst/>
-        </p:spPr>
-        <p:style>
-          <a:lnRef idx="1">
-            <a:schemeClr val="accent1"/>
-          </a:lnRef>
-          <a:fillRef idx="3">
-            <a:schemeClr val="accent1"/>
-          </a:fillRef>
-          <a:effectRef idx="2">
-            <a:schemeClr val="accent1"/>
-          </a:effectRef>
-          <a:fontRef idx="minor">
-            <a:schemeClr val="lt1"/>
-          </a:fontRef>
-        </p:style>
-        <p:txBody>
-          <a:bodyPr rtlCol="0" anchor="ctr"/>
-          <a:lstStyle/>
-          <a:p>
-            <a:pPr algn="ctr"/>
-            <a:endParaRPr/>
-          </a:p>
-        </p:txBody>
-      </p:sp>
-      <p:sp>
-        <p:nvSpPr>
-          <p:cNvPr id="23" name="TextBox 22"/>
-          <p:cNvSpPr txBox="1"/>
-          <p:nvPr/>
-        </p:nvSpPr>
-        <p:spPr>
-          <a:xfrm>
-            <a:off x="4573651" y="1602105"/>
-            <a:ext cx="640080" cy="274320"/>
-          </a:xfrm>
-          <a:prstGeom prst="rect">
-            <a:avLst/>
-          </a:prstGeom>
-          <a:noFill/>
-        </p:spPr>
-        <p:txBody>
-          <a:bodyPr wrap="square" lIns="0" tIns="0" rIns="0" bIns="0" anchor="t">
-            <a:spAutoFit/>
-          </a:bodyPr>
-          <a:lstStyle/>
-          <a:p>
-            <a:pPr algn="l">
-              <a:lnSpc>
-                <a:spcPct val="100000"/>
-              </a:lnSpc>
-            </a:pPr>
-            <a:r>
-              <a:rPr sz="1800" b="1" i="0" dirty="0" smtClean="0">
-                <a:solidFill>
-                  <a:srgbClr val="F47629"/>
-                </a:solidFill>
-                <a:latin typeface="Calibri"/>
-              </a:rPr>
-              <a:t>0</a:t>
-            </a:r>
-            <a:r>
-              <a:rPr lang="en-US" sz="1800" b="1" i="0" dirty="0" smtClean="0">
-                <a:solidFill>
-                  <a:srgbClr val="F47629"/>
-                </a:solidFill>
-                <a:latin typeface="Calibri"/>
-              </a:rPr>
-              <a:t>2</a:t>
-            </a:r>
-            <a:endParaRPr sz="1800" b="1" i="0" dirty="0">
-              <a:solidFill>
-                <a:srgbClr val="F47629"/>
-              </a:solidFill>
-              <a:latin typeface="Calibri"/>
-            </a:endParaRPr>
-          </a:p>
-        </p:txBody>
-      </p:sp>
-      <p:sp>
-        <p:nvSpPr>
-          <p:cNvPr id="24" name="TextBox 23"/>
-          <p:cNvSpPr txBox="1"/>
-          <p:nvPr/>
-        </p:nvSpPr>
-        <p:spPr>
-          <a:xfrm>
-            <a:off x="5259451" y="1629537"/>
-            <a:ext cx="1783080" cy="228600"/>
-          </a:xfrm>
-          <a:prstGeom prst="rect">
-            <a:avLst/>
-          </a:prstGeom>
-          <a:noFill/>
-        </p:spPr>
-        <p:txBody>
-          <a:bodyPr wrap="square" lIns="0" tIns="0" rIns="0" bIns="0" anchor="t">
-            <a:spAutoFit/>
-          </a:bodyPr>
-          <a:lstStyle/>
-          <a:p>
-            <a:pPr algn="r">
-              <a:lnSpc>
-                <a:spcPct val="100000"/>
-              </a:lnSpc>
-            </a:pPr>
-            <a:r>
-              <a:rPr sz="800" b="1" i="0">
-                <a:solidFill>
-                  <a:srgbClr val="6B6B6B"/>
-                </a:solidFill>
-                <a:latin typeface="Calibri"/>
-              </a:rPr>
-              <a:t>ИНСТРУМЕНТ</a:t>
-            </a:r>
-          </a:p>
-        </p:txBody>
-      </p:sp>
-      <p:sp>
-        <p:nvSpPr>
-          <p:cNvPr id="25" name="TextBox 24"/>
-          <p:cNvSpPr txBox="1"/>
-          <p:nvPr/>
-        </p:nvSpPr>
-        <p:spPr>
-          <a:xfrm>
-            <a:off x="4573651" y="1967865"/>
-            <a:ext cx="2468880" cy="411480"/>
-          </a:xfrm>
-          <a:prstGeom prst="rect">
-            <a:avLst/>
-          </a:prstGeom>
-          <a:noFill/>
-        </p:spPr>
-        <p:txBody>
-          <a:bodyPr wrap="square" lIns="0" tIns="0" rIns="0" bIns="0" anchor="t">
-            <a:spAutoFit/>
-          </a:bodyPr>
-          <a:lstStyle/>
-          <a:p>
-            <a:pPr algn="l">
-              <a:lnSpc>
-                <a:spcPct val="110000"/>
-              </a:lnSpc>
-            </a:pPr>
-            <a:r>
-              <a:rPr sz="1100" b="1" i="0" dirty="0" err="1">
-                <a:solidFill>
-                  <a:srgbClr val="313131"/>
-                </a:solidFill>
-                <a:latin typeface="Calibri"/>
-              </a:rPr>
-              <a:t>Листовка</a:t>
-            </a:r>
-            <a:r>
-              <a:rPr sz="1100" b="1" i="0" dirty="0">
-                <a:solidFill>
-                  <a:srgbClr val="313131"/>
-                </a:solidFill>
-                <a:latin typeface="Calibri"/>
-              </a:rPr>
-              <a:t> </a:t>
-            </a:r>
-            <a:r>
-              <a:rPr sz="1100" b="1" i="0" dirty="0" err="1">
-                <a:solidFill>
-                  <a:srgbClr val="313131"/>
-                </a:solidFill>
-                <a:latin typeface="Calibri"/>
-              </a:rPr>
-              <a:t>для</a:t>
-            </a:r>
-            <a:r>
-              <a:rPr sz="1100" b="1" i="0" dirty="0">
-                <a:solidFill>
-                  <a:srgbClr val="313131"/>
-                </a:solidFill>
-                <a:latin typeface="Calibri"/>
-              </a:rPr>
-              <a:t> B2B-сегмента</a:t>
-            </a:r>
-          </a:p>
-        </p:txBody>
-      </p:sp>
-      <p:sp>
-        <p:nvSpPr>
-          <p:cNvPr id="26" name="TextBox 25"/>
-          <p:cNvSpPr txBox="1"/>
-          <p:nvPr/>
-        </p:nvSpPr>
-        <p:spPr>
-          <a:xfrm>
-            <a:off x="4573651" y="2379345"/>
-            <a:ext cx="2468880" cy="1051560"/>
-          </a:xfrm>
-          <a:prstGeom prst="rect">
-            <a:avLst/>
-          </a:prstGeom>
-          <a:noFill/>
-        </p:spPr>
-        <p:txBody>
-          <a:bodyPr wrap="square" lIns="0" tIns="0" rIns="0" bIns="0" anchor="t">
-            <a:spAutoFit/>
-          </a:bodyPr>
-          <a:lstStyle/>
-          <a:p>
-            <a:pPr algn="l">
-              <a:lnSpc>
-                <a:spcPct val="125000"/>
-              </a:lnSpc>
-            </a:pPr>
-            <a:r>
-              <a:rPr sz="850" b="0" i="0">
-                <a:solidFill>
-                  <a:srgbClr val="6B6B6B"/>
-                </a:solidFill>
-                <a:latin typeface="Calibri"/>
-              </a:rPr>
-              <a:t>Отдельная листовка с расчётом выгоды TITAN для B2B-клиента: срок службы 10 лет, совокупная стоимость владения, экономия vs ПФ-115. Фокус на окупаемость, а не на цену банки</a:t>
-            </a:r>
-          </a:p>
-        </p:txBody>
-      </p:sp>
-      <p:sp>
-        <p:nvSpPr>
-          <p:cNvPr id="29" name="TextBox 28"/>
-          <p:cNvSpPr txBox="1"/>
-          <p:nvPr/>
-        </p:nvSpPr>
-        <p:spPr>
-          <a:xfrm>
-            <a:off x="4512183" y="3723513"/>
-            <a:ext cx="640080" cy="274320"/>
-          </a:xfrm>
-          <a:prstGeom prst="rect">
-            <a:avLst/>
-          </a:prstGeom>
-          <a:noFill/>
-        </p:spPr>
-        <p:txBody>
-          <a:bodyPr wrap="square" lIns="0" tIns="0" rIns="0" bIns="0" anchor="t">
-            <a:spAutoFit/>
-          </a:bodyPr>
-          <a:lstStyle/>
-          <a:p>
-            <a:pPr algn="l">
-              <a:lnSpc>
-                <a:spcPct val="100000"/>
-              </a:lnSpc>
-            </a:pPr>
-            <a:r>
-              <a:rPr sz="1800" b="1" i="0" dirty="0" smtClean="0">
-                <a:solidFill>
-                  <a:srgbClr val="D55E0A"/>
-                </a:solidFill>
-                <a:latin typeface="Calibri"/>
-              </a:rPr>
-              <a:t>0</a:t>
-            </a:r>
-            <a:r>
-              <a:rPr lang="ru-RU" sz="1800" b="1" i="0" dirty="0" smtClean="0">
-                <a:solidFill>
-                  <a:srgbClr val="D55E0A"/>
-                </a:solidFill>
-                <a:latin typeface="Calibri"/>
-              </a:rPr>
-              <a:t>5</a:t>
-            </a:r>
-            <a:endParaRPr sz="1800" b="1" i="0" dirty="0">
-              <a:solidFill>
-                <a:srgbClr val="D55E0A"/>
-              </a:solidFill>
-              <a:latin typeface="Calibri"/>
-            </a:endParaRPr>
-          </a:p>
-        </p:txBody>
-      </p:sp>
-      <p:sp>
-        <p:nvSpPr>
-          <p:cNvPr id="30" name="TextBox 29"/>
-          <p:cNvSpPr txBox="1"/>
-          <p:nvPr/>
-        </p:nvSpPr>
-        <p:spPr>
-          <a:xfrm>
-            <a:off x="5197983" y="3750945"/>
-            <a:ext cx="1783080" cy="228600"/>
-          </a:xfrm>
-          <a:prstGeom prst="rect">
-            <a:avLst/>
-          </a:prstGeom>
-          <a:noFill/>
-        </p:spPr>
-        <p:txBody>
-          <a:bodyPr wrap="square" lIns="0" tIns="0" rIns="0" bIns="0" anchor="t">
-            <a:spAutoFit/>
-          </a:bodyPr>
-          <a:lstStyle/>
-          <a:p>
-            <a:pPr algn="r">
-              <a:lnSpc>
-                <a:spcPct val="100000"/>
-              </a:lnSpc>
-            </a:pPr>
-            <a:r>
-              <a:rPr sz="800" b="1" i="0">
-                <a:solidFill>
-                  <a:srgbClr val="6B6B6B"/>
-                </a:solidFill>
-                <a:latin typeface="Calibri"/>
-              </a:rPr>
-              <a:t>МАРЖА</a:t>
-            </a:r>
-          </a:p>
-        </p:txBody>
-      </p:sp>
-      <p:sp>
-        <p:nvSpPr>
-          <p:cNvPr id="31" name="TextBox 30"/>
-          <p:cNvSpPr txBox="1"/>
-          <p:nvPr/>
-        </p:nvSpPr>
-        <p:spPr>
-          <a:xfrm>
-            <a:off x="4512183" y="4089273"/>
-            <a:ext cx="2468880" cy="411480"/>
-          </a:xfrm>
-          <a:prstGeom prst="rect">
-            <a:avLst/>
-          </a:prstGeom>
-          <a:noFill/>
-        </p:spPr>
-        <p:txBody>
-          <a:bodyPr wrap="square" lIns="0" tIns="0" rIns="0" bIns="0" anchor="t">
-            <a:spAutoFit/>
-          </a:bodyPr>
-          <a:lstStyle/>
-          <a:p>
-            <a:pPr algn="l">
-              <a:lnSpc>
-                <a:spcPct val="110000"/>
-              </a:lnSpc>
-            </a:pPr>
-            <a:r>
-              <a:rPr sz="1100" b="1" i="0">
-                <a:solidFill>
-                  <a:srgbClr val="313131"/>
-                </a:solidFill>
-                <a:latin typeface="Calibri"/>
-              </a:rPr>
-              <a:t>Смещение к крупной фасовке</a:t>
-            </a:r>
-          </a:p>
-        </p:txBody>
-      </p:sp>
-      <p:sp>
-        <p:nvSpPr>
-          <p:cNvPr id="32" name="TextBox 31"/>
-          <p:cNvSpPr txBox="1"/>
-          <p:nvPr/>
-        </p:nvSpPr>
-        <p:spPr>
-          <a:xfrm>
-            <a:off x="4512183" y="4500753"/>
-            <a:ext cx="2468880" cy="817531"/>
-          </a:xfrm>
-          <a:prstGeom prst="rect">
-            <a:avLst/>
-          </a:prstGeom>
-          <a:noFill/>
-        </p:spPr>
-        <p:txBody>
-          <a:bodyPr wrap="square" lIns="0" tIns="0" rIns="0" bIns="0" anchor="t">
-            <a:spAutoFit/>
-          </a:bodyPr>
-          <a:lstStyle/>
-          <a:p>
-            <a:pPr algn="l">
-              <a:lnSpc>
-                <a:spcPct val="125000"/>
-              </a:lnSpc>
-            </a:pPr>
-            <a:r>
-              <a:rPr sz="850" b="0" i="0" dirty="0" err="1">
-                <a:solidFill>
-                  <a:srgbClr val="6B6B6B"/>
-                </a:solidFill>
-                <a:latin typeface="Calibri"/>
-              </a:rPr>
-              <a:t>Расчёт</a:t>
-            </a:r>
-            <a:r>
-              <a:rPr sz="850" b="0" i="0" dirty="0">
-                <a:solidFill>
-                  <a:srgbClr val="6B6B6B"/>
-                </a:solidFill>
-                <a:latin typeface="Calibri"/>
-              </a:rPr>
-              <a:t> </a:t>
-            </a:r>
-            <a:r>
-              <a:rPr sz="850" b="0" i="0" dirty="0" err="1">
-                <a:solidFill>
-                  <a:srgbClr val="6B6B6B"/>
-                </a:solidFill>
-                <a:latin typeface="Calibri"/>
-              </a:rPr>
-              <a:t>маржинальности</a:t>
-            </a:r>
-            <a:r>
-              <a:rPr sz="850" b="0" i="0" dirty="0">
-                <a:solidFill>
-                  <a:srgbClr val="6B6B6B"/>
-                </a:solidFill>
-                <a:latin typeface="Calibri"/>
-              </a:rPr>
-              <a:t> </a:t>
-            </a:r>
-            <a:r>
-              <a:rPr sz="850" b="0" i="0" dirty="0" err="1">
-                <a:solidFill>
-                  <a:srgbClr val="6B6B6B"/>
-                </a:solidFill>
-                <a:latin typeface="Calibri"/>
-              </a:rPr>
-              <a:t>по</a:t>
-            </a:r>
-            <a:r>
-              <a:rPr sz="850" b="0" i="0" dirty="0">
-                <a:solidFill>
-                  <a:srgbClr val="6B6B6B"/>
-                </a:solidFill>
-                <a:latin typeface="Calibri"/>
-              </a:rPr>
-              <a:t> </a:t>
-            </a:r>
-            <a:r>
-              <a:rPr sz="850" b="0" i="0" dirty="0" err="1" smtClean="0">
-                <a:solidFill>
-                  <a:srgbClr val="6B6B6B"/>
-                </a:solidFill>
-                <a:latin typeface="Calibri"/>
-              </a:rPr>
-              <a:t>фасовкам</a:t>
-            </a:r>
-            <a:r>
-              <a:rPr lang="ru-RU" sz="850" b="0" i="0" dirty="0" smtClean="0">
-                <a:solidFill>
-                  <a:srgbClr val="6B6B6B"/>
-                </a:solidFill>
-                <a:latin typeface="Calibri"/>
-              </a:rPr>
-              <a:t>, </a:t>
-            </a:r>
-            <a:r>
-              <a:rPr lang="ru-RU" sz="850" b="0" i="0" dirty="0" err="1" smtClean="0">
-                <a:solidFill>
-                  <a:srgbClr val="6B6B6B"/>
-                </a:solidFill>
-                <a:latin typeface="Calibri"/>
-              </a:rPr>
-              <a:t>абсолюная</a:t>
-            </a:r>
-            <a:r>
-              <a:rPr lang="ru-RU" sz="850" b="0" i="0" dirty="0" smtClean="0">
-                <a:solidFill>
-                  <a:srgbClr val="6B6B6B"/>
-                </a:solidFill>
-                <a:latin typeface="Calibri"/>
-              </a:rPr>
-              <a:t> прибыль</a:t>
-            </a:r>
-            <a:r>
-              <a:rPr sz="850" b="0" i="0" dirty="0" smtClean="0">
-                <a:solidFill>
-                  <a:srgbClr val="6B6B6B"/>
-                </a:solidFill>
-                <a:latin typeface="Calibri"/>
-              </a:rPr>
-              <a:t>. </a:t>
-            </a:r>
-            <a:r>
-              <a:rPr sz="850" b="0" i="0" dirty="0">
-                <a:solidFill>
-                  <a:srgbClr val="6B6B6B"/>
-                </a:solidFill>
-                <a:latin typeface="Calibri"/>
-              </a:rPr>
-              <a:t>B2B-клиенту </a:t>
-            </a:r>
-            <a:r>
-              <a:rPr sz="850" b="0" i="0" dirty="0" err="1">
-                <a:solidFill>
-                  <a:srgbClr val="6B6B6B"/>
-                </a:solidFill>
-                <a:latin typeface="Calibri"/>
-              </a:rPr>
-              <a:t>выгоднее</a:t>
-            </a:r>
-            <a:r>
-              <a:rPr sz="850" b="0" i="0" dirty="0">
-                <a:solidFill>
-                  <a:srgbClr val="6B6B6B"/>
-                </a:solidFill>
-                <a:latin typeface="Calibri"/>
-              </a:rPr>
-              <a:t> </a:t>
-            </a:r>
-            <a:r>
-              <a:rPr lang="en-US" sz="850" dirty="0" smtClean="0">
-                <a:solidFill>
-                  <a:srgbClr val="6B6B6B"/>
-                </a:solidFill>
-                <a:latin typeface="Calibri"/>
-              </a:rPr>
-              <a:t>8,5</a:t>
-            </a:r>
-            <a:r>
-              <a:rPr sz="850" b="0" i="0" dirty="0" smtClean="0">
-                <a:solidFill>
-                  <a:srgbClr val="6B6B6B"/>
-                </a:solidFill>
-                <a:latin typeface="Calibri"/>
-              </a:rPr>
-              <a:t> </a:t>
-            </a:r>
-            <a:r>
-              <a:rPr sz="850" b="0" i="0" dirty="0">
-                <a:solidFill>
-                  <a:srgbClr val="6B6B6B"/>
-                </a:solidFill>
-                <a:latin typeface="Calibri"/>
-              </a:rPr>
-              <a:t>л / </a:t>
-            </a:r>
-            <a:r>
-              <a:rPr lang="en-US" sz="850" b="0" i="0" dirty="0" smtClean="0">
-                <a:solidFill>
-                  <a:srgbClr val="6B6B6B"/>
-                </a:solidFill>
-                <a:latin typeface="Calibri"/>
-              </a:rPr>
-              <a:t>10</a:t>
-            </a:r>
-            <a:r>
-              <a:rPr sz="850" b="0" i="0" dirty="0" smtClean="0">
-                <a:solidFill>
-                  <a:srgbClr val="6B6B6B"/>
-                </a:solidFill>
-                <a:latin typeface="Calibri"/>
-              </a:rPr>
-              <a:t> </a:t>
-            </a:r>
-            <a:r>
-              <a:rPr sz="850" b="0" i="0" dirty="0" err="1">
-                <a:solidFill>
-                  <a:srgbClr val="6B6B6B"/>
-                </a:solidFill>
-                <a:latin typeface="Calibri"/>
-              </a:rPr>
-              <a:t>кг</a:t>
-            </a:r>
-            <a:r>
-              <a:rPr sz="850" b="0" i="0" dirty="0">
-                <a:solidFill>
-                  <a:srgbClr val="6B6B6B"/>
-                </a:solidFill>
-                <a:latin typeface="Calibri"/>
-              </a:rPr>
-              <a:t>, </a:t>
-            </a:r>
-            <a:r>
-              <a:rPr sz="850" b="0" i="0" dirty="0" err="1">
-                <a:solidFill>
-                  <a:srgbClr val="6B6B6B"/>
-                </a:solidFill>
-                <a:latin typeface="Calibri"/>
-              </a:rPr>
-              <a:t>чем</a:t>
-            </a:r>
-            <a:r>
-              <a:rPr sz="850" b="0" i="0" dirty="0">
-                <a:solidFill>
-                  <a:srgbClr val="6B6B6B"/>
-                </a:solidFill>
-                <a:latin typeface="Calibri"/>
-              </a:rPr>
-              <a:t> 0,75 л. </a:t>
-            </a:r>
-            <a:r>
-              <a:rPr sz="850" b="0" i="0" dirty="0" err="1">
-                <a:solidFill>
-                  <a:srgbClr val="6B6B6B"/>
-                </a:solidFill>
-                <a:latin typeface="Calibri"/>
-              </a:rPr>
-              <a:t>Дистрибьютор</a:t>
-            </a:r>
-            <a:r>
-              <a:rPr sz="850" b="0" i="0" dirty="0">
-                <a:solidFill>
-                  <a:srgbClr val="6B6B6B"/>
-                </a:solidFill>
-                <a:latin typeface="Calibri"/>
-              </a:rPr>
-              <a:t> </a:t>
-            </a:r>
-            <a:r>
-              <a:rPr sz="850" b="0" i="0" dirty="0" err="1">
-                <a:solidFill>
-                  <a:srgbClr val="6B6B6B"/>
-                </a:solidFill>
-                <a:latin typeface="Calibri"/>
-              </a:rPr>
-              <a:t>зарабатывает</a:t>
-            </a:r>
-            <a:r>
-              <a:rPr sz="850" b="0" i="0" dirty="0">
-                <a:solidFill>
-                  <a:srgbClr val="6B6B6B"/>
-                </a:solidFill>
-                <a:latin typeface="Calibri"/>
-              </a:rPr>
-              <a:t> </a:t>
-            </a:r>
-            <a:r>
-              <a:rPr sz="850" b="0" i="0" dirty="0" err="1">
-                <a:solidFill>
-                  <a:srgbClr val="6B6B6B"/>
-                </a:solidFill>
-                <a:latin typeface="Calibri"/>
-              </a:rPr>
-              <a:t>больше</a:t>
-            </a:r>
-            <a:r>
-              <a:rPr sz="850" b="0" i="0" dirty="0">
-                <a:solidFill>
-                  <a:srgbClr val="6B6B6B"/>
-                </a:solidFill>
-                <a:latin typeface="Calibri"/>
-              </a:rPr>
-              <a:t> </a:t>
-            </a:r>
-            <a:r>
-              <a:rPr sz="850" b="0" i="0" dirty="0" err="1">
-                <a:solidFill>
-                  <a:srgbClr val="6B6B6B"/>
-                </a:solidFill>
-                <a:latin typeface="Calibri"/>
-              </a:rPr>
-              <a:t>на</a:t>
-            </a:r>
-            <a:r>
-              <a:rPr sz="850" b="0" i="0" dirty="0">
-                <a:solidFill>
-                  <a:srgbClr val="6B6B6B"/>
-                </a:solidFill>
-                <a:latin typeface="Calibri"/>
-              </a:rPr>
-              <a:t> </a:t>
-            </a:r>
-            <a:r>
-              <a:rPr sz="850" b="0" i="0" dirty="0" err="1">
-                <a:solidFill>
-                  <a:srgbClr val="6B6B6B"/>
-                </a:solidFill>
-                <a:latin typeface="Calibri"/>
-              </a:rPr>
-              <a:t>крупной</a:t>
-            </a:r>
-            <a:r>
-              <a:rPr sz="850" b="0" i="0" dirty="0">
-                <a:solidFill>
-                  <a:srgbClr val="6B6B6B"/>
-                </a:solidFill>
-                <a:latin typeface="Calibri"/>
-              </a:rPr>
-              <a:t> </a:t>
-            </a:r>
-            <a:r>
-              <a:rPr sz="850" b="0" i="0" dirty="0" err="1">
-                <a:solidFill>
-                  <a:srgbClr val="6B6B6B"/>
-                </a:solidFill>
-                <a:latin typeface="Calibri"/>
-              </a:rPr>
-              <a:t>фасовке</a:t>
-            </a:r>
-            <a:r>
-              <a:rPr sz="850" b="0" i="0" dirty="0">
-                <a:solidFill>
-                  <a:srgbClr val="6B6B6B"/>
-                </a:solidFill>
-                <a:latin typeface="Calibri"/>
-              </a:rPr>
-              <a:t> — </a:t>
-            </a:r>
-            <a:r>
-              <a:rPr sz="850" b="0" i="0" dirty="0" err="1">
-                <a:solidFill>
-                  <a:srgbClr val="6B6B6B"/>
-                </a:solidFill>
-                <a:latin typeface="Calibri"/>
-              </a:rPr>
-              <a:t>мотивируем</a:t>
-            </a:r>
-            <a:r>
-              <a:rPr sz="850" b="0" i="0" dirty="0">
-                <a:solidFill>
-                  <a:srgbClr val="6B6B6B"/>
-                </a:solidFill>
-                <a:latin typeface="Calibri"/>
-              </a:rPr>
-              <a:t> </a:t>
-            </a:r>
-            <a:r>
-              <a:rPr sz="850" b="0" i="0" dirty="0" err="1">
-                <a:solidFill>
-                  <a:srgbClr val="6B6B6B"/>
-                </a:solidFill>
-                <a:latin typeface="Calibri"/>
-              </a:rPr>
-              <a:t>его</a:t>
-            </a:r>
-            <a:r>
-              <a:rPr sz="850" b="0" i="0" dirty="0">
-                <a:solidFill>
-                  <a:srgbClr val="6B6B6B"/>
-                </a:solidFill>
-                <a:latin typeface="Calibri"/>
-              </a:rPr>
-              <a:t> </a:t>
-            </a:r>
-            <a:r>
-              <a:rPr sz="850" b="0" i="0" dirty="0" err="1">
-                <a:solidFill>
-                  <a:srgbClr val="6B6B6B"/>
-                </a:solidFill>
-                <a:latin typeface="Calibri"/>
-              </a:rPr>
-              <a:t>продвигать</a:t>
-            </a:r>
-            <a:r>
-              <a:rPr sz="850" b="0" i="0" dirty="0">
-                <a:solidFill>
-                  <a:srgbClr val="6B6B6B"/>
-                </a:solidFill>
-                <a:latin typeface="Calibri"/>
-              </a:rPr>
-              <a:t> </a:t>
-            </a:r>
-            <a:r>
-              <a:rPr sz="850" b="0" i="0" dirty="0" err="1">
-                <a:solidFill>
-                  <a:srgbClr val="6B6B6B"/>
-                </a:solidFill>
-                <a:latin typeface="Calibri"/>
-              </a:rPr>
-              <a:t>именно</a:t>
-            </a:r>
-            <a:r>
-              <a:rPr sz="850" b="0" i="0" dirty="0">
-                <a:solidFill>
-                  <a:srgbClr val="6B6B6B"/>
-                </a:solidFill>
-                <a:latin typeface="Calibri"/>
-              </a:rPr>
-              <a:t> </a:t>
-            </a:r>
-            <a:r>
-              <a:rPr sz="850" b="0" i="0" dirty="0" err="1">
-                <a:solidFill>
-                  <a:srgbClr val="6B6B6B"/>
-                </a:solidFill>
-                <a:latin typeface="Calibri"/>
-              </a:rPr>
-              <a:t>её</a:t>
-            </a:r>
-            <a:endParaRPr sz="850" b="0" i="0" dirty="0">
-              <a:solidFill>
-                <a:srgbClr val="6B6B6B"/>
-              </a:solidFill>
-              <a:latin typeface="Calibri"/>
-            </a:endParaRPr>
-          </a:p>
-        </p:txBody>
-      </p:sp>
-      <p:sp>
-        <p:nvSpPr>
-          <p:cNvPr id="33" name="Rounded Rectangle 32"/>
-          <p:cNvSpPr/>
-          <p:nvPr/>
-        </p:nvSpPr>
-        <p:spPr>
-          <a:xfrm>
-            <a:off x="7269480" y="1483233"/>
-            <a:ext cx="2788920" cy="2011680"/>
-          </a:xfrm>
-          <a:prstGeom prst="roundRect">
-            <a:avLst>
-              <a:gd name="adj" fmla="val 5000"/>
-            </a:avLst>
-          </a:prstGeom>
-          <a:solidFill>
-            <a:srgbClr val="FFFFFF"/>
-          </a:solidFill>
-          <a:ln w="9525">
-            <a:solidFill>
-              <a:srgbClr val="F5F5F5"/>
-            </a:solidFill>
-          </a:ln>
-          <a:effectLst/>
-        </p:spPr>
-        <p:style>
-          <a:lnRef idx="1">
-            <a:schemeClr val="accent1"/>
-          </a:lnRef>
-          <a:fillRef idx="3">
-            <a:schemeClr val="accent1"/>
-          </a:fillRef>
-          <a:effectRef idx="2">
-            <a:schemeClr val="accent1"/>
-          </a:effectRef>
-          <a:fontRef idx="minor">
-            <a:schemeClr val="lt1"/>
-          </a:fontRef>
-        </p:style>
-        <p:txBody>
-          <a:bodyPr rtlCol="0" anchor="ctr"/>
-          <a:lstStyle/>
-          <a:p>
-            <a:pPr algn="ctr"/>
-            <a:endParaRPr/>
-          </a:p>
-        </p:txBody>
-      </p:sp>
-      <p:sp>
-        <p:nvSpPr>
-          <p:cNvPr id="34" name="Rectangle 33"/>
-          <p:cNvSpPr/>
-          <p:nvPr/>
-        </p:nvSpPr>
-        <p:spPr>
-          <a:xfrm>
-            <a:off x="7269480" y="1483233"/>
-            <a:ext cx="73152" cy="2011680"/>
-          </a:xfrm>
-          <a:prstGeom prst="rect">
-            <a:avLst/>
-          </a:prstGeom>
-          <a:solidFill>
-            <a:srgbClr val="F47629"/>
-          </a:solidFill>
-          <a:ln>
-            <a:noFill/>
-          </a:ln>
-          <a:effectLst/>
-        </p:spPr>
-        <p:style>
-          <a:lnRef idx="1">
-            <a:schemeClr val="accent1"/>
-          </a:lnRef>
-          <a:fillRef idx="3">
-            <a:schemeClr val="accent1"/>
-          </a:fillRef>
-          <a:effectRef idx="2">
-            <a:schemeClr val="accent1"/>
-          </a:effectRef>
-          <a:fontRef idx="minor">
-            <a:schemeClr val="lt1"/>
-          </a:fontRef>
-        </p:style>
-        <p:txBody>
-          <a:bodyPr rtlCol="0" anchor="ctr"/>
-          <a:lstStyle/>
-          <a:p>
-            <a:pPr algn="ctr"/>
-            <a:endParaRPr/>
-          </a:p>
-        </p:txBody>
-      </p:sp>
-      <p:sp>
-        <p:nvSpPr>
-          <p:cNvPr id="35" name="TextBox 34"/>
-          <p:cNvSpPr txBox="1"/>
-          <p:nvPr/>
-        </p:nvSpPr>
-        <p:spPr>
-          <a:xfrm>
-            <a:off x="7452360" y="1574673"/>
-            <a:ext cx="640080" cy="274320"/>
-          </a:xfrm>
-          <a:prstGeom prst="rect">
-            <a:avLst/>
-          </a:prstGeom>
-          <a:noFill/>
-        </p:spPr>
-        <p:txBody>
-          <a:bodyPr wrap="square" lIns="0" tIns="0" rIns="0" bIns="0" anchor="t">
-            <a:spAutoFit/>
-          </a:bodyPr>
-          <a:lstStyle/>
-          <a:p>
-            <a:pPr algn="l">
-              <a:lnSpc>
-                <a:spcPct val="100000"/>
-              </a:lnSpc>
-            </a:pPr>
-            <a:r>
-              <a:rPr sz="1800" b="1" i="0" dirty="0" smtClean="0">
-                <a:solidFill>
-                  <a:srgbClr val="F47629"/>
-                </a:solidFill>
-                <a:latin typeface="Calibri"/>
-              </a:rPr>
-              <a:t>0</a:t>
-            </a:r>
-            <a:r>
-              <a:rPr lang="en-US" b="1" dirty="0" smtClean="0">
-                <a:solidFill>
-                  <a:srgbClr val="F47629"/>
-                </a:solidFill>
-                <a:latin typeface="Calibri"/>
-              </a:rPr>
-              <a:t>3</a:t>
-            </a:r>
-            <a:endParaRPr sz="1800" b="1" i="0" dirty="0">
-              <a:solidFill>
-                <a:srgbClr val="F47629"/>
-              </a:solidFill>
-              <a:latin typeface="Calibri"/>
-            </a:endParaRPr>
-          </a:p>
-        </p:txBody>
-      </p:sp>
-      <p:sp>
-        <p:nvSpPr>
-          <p:cNvPr id="36" name="TextBox 35"/>
-          <p:cNvSpPr txBox="1"/>
-          <p:nvPr/>
-        </p:nvSpPr>
-        <p:spPr>
-          <a:xfrm>
-            <a:off x="8138160" y="1602105"/>
-            <a:ext cx="1783080" cy="228600"/>
-          </a:xfrm>
-          <a:prstGeom prst="rect">
-            <a:avLst/>
-          </a:prstGeom>
-          <a:noFill/>
-        </p:spPr>
-        <p:txBody>
-          <a:bodyPr wrap="square" lIns="0" tIns="0" rIns="0" bIns="0" anchor="t">
-            <a:spAutoFit/>
-          </a:bodyPr>
-          <a:lstStyle/>
-          <a:p>
-            <a:pPr algn="r">
-              <a:lnSpc>
-                <a:spcPct val="100000"/>
-              </a:lnSpc>
-            </a:pPr>
-            <a:r>
-              <a:rPr sz="800" b="1" i="0">
-                <a:solidFill>
-                  <a:srgbClr val="6B6B6B"/>
-                </a:solidFill>
-                <a:latin typeface="Calibri"/>
-              </a:rPr>
-              <a:t>ВЛИЯНИЕ</a:t>
-            </a:r>
-          </a:p>
-        </p:txBody>
-      </p:sp>
-      <p:sp>
-        <p:nvSpPr>
-          <p:cNvPr id="37" name="TextBox 36"/>
-          <p:cNvSpPr txBox="1"/>
-          <p:nvPr/>
-        </p:nvSpPr>
-        <p:spPr>
-          <a:xfrm>
-            <a:off x="7452360" y="1940433"/>
-            <a:ext cx="2468880" cy="411480"/>
-          </a:xfrm>
-          <a:prstGeom prst="rect">
-            <a:avLst/>
-          </a:prstGeom>
-          <a:noFill/>
-        </p:spPr>
-        <p:txBody>
-          <a:bodyPr wrap="square" lIns="0" tIns="0" rIns="0" bIns="0" anchor="t">
-            <a:spAutoFit/>
-          </a:bodyPr>
-          <a:lstStyle/>
-          <a:p>
-            <a:pPr algn="l">
-              <a:lnSpc>
-                <a:spcPct val="110000"/>
-              </a:lnSpc>
-            </a:pPr>
-            <a:r>
-              <a:rPr sz="1100" b="1" i="0">
-                <a:solidFill>
-                  <a:srgbClr val="313131"/>
-                </a:solidFill>
-                <a:latin typeface="Calibri"/>
-              </a:rPr>
-              <a:t>Региональный B2B-инфлюенсер</a:t>
-            </a:r>
-          </a:p>
-        </p:txBody>
-      </p:sp>
-      <p:sp>
-        <p:nvSpPr>
-          <p:cNvPr id="38" name="TextBox 37"/>
-          <p:cNvSpPr txBox="1"/>
-          <p:nvPr/>
-        </p:nvSpPr>
-        <p:spPr>
-          <a:xfrm>
-            <a:off x="7452360" y="2351913"/>
-            <a:ext cx="2468880" cy="1051560"/>
-          </a:xfrm>
-          <a:prstGeom prst="rect">
-            <a:avLst/>
-          </a:prstGeom>
-          <a:noFill/>
-        </p:spPr>
-        <p:txBody>
-          <a:bodyPr wrap="square" lIns="0" tIns="0" rIns="0" bIns="0" anchor="t">
-            <a:spAutoFit/>
-          </a:bodyPr>
-          <a:lstStyle/>
-          <a:p>
-            <a:pPr algn="l">
-              <a:lnSpc>
-                <a:spcPct val="125000"/>
-              </a:lnSpc>
-            </a:pPr>
-            <a:r>
-              <a:rPr sz="850" b="0" i="0">
-                <a:solidFill>
-                  <a:srgbClr val="6B6B6B"/>
-                </a:solidFill>
-                <a:latin typeface="Calibri"/>
-              </a:rPr>
-              <a:t>Выявление регионального лидера мнений в сфере B2B (производитель металлоконструкций, владелец крупного цеха, руководитель строительной компании). Его рекомендация работает лучше любой рекламы</a:t>
-            </a:r>
-          </a:p>
-        </p:txBody>
-      </p:sp>
-      <p:sp>
-        <p:nvSpPr>
-          <p:cNvPr id="40" name="Rectangle 39"/>
-          <p:cNvSpPr/>
-          <p:nvPr/>
-        </p:nvSpPr>
-        <p:spPr>
-          <a:xfrm>
-            <a:off x="4375023" y="3659505"/>
-            <a:ext cx="73152" cy="2011680"/>
-          </a:xfrm>
-          <a:prstGeom prst="rect">
-            <a:avLst/>
-          </a:prstGeom>
-          <a:solidFill>
-            <a:srgbClr val="D55E0A"/>
-          </a:solidFill>
-          <a:ln>
-            <a:noFill/>
-          </a:ln>
-          <a:effectLst/>
-        </p:spPr>
-        <p:style>
-          <a:lnRef idx="1">
-            <a:schemeClr val="accent1"/>
-          </a:lnRef>
-          <a:fillRef idx="3">
-            <a:schemeClr val="accent1"/>
-          </a:fillRef>
-          <a:effectRef idx="2">
-            <a:schemeClr val="accent1"/>
-          </a:effectRef>
-          <a:fontRef idx="minor">
-            <a:schemeClr val="lt1"/>
-          </a:fontRef>
-        </p:style>
-        <p:txBody>
-          <a:bodyPr rtlCol="0" anchor="ctr"/>
-          <a:lstStyle/>
-          <a:p>
-            <a:pPr algn="ctr"/>
-            <a:endParaRPr/>
-          </a:p>
-        </p:txBody>
-      </p:sp>
-      <p:sp>
-        <p:nvSpPr>
-          <p:cNvPr id="63" name="Rectangle 62"/>
-          <p:cNvSpPr/>
-          <p:nvPr/>
-        </p:nvSpPr>
-        <p:spPr>
-          <a:xfrm>
-            <a:off x="0" y="6675120"/>
-            <a:ext cx="12191695" cy="182880"/>
-          </a:xfrm>
-          <a:prstGeom prst="rect">
-            <a:avLst/>
-          </a:prstGeom>
-          <a:solidFill>
-            <a:srgbClr val="F47629"/>
-          </a:solidFill>
-          <a:ln>
-            <a:noFill/>
-          </a:ln>
-          <a:effectLst/>
-        </p:spPr>
-        <p:style>
-          <a:lnRef idx="1">
-            <a:schemeClr val="accent1"/>
-          </a:lnRef>
-          <a:fillRef idx="3">
-            <a:schemeClr val="accent1"/>
-          </a:fillRef>
-          <a:effectRef idx="2">
-            <a:schemeClr val="accent1"/>
-          </a:effectRef>
-          <a:fontRef idx="minor">
-            <a:schemeClr val="lt1"/>
-          </a:fontRef>
-        </p:style>
-        <p:txBody>
-          <a:bodyPr rtlCol="0" anchor="ctr"/>
-          <a:lstStyle/>
-          <a:p>
-            <a:pPr algn="ctr"/>
-            <a:endParaRPr/>
-          </a:p>
-        </p:txBody>
-      </p:sp>
-      <p:sp>
-        <p:nvSpPr>
-          <p:cNvPr id="64" name="Rounded Rectangle 32"/>
-          <p:cNvSpPr/>
-          <p:nvPr/>
-        </p:nvSpPr>
-        <p:spPr>
-          <a:xfrm>
-            <a:off x="7273671" y="3632073"/>
-            <a:ext cx="2788920" cy="2011680"/>
-          </a:xfrm>
-          <a:prstGeom prst="roundRect">
-            <a:avLst>
-              <a:gd name="adj" fmla="val 5000"/>
-            </a:avLst>
-          </a:prstGeom>
-          <a:solidFill>
-            <a:srgbClr val="FFFFFF"/>
-          </a:solidFill>
-          <a:ln w="9525">
-            <a:solidFill>
-              <a:srgbClr val="F5F5F5"/>
-            </a:solidFill>
-          </a:ln>
-          <a:effectLst/>
-        </p:spPr>
-        <p:style>
-          <a:lnRef idx="1">
-            <a:schemeClr val="accent1"/>
-          </a:lnRef>
-          <a:fillRef idx="3">
-            <a:schemeClr val="accent1"/>
-          </a:fillRef>
-          <a:effectRef idx="2">
-            <a:schemeClr val="accent1"/>
-          </a:effectRef>
-          <a:fontRef idx="minor">
-            <a:schemeClr val="lt1"/>
-          </a:fontRef>
-        </p:style>
-        <p:txBody>
-          <a:bodyPr rtlCol="0" anchor="ctr"/>
-          <a:lstStyle/>
-          <a:p>
-            <a:pPr algn="ctr"/>
-            <a:endParaRPr/>
-          </a:p>
-        </p:txBody>
-      </p:sp>
-      <p:sp>
-        <p:nvSpPr>
-          <p:cNvPr id="65" name="Rectangle 33"/>
-          <p:cNvSpPr/>
-          <p:nvPr/>
-        </p:nvSpPr>
-        <p:spPr>
-          <a:xfrm>
-            <a:off x="7273671" y="3632073"/>
-            <a:ext cx="73152" cy="2011680"/>
-          </a:xfrm>
-          <a:prstGeom prst="rect">
-            <a:avLst/>
-          </a:prstGeom>
-          <a:solidFill>
-            <a:srgbClr val="F47629"/>
-          </a:solidFill>
-          <a:ln>
-            <a:noFill/>
-          </a:ln>
-          <a:effectLst/>
-        </p:spPr>
-        <p:style>
-          <a:lnRef idx="1">
-            <a:schemeClr val="accent1"/>
-          </a:lnRef>
-          <a:fillRef idx="3">
-            <a:schemeClr val="accent1"/>
-          </a:fillRef>
-          <a:effectRef idx="2">
-            <a:schemeClr val="accent1"/>
-          </a:effectRef>
-          <a:fontRef idx="minor">
-            <a:schemeClr val="lt1"/>
-          </a:fontRef>
-        </p:style>
-        <p:txBody>
-          <a:bodyPr rtlCol="0" anchor="ctr"/>
-          <a:lstStyle/>
-          <a:p>
-            <a:pPr algn="ctr"/>
-            <a:endParaRPr/>
-          </a:p>
-        </p:txBody>
-      </p:sp>
-      <p:sp>
-        <p:nvSpPr>
-          <p:cNvPr id="66" name="TextBox 65"/>
-          <p:cNvSpPr txBox="1"/>
-          <p:nvPr/>
-        </p:nvSpPr>
-        <p:spPr>
-          <a:xfrm>
-            <a:off x="7456551" y="3723513"/>
-            <a:ext cx="640080" cy="274320"/>
-          </a:xfrm>
-          <a:prstGeom prst="rect">
-            <a:avLst/>
-          </a:prstGeom>
-          <a:noFill/>
-        </p:spPr>
-        <p:txBody>
-          <a:bodyPr wrap="square" lIns="0" tIns="0" rIns="0" bIns="0" anchor="t">
-            <a:spAutoFit/>
-          </a:bodyPr>
-          <a:lstStyle/>
-          <a:p>
-            <a:pPr algn="l">
-              <a:lnSpc>
-                <a:spcPct val="100000"/>
-              </a:lnSpc>
-            </a:pPr>
-            <a:r>
-              <a:rPr sz="1800" b="1" i="0" dirty="0" smtClean="0">
-                <a:solidFill>
-                  <a:srgbClr val="F47629"/>
-                </a:solidFill>
-                <a:latin typeface="Calibri"/>
-              </a:rPr>
-              <a:t>0</a:t>
-            </a:r>
-            <a:r>
-              <a:rPr lang="ru-RU" sz="1800" b="1" i="0" dirty="0" smtClean="0">
-                <a:solidFill>
-                  <a:srgbClr val="F47629"/>
-                </a:solidFill>
-                <a:latin typeface="Calibri"/>
-              </a:rPr>
-              <a:t>6</a:t>
-            </a:r>
-            <a:endParaRPr sz="1800" b="1" i="0" dirty="0">
-              <a:solidFill>
-                <a:srgbClr val="F47629"/>
-              </a:solidFill>
-              <a:latin typeface="Calibri"/>
-            </a:endParaRPr>
-          </a:p>
-        </p:txBody>
-      </p:sp>
-      <p:sp>
-        <p:nvSpPr>
-          <p:cNvPr id="67" name="TextBox 66"/>
-          <p:cNvSpPr txBox="1"/>
-          <p:nvPr/>
-        </p:nvSpPr>
-        <p:spPr>
-          <a:xfrm>
-            <a:off x="8142351" y="3750945"/>
-            <a:ext cx="1783080" cy="228600"/>
-          </a:xfrm>
-          <a:prstGeom prst="rect">
-            <a:avLst/>
-          </a:prstGeom>
-          <a:noFill/>
-        </p:spPr>
-        <p:txBody>
-          <a:bodyPr wrap="square" lIns="0" tIns="0" rIns="0" bIns="0" anchor="t">
-            <a:spAutoFit/>
-          </a:bodyPr>
-          <a:lstStyle/>
-          <a:p>
-            <a:pPr algn="r">
-              <a:lnSpc>
-                <a:spcPct val="100000"/>
-              </a:lnSpc>
-            </a:pPr>
-            <a:r>
-              <a:rPr sz="800" b="1" i="0">
-                <a:solidFill>
-                  <a:srgbClr val="6B6B6B"/>
-                </a:solidFill>
-                <a:latin typeface="Calibri"/>
-              </a:rPr>
-              <a:t>ВЛИЯНИЕ</a:t>
-            </a:r>
-          </a:p>
-        </p:txBody>
-      </p:sp>
-      <p:sp>
-        <p:nvSpPr>
-          <p:cNvPr id="68" name="TextBox 67"/>
-          <p:cNvSpPr txBox="1"/>
-          <p:nvPr/>
-        </p:nvSpPr>
-        <p:spPr>
-          <a:xfrm>
-            <a:off x="7456551" y="4089273"/>
-            <a:ext cx="2468880" cy="186205"/>
-          </a:xfrm>
-          <a:prstGeom prst="rect">
-            <a:avLst/>
-          </a:prstGeom>
-          <a:noFill/>
-        </p:spPr>
-        <p:txBody>
-          <a:bodyPr wrap="square" lIns="0" tIns="0" rIns="0" bIns="0" anchor="t">
-            <a:spAutoFit/>
-          </a:bodyPr>
-          <a:lstStyle/>
-          <a:p>
-            <a:pPr algn="l">
-              <a:lnSpc>
-                <a:spcPct val="110000"/>
-              </a:lnSpc>
-            </a:pPr>
-            <a:r>
-              <a:rPr lang="ru-RU" sz="1100" b="1" i="0" dirty="0" smtClean="0">
-                <a:solidFill>
-                  <a:srgbClr val="313131"/>
-                </a:solidFill>
-                <a:latin typeface="Calibri"/>
-              </a:rPr>
-              <a:t>Портфолио </a:t>
-            </a:r>
-            <a:r>
-              <a:rPr lang="en-US" sz="1100" b="1" dirty="0" smtClean="0">
-                <a:solidFill>
-                  <a:srgbClr val="313131"/>
-                </a:solidFill>
-                <a:latin typeface="Calibri"/>
-              </a:rPr>
-              <a:t>B2B</a:t>
-            </a:r>
-            <a:r>
-              <a:rPr lang="ru-RU" sz="1100" b="1" dirty="0" smtClean="0">
-                <a:solidFill>
-                  <a:srgbClr val="313131"/>
-                </a:solidFill>
-                <a:latin typeface="Calibri"/>
-              </a:rPr>
-              <a:t> объектов</a:t>
-            </a:r>
-            <a:r>
-              <a:rPr lang="en-US" sz="1100" b="1" dirty="0" smtClean="0">
-                <a:solidFill>
-                  <a:srgbClr val="313131"/>
-                </a:solidFill>
-                <a:latin typeface="Calibri"/>
-              </a:rPr>
-              <a:t> </a:t>
-            </a:r>
-            <a:endParaRPr sz="1100" b="1" i="0" dirty="0">
-              <a:solidFill>
-                <a:srgbClr val="313131"/>
-              </a:solidFill>
-              <a:latin typeface="Calibri"/>
-            </a:endParaRPr>
-          </a:p>
-        </p:txBody>
-      </p:sp>
-      <p:sp>
-        <p:nvSpPr>
-          <p:cNvPr id="69" name="TextBox 68"/>
-          <p:cNvSpPr txBox="1"/>
-          <p:nvPr/>
-        </p:nvSpPr>
-        <p:spPr>
-          <a:xfrm>
-            <a:off x="7456551" y="4500753"/>
-            <a:ext cx="2468880" cy="478464"/>
-          </a:xfrm>
-          <a:prstGeom prst="rect">
-            <a:avLst/>
-          </a:prstGeom>
-          <a:noFill/>
-        </p:spPr>
-        <p:txBody>
-          <a:bodyPr wrap="square" lIns="0" tIns="0" rIns="0" bIns="0" anchor="t">
-            <a:spAutoFit/>
-          </a:bodyPr>
-          <a:lstStyle/>
-          <a:p>
-            <a:pPr>
-              <a:lnSpc>
-                <a:spcPct val="125000"/>
-              </a:lnSpc>
-            </a:pPr>
-            <a:r>
-              <a:rPr lang="ru-RU" sz="850" dirty="0">
-                <a:solidFill>
-                  <a:srgbClr val="6B6B6B"/>
-                </a:solidFill>
-              </a:rPr>
-              <a:t>B2B-портфолио TITAN — самый маржинальный канал дистрибьютора: крупная фасовка + долгий срок службы = максимальная прибыль на единицу</a:t>
-            </a:r>
-            <a:endParaRPr sz="850" b="0" i="0" dirty="0">
-              <a:solidFill>
-                <a:srgbClr val="6B6B6B"/>
-              </a:solidFill>
-              <a:latin typeface="Calibri"/>
+              <a:latin typeface="+mj-lt"/>
             </a:endParaRPr>
           </a:p>
         </p:txBody>
@@ -25711,7 +25299,7 @@
     </p:spTree>
     <p:extLst>
       <p:ext uri="{BB962C8B-B14F-4D97-AF65-F5344CB8AC3E}">
-        <p14:creationId xmlns:p14="http://schemas.microsoft.com/office/powerpoint/2010/main" val="2362874966"/>
+        <p14:creationId xmlns:p14="http://schemas.microsoft.com/office/powerpoint/2010/main" val="1111050169"/>
       </p:ext>
     </p:extLst>
   </p:cSld>
@@ -25738,401 +25326,2622 @@
           <a:chExt cx="0" cy="0"/>
         </a:xfrm>
       </p:grpSpPr>
-      <p:pic>
-        <p:nvPicPr>
-          <p:cNvPr id="2" name="Image 0" descr="preencoded.png"/>
-          <p:cNvPicPr>
-            <a:picLocks noChangeAspect="1"/>
-          </p:cNvPicPr>
-          <p:nvPr/>
-        </p:nvPicPr>
-        <p:blipFill>
-          <a:blip r:embed="rId3"/>
-          <a:srcRect/>
-          <a:stretch/>
-        </p:blipFill>
-        <p:spPr>
-          <a:xfrm>
-            <a:off x="6661152" y="-38100"/>
-            <a:ext cx="1695451" cy="806451"/>
-          </a:xfrm>
-          <a:prstGeom prst="rect">
-            <a:avLst/>
-          </a:prstGeom>
-        </p:spPr>
-      </p:pic>
-      <p:pic>
-        <p:nvPicPr>
-          <p:cNvPr id="3" name="Image 1" descr="preencoded.png"/>
-          <p:cNvPicPr>
-            <a:picLocks noChangeAspect="1"/>
-          </p:cNvPicPr>
-          <p:nvPr/>
-        </p:nvPicPr>
-        <p:blipFill>
-          <a:blip r:embed="rId4" cstate="hqprint">
-            <a:extLst>
-              <a:ext uri="{28A0092B-C50C-407E-A947-70E740481C1C}">
-                <a14:useLocalDpi xmlns:a14="http://schemas.microsoft.com/office/drawing/2010/main"/>
-              </a:ext>
-            </a:extLst>
-          </a:blip>
-          <a:srcRect r="584" b="-2003"/>
-          <a:stretch/>
-        </p:blipFill>
-        <p:spPr>
-          <a:xfrm>
-            <a:off x="7905753" y="2070101"/>
-            <a:ext cx="4324351" cy="3879851"/>
-          </a:xfrm>
-          <a:prstGeom prst="rect">
-            <a:avLst/>
-          </a:prstGeom>
-        </p:spPr>
-      </p:pic>
-      <p:pic>
-        <p:nvPicPr>
-          <p:cNvPr id="4" name="Image 2" descr="preencoded.png"/>
-          <p:cNvPicPr>
-            <a:picLocks noChangeAspect="1"/>
-          </p:cNvPicPr>
-          <p:nvPr/>
-        </p:nvPicPr>
-        <p:blipFill>
-          <a:blip r:embed="rId5" cstate="hqprint">
-            <a:extLst>
-              <a:ext uri="{28A0092B-C50C-407E-A947-70E740481C1C}">
-                <a14:useLocalDpi xmlns:a14="http://schemas.microsoft.com/office/drawing/2010/main"/>
-              </a:ext>
-            </a:extLst>
-          </a:blip>
-          <a:srcRect r="-551" b="12331"/>
-          <a:stretch/>
-        </p:blipFill>
-        <p:spPr>
-          <a:xfrm>
-            <a:off x="3087371" y="2832100"/>
-            <a:ext cx="4632052" cy="4038600"/>
-          </a:xfrm>
-          <a:prstGeom prst="rect">
-            <a:avLst/>
-          </a:prstGeom>
-        </p:spPr>
-      </p:pic>
-      <p:pic>
-        <p:nvPicPr>
-          <p:cNvPr id="5" name="Image 3" descr="preencoded.png"/>
-          <p:cNvPicPr>
-            <a:picLocks noChangeAspect="1"/>
-          </p:cNvPicPr>
-          <p:nvPr/>
-        </p:nvPicPr>
-        <p:blipFill>
-          <a:blip r:embed="rId6"/>
-          <a:srcRect/>
-          <a:stretch/>
-        </p:blipFill>
-        <p:spPr>
-          <a:xfrm>
-            <a:off x="5880351" y="327910"/>
-            <a:ext cx="2595599" cy="2595599"/>
-          </a:xfrm>
-          <a:prstGeom prst="rect">
-            <a:avLst/>
-          </a:prstGeom>
-        </p:spPr>
-      </p:pic>
-      <p:pic>
-        <p:nvPicPr>
-          <p:cNvPr id="7" name="Image 4" descr="preencoded.png"/>
-          <p:cNvPicPr>
-            <a:picLocks noChangeAspect="1"/>
-          </p:cNvPicPr>
-          <p:nvPr/>
-        </p:nvPicPr>
-        <p:blipFill>
-          <a:blip r:embed="rId7"/>
-          <a:srcRect/>
-          <a:stretch/>
-        </p:blipFill>
-        <p:spPr>
-          <a:xfrm>
-            <a:off x="438153" y="509403"/>
-            <a:ext cx="3790951" cy="3730997"/>
-          </a:xfrm>
-          <a:prstGeom prst="rect">
-            <a:avLst/>
-          </a:prstGeom>
-        </p:spPr>
-      </p:pic>
-      <p:sp>
-        <p:nvSpPr>
-          <p:cNvPr id="8" name="Text 1"/>
+      <p:sp>
+        <p:nvSpPr>
+          <p:cNvPr id="2" name="Rectangle 1"/>
           <p:cNvSpPr/>
           <p:nvPr/>
         </p:nvSpPr>
         <p:spPr>
           <a:xfrm>
-            <a:off x="438153" y="6337302"/>
-            <a:ext cx="361951" cy="165100"/>
+            <a:off x="-183871" y="0"/>
+            <a:ext cx="12191695" cy="6858000"/>
+          </a:xfrm>
+          <a:prstGeom prst="rect">
+            <a:avLst/>
+          </a:prstGeom>
+          <a:solidFill>
+            <a:srgbClr val="FAFAFA"/>
+          </a:solidFill>
+          <a:ln>
+            <a:noFill/>
+          </a:ln>
+          <a:effectLst/>
+        </p:spPr>
+        <p:style>
+          <a:lnRef idx="1">
+            <a:schemeClr val="accent1"/>
+          </a:lnRef>
+          <a:fillRef idx="3">
+            <a:schemeClr val="accent1"/>
+          </a:fillRef>
+          <a:effectRef idx="2">
+            <a:schemeClr val="accent1"/>
+          </a:effectRef>
+          <a:fontRef idx="minor">
+            <a:schemeClr val="lt1"/>
+          </a:fontRef>
+        </p:style>
+        <p:txBody>
+          <a:bodyPr rtlCol="0" anchor="ctr"/>
+          <a:lstStyle/>
+          <a:p>
+            <a:pPr algn="ctr"/>
+            <a:endParaRPr/>
+          </a:p>
+        </p:txBody>
+      </p:sp>
+      <p:sp>
+        <p:nvSpPr>
+          <p:cNvPr id="3" name="Rectangle 2"/>
+          <p:cNvSpPr/>
+          <p:nvPr/>
+        </p:nvSpPr>
+        <p:spPr>
+          <a:xfrm>
+            <a:off x="0" y="0"/>
+            <a:ext cx="12191695" cy="109728"/>
+          </a:xfrm>
+          <a:prstGeom prst="rect">
+            <a:avLst/>
+          </a:prstGeom>
+          <a:solidFill>
+            <a:srgbClr val="F47629"/>
+          </a:solidFill>
+          <a:ln>
+            <a:noFill/>
+          </a:ln>
+          <a:effectLst/>
+        </p:spPr>
+        <p:style>
+          <a:lnRef idx="1">
+            <a:schemeClr val="accent1"/>
+          </a:lnRef>
+          <a:fillRef idx="3">
+            <a:schemeClr val="accent1"/>
+          </a:fillRef>
+          <a:effectRef idx="2">
+            <a:schemeClr val="accent1"/>
+          </a:effectRef>
+          <a:fontRef idx="minor">
+            <a:schemeClr val="lt1"/>
+          </a:fontRef>
+        </p:style>
+        <p:txBody>
+          <a:bodyPr rtlCol="0" anchor="ctr"/>
+          <a:lstStyle/>
+          <a:p>
+            <a:pPr algn="ctr"/>
+            <a:endParaRPr/>
+          </a:p>
+        </p:txBody>
+      </p:sp>
+      <p:sp>
+        <p:nvSpPr>
+          <p:cNvPr id="4" name="TextBox 3"/>
+          <p:cNvSpPr txBox="1"/>
+          <p:nvPr/>
+        </p:nvSpPr>
+        <p:spPr>
+          <a:xfrm>
+            <a:off x="457200" y="201168"/>
+            <a:ext cx="10058400" cy="411480"/>
           </a:xfrm>
           <a:prstGeom prst="rect">
             <a:avLst/>
           </a:prstGeom>
           <a:noFill/>
-          <a:ln/>
-        </p:spPr>
-        <p:txBody>
-          <a:bodyPr wrap="square" lIns="0" tIns="0" rIns="0" bIns="0" rtlCol="0" anchor="ctr"/>
-          <a:lstStyle/>
-          <a:p>
-            <a:pPr defTabSz="1219140">
+        </p:spPr>
+        <p:txBody>
+          <a:bodyPr wrap="square" lIns="0" tIns="0" rIns="0" bIns="0" anchor="ctr">
+            <a:spAutoFit/>
+          </a:bodyPr>
+          <a:lstStyle/>
+          <a:p>
+            <a:pPr algn="l">
               <a:lnSpc>
-                <a:spcPts val="1255"/>
+                <a:spcPct val="100000"/>
               </a:lnSpc>
             </a:pPr>
             <a:r>
-              <a:rPr lang="en-US" sz="1100" kern="0" spc="-12" dirty="0">
-                <a:solidFill>
-                  <a:srgbClr val="000000">
-                    <a:alpha val="99000"/>
-                  </a:srgbClr>
-                </a:solidFill>
-                <a:latin typeface="Roboto Mono" pitchFamily="34" charset="0"/>
-                <a:ea typeface="Roboto Mono" pitchFamily="34" charset="-122"/>
-                <a:cs typeface="Roboto Mono" pitchFamily="34" charset="-120"/>
-              </a:rPr>
-              <a:t>2026</a:t>
-            </a:r>
-            <a:endParaRPr lang="en-US" sz="1100" dirty="0">
-              <a:solidFill>
-                <a:prstClr val="black"/>
-              </a:solidFill>
-            </a:endParaRPr>
-          </a:p>
-        </p:txBody>
-      </p:sp>
-      <p:pic>
-        <p:nvPicPr>
-          <p:cNvPr id="9" name="Image 5" descr="preencoded.png"/>
-          <p:cNvPicPr>
-            <a:picLocks noChangeAspect="1"/>
-          </p:cNvPicPr>
-          <p:nvPr/>
-        </p:nvPicPr>
-        <p:blipFill>
-          <a:blip r:embed="rId8" cstate="hqprint">
-            <a:extLst>
-              <a:ext uri="{28A0092B-C50C-407E-A947-70E740481C1C}">
-                <a14:useLocalDpi xmlns:a14="http://schemas.microsoft.com/office/drawing/2010/main"/>
-              </a:ext>
-            </a:extLst>
-          </a:blip>
-          <a:srcRect r="780" b="6250"/>
-          <a:stretch/>
-        </p:blipFill>
-        <p:spPr>
-          <a:xfrm>
-            <a:off x="4114800" y="5238752"/>
-            <a:ext cx="8077200" cy="1619251"/>
-          </a:xfrm>
-          <a:prstGeom prst="rect">
-            <a:avLst/>
-          </a:prstGeom>
-        </p:spPr>
-      </p:pic>
-      <p:pic>
-        <p:nvPicPr>
-          <p:cNvPr id="10" name="Image 6" descr="preencoded.png"/>
-          <p:cNvPicPr>
-            <a:picLocks noChangeAspect="1"/>
-          </p:cNvPicPr>
-          <p:nvPr/>
-        </p:nvPicPr>
-        <p:blipFill>
-          <a:blip r:embed="rId9"/>
-          <a:srcRect/>
-          <a:stretch/>
-        </p:blipFill>
-        <p:spPr>
-          <a:xfrm>
-            <a:off x="9395166" y="1984265"/>
-            <a:ext cx="2939076" cy="4126841"/>
-          </a:xfrm>
-          <a:prstGeom prst="rect">
-            <a:avLst/>
-          </a:prstGeom>
-        </p:spPr>
-      </p:pic>
-      <p:pic>
-        <p:nvPicPr>
-          <p:cNvPr id="11" name="Image 7" descr="preencoded.png"/>
-          <p:cNvPicPr>
-            <a:picLocks noChangeAspect="1"/>
-          </p:cNvPicPr>
-          <p:nvPr/>
-        </p:nvPicPr>
-        <p:blipFill>
-          <a:blip r:embed="rId10"/>
-          <a:srcRect/>
-          <a:stretch/>
-        </p:blipFill>
-        <p:spPr>
-          <a:xfrm>
-            <a:off x="10344153" y="527053"/>
-            <a:ext cx="1250951" cy="1250951"/>
-          </a:xfrm>
-          <a:prstGeom prst="rect">
-            <a:avLst/>
-          </a:prstGeom>
-        </p:spPr>
-      </p:pic>
-      <p:pic>
-        <p:nvPicPr>
-          <p:cNvPr id="12" name="Image 8" descr="preencoded.png"/>
-          <p:cNvPicPr>
-            <a:picLocks noChangeAspect="1"/>
-          </p:cNvPicPr>
-          <p:nvPr/>
-        </p:nvPicPr>
-        <p:blipFill>
-          <a:blip r:embed="rId11"/>
-          <a:srcRect/>
-          <a:stretch/>
-        </p:blipFill>
-        <p:spPr>
-          <a:xfrm>
-            <a:off x="7107728" y="1950264"/>
-            <a:ext cx="3127517" cy="4198037"/>
-          </a:xfrm>
-          <a:prstGeom prst="rect">
-            <a:avLst/>
-          </a:prstGeom>
-        </p:spPr>
-      </p:pic>
-      <p:pic>
-        <p:nvPicPr>
-          <p:cNvPr id="13" name="Image 9" descr="preencoded.png"/>
-          <p:cNvPicPr>
-            <a:picLocks noChangeAspect="1"/>
-          </p:cNvPicPr>
-          <p:nvPr/>
-        </p:nvPicPr>
-        <p:blipFill>
-          <a:blip r:embed="rId12"/>
-          <a:srcRect/>
-          <a:stretch/>
-        </p:blipFill>
-        <p:spPr>
-          <a:xfrm>
-            <a:off x="4069696" y="1778001"/>
-            <a:ext cx="4830464" cy="4830464"/>
-          </a:xfrm>
-          <a:prstGeom prst="rect">
-            <a:avLst/>
-          </a:prstGeom>
-        </p:spPr>
-      </p:pic>
-      <p:sp>
-        <p:nvSpPr>
-          <p:cNvPr id="14" name="Text 2"/>
-          <p:cNvSpPr/>
-          <p:nvPr/>
-        </p:nvSpPr>
-        <p:spPr>
-          <a:xfrm>
-            <a:off x="8915400" y="4883149"/>
-            <a:ext cx="3276600" cy="1016000"/>
-          </a:xfrm>
-          <a:prstGeom prst="rect">
-            <a:avLst/>
-          </a:prstGeom>
-          <a:solidFill>
-            <a:srgbClr val="E30614"/>
-          </a:solidFill>
-          <a:ln/>
-        </p:spPr>
-        <p:txBody>
-          <a:bodyPr wrap="square" lIns="121914" tIns="60957" rIns="121914" bIns="60957" rtlCol="0" anchor="ctr"/>
-          <a:lstStyle/>
-          <a:p>
-            <a:pPr defTabSz="1219140"/>
-            <a:endParaRPr lang="en-US" dirty="0">
-              <a:solidFill>
-                <a:prstClr val="black"/>
-              </a:solidFill>
-            </a:endParaRPr>
-          </a:p>
-        </p:txBody>
-      </p:sp>
-      <p:sp>
-        <p:nvSpPr>
-          <p:cNvPr id="15" name="Text 3"/>
-          <p:cNvSpPr/>
-          <p:nvPr/>
-        </p:nvSpPr>
-        <p:spPr>
-          <a:xfrm>
-            <a:off x="8915400" y="5016500"/>
-            <a:ext cx="3276600" cy="812800"/>
+              <a:rPr sz="1900" b="1" i="0">
+                <a:solidFill>
+                  <a:srgbClr val="313131"/>
+                </a:solidFill>
+                <a:latin typeface="Calibri"/>
+              </a:rPr>
+              <a:t>TITAN B2B — ЧТО НУЖНО СДЕЛАТЬ, ЧТОБЫ ПАРТНЁРЫ ЗАХОТЕЛИ</a:t>
+            </a:r>
+          </a:p>
+        </p:txBody>
+      </p:sp>
+      <p:sp>
+        <p:nvSpPr>
+          <p:cNvPr id="6" name="TextBox 5"/>
+          <p:cNvSpPr txBox="1"/>
+          <p:nvPr/>
+        </p:nvSpPr>
+        <p:spPr>
+          <a:xfrm>
+            <a:off x="10058400" y="201168"/>
+            <a:ext cx="1828800" cy="411480"/>
           </a:xfrm>
           <a:prstGeom prst="rect">
             <a:avLst/>
           </a:prstGeom>
           <a:noFill/>
-          <a:ln/>
-        </p:spPr>
-        <p:txBody>
-          <a:bodyPr wrap="square" lIns="0" tIns="0" rIns="0" bIns="0" rtlCol="0" anchor="ctr"/>
-          <a:lstStyle/>
-          <a:p>
-            <a:pPr algn="ctr" defTabSz="1219140">
+        </p:spPr>
+        <p:txBody>
+          <a:bodyPr wrap="square" lIns="0" tIns="0" rIns="0" bIns="0" anchor="ctr">
+            <a:spAutoFit/>
+          </a:bodyPr>
+          <a:lstStyle/>
+          <a:p>
+            <a:pPr algn="r">
               <a:lnSpc>
-                <a:spcPts val="3021"/>
+                <a:spcPct val="100000"/>
               </a:lnSpc>
             </a:pPr>
             <a:r>
-              <a:rPr lang="en-US" sz="2900" kern="0" spc="-63" dirty="0">
-                <a:solidFill>
-                  <a:srgbClr val="FFFFFF">
-                    <a:alpha val="99000"/>
-                  </a:srgbClr>
-                </a:solidFill>
-                <a:latin typeface="Roboto Mono" pitchFamily="34" charset="0"/>
-                <a:ea typeface="Roboto Mono" pitchFamily="34" charset="-122"/>
-                <a:cs typeface="Roboto Mono" pitchFamily="34" charset="-120"/>
-              </a:rPr>
-              <a:t>У КОРРОЗИИ</a:t>
-            </a:r>
-            <a:endParaRPr lang="en-US" sz="2900" dirty="0">
-              <a:solidFill>
-                <a:prstClr val="black"/>
-              </a:solidFill>
-            </a:endParaRPr>
-          </a:p>
-          <a:p>
-            <a:pPr algn="ctr" defTabSz="1219140">
+              <a:rPr sz="1200" b="1" i="0">
+                <a:solidFill>
+                  <a:srgbClr val="F47629"/>
+                </a:solidFill>
+                <a:latin typeface="Calibri"/>
+              </a:rPr>
+              <a:t>TITAN · B2B</a:t>
+            </a:r>
+          </a:p>
+        </p:txBody>
+      </p:sp>
+      <p:sp>
+        <p:nvSpPr>
+          <p:cNvPr id="9" name="Rounded Rectangle 8"/>
+          <p:cNvSpPr/>
+          <p:nvPr/>
+        </p:nvSpPr>
+        <p:spPr>
+          <a:xfrm>
+            <a:off x="1492123" y="3647186"/>
+            <a:ext cx="2788920" cy="2011680"/>
+          </a:xfrm>
+          <a:prstGeom prst="roundRect">
+            <a:avLst>
+              <a:gd name="adj" fmla="val 5000"/>
+            </a:avLst>
+          </a:prstGeom>
+          <a:solidFill>
+            <a:srgbClr val="FFFFFF"/>
+          </a:solidFill>
+          <a:ln w="9525">
+            <a:solidFill>
+              <a:srgbClr val="F5F5F5"/>
+            </a:solidFill>
+          </a:ln>
+          <a:effectLst/>
+        </p:spPr>
+        <p:style>
+          <a:lnRef idx="1">
+            <a:schemeClr val="accent1"/>
+          </a:lnRef>
+          <a:fillRef idx="3">
+            <a:schemeClr val="accent1"/>
+          </a:fillRef>
+          <a:effectRef idx="2">
+            <a:schemeClr val="accent1"/>
+          </a:effectRef>
+          <a:fontRef idx="minor">
+            <a:schemeClr val="lt1"/>
+          </a:fontRef>
+        </p:style>
+        <p:txBody>
+          <a:bodyPr rtlCol="0" anchor="ctr"/>
+          <a:lstStyle/>
+          <a:p>
+            <a:pPr algn="ctr"/>
+            <a:endParaRPr/>
+          </a:p>
+        </p:txBody>
+      </p:sp>
+      <p:sp>
+        <p:nvSpPr>
+          <p:cNvPr id="10" name="Rectangle 9"/>
+          <p:cNvSpPr/>
+          <p:nvPr/>
+        </p:nvSpPr>
+        <p:spPr>
+          <a:xfrm>
+            <a:off x="1492123" y="3647186"/>
+            <a:ext cx="73152" cy="2011680"/>
+          </a:xfrm>
+          <a:prstGeom prst="rect">
+            <a:avLst/>
+          </a:prstGeom>
+          <a:solidFill>
+            <a:srgbClr val="F47629"/>
+          </a:solidFill>
+          <a:ln>
+            <a:noFill/>
+          </a:ln>
+          <a:effectLst/>
+        </p:spPr>
+        <p:style>
+          <a:lnRef idx="1">
+            <a:schemeClr val="accent1"/>
+          </a:lnRef>
+          <a:fillRef idx="3">
+            <a:schemeClr val="accent1"/>
+          </a:fillRef>
+          <a:effectRef idx="2">
+            <a:schemeClr val="accent1"/>
+          </a:effectRef>
+          <a:fontRef idx="minor">
+            <a:schemeClr val="lt1"/>
+          </a:fontRef>
+        </p:style>
+        <p:txBody>
+          <a:bodyPr rtlCol="0" anchor="ctr"/>
+          <a:lstStyle/>
+          <a:p>
+            <a:pPr algn="ctr"/>
+            <a:endParaRPr/>
+          </a:p>
+        </p:txBody>
+      </p:sp>
+      <p:sp>
+        <p:nvSpPr>
+          <p:cNvPr id="11" name="TextBox 10"/>
+          <p:cNvSpPr txBox="1"/>
+          <p:nvPr/>
+        </p:nvSpPr>
+        <p:spPr>
+          <a:xfrm>
+            <a:off x="1675003" y="3738626"/>
+            <a:ext cx="640080" cy="274320"/>
+          </a:xfrm>
+          <a:prstGeom prst="rect">
+            <a:avLst/>
+          </a:prstGeom>
+          <a:noFill/>
+        </p:spPr>
+        <p:txBody>
+          <a:bodyPr wrap="square" lIns="0" tIns="0" rIns="0" bIns="0" anchor="t">
+            <a:spAutoFit/>
+          </a:bodyPr>
+          <a:lstStyle/>
+          <a:p>
+            <a:pPr algn="l">
               <a:lnSpc>
-                <a:spcPts val="3021"/>
+                <a:spcPct val="100000"/>
               </a:lnSpc>
             </a:pPr>
             <a:r>
-              <a:rPr lang="en-US" sz="2900" kern="0" spc="-63" dirty="0">
-                <a:solidFill>
-                  <a:srgbClr val="FFFFFF">
-                    <a:alpha val="99000"/>
-                  </a:srgbClr>
-                </a:solidFill>
-                <a:latin typeface="Roboto Mono" pitchFamily="34" charset="0"/>
-                <a:ea typeface="Roboto Mono" pitchFamily="34" charset="-122"/>
-                <a:cs typeface="Roboto Mono" pitchFamily="34" charset="-120"/>
-              </a:rPr>
-              <a:t>НЕТ ШАНСОВ</a:t>
-            </a:r>
-            <a:endParaRPr lang="en-US" sz="2900" dirty="0">
+              <a:rPr sz="1800" b="1" i="0" dirty="0" smtClean="0">
+                <a:solidFill>
+                  <a:srgbClr val="F47629"/>
+                </a:solidFill>
+                <a:latin typeface="Calibri"/>
+              </a:rPr>
+              <a:t>0</a:t>
+            </a:r>
+            <a:r>
+              <a:rPr lang="en-US" sz="1800" b="1" i="0" dirty="0" smtClean="0">
+                <a:solidFill>
+                  <a:srgbClr val="F47629"/>
+                </a:solidFill>
+                <a:latin typeface="Calibri"/>
+              </a:rPr>
+              <a:t>4</a:t>
+            </a:r>
+            <a:endParaRPr sz="1800" b="1" i="0" dirty="0">
               <a:solidFill>
-                <a:prstClr val="black"/>
+                <a:srgbClr val="F47629"/>
               </a:solidFill>
+              <a:latin typeface="Calibri"/>
+            </a:endParaRPr>
+          </a:p>
+        </p:txBody>
+      </p:sp>
+      <p:sp>
+        <p:nvSpPr>
+          <p:cNvPr id="12" name="TextBox 11"/>
+          <p:cNvSpPr txBox="1"/>
+          <p:nvPr/>
+        </p:nvSpPr>
+        <p:spPr>
+          <a:xfrm>
+            <a:off x="2360803" y="3766058"/>
+            <a:ext cx="1783080" cy="228600"/>
+          </a:xfrm>
+          <a:prstGeom prst="rect">
+            <a:avLst/>
+          </a:prstGeom>
+          <a:noFill/>
+        </p:spPr>
+        <p:txBody>
+          <a:bodyPr wrap="square" lIns="0" tIns="0" rIns="0" bIns="0" anchor="t">
+            <a:spAutoFit/>
+          </a:bodyPr>
+          <a:lstStyle/>
+          <a:p>
+            <a:pPr algn="r">
+              <a:lnSpc>
+                <a:spcPct val="100000"/>
+              </a:lnSpc>
+            </a:pPr>
+            <a:r>
+              <a:rPr sz="800" b="1" i="0">
+                <a:solidFill>
+                  <a:srgbClr val="6B6B6B"/>
+                </a:solidFill>
+                <a:latin typeface="Calibri"/>
+              </a:rPr>
+              <a:t>МОТИВАЦИЯ</a:t>
+            </a:r>
+          </a:p>
+        </p:txBody>
+      </p:sp>
+      <p:sp>
+        <p:nvSpPr>
+          <p:cNvPr id="13" name="TextBox 12"/>
+          <p:cNvSpPr txBox="1"/>
+          <p:nvPr/>
+        </p:nvSpPr>
+        <p:spPr>
+          <a:xfrm>
+            <a:off x="1675003" y="4104386"/>
+            <a:ext cx="2468880" cy="411480"/>
+          </a:xfrm>
+          <a:prstGeom prst="rect">
+            <a:avLst/>
+          </a:prstGeom>
+          <a:noFill/>
+        </p:spPr>
+        <p:txBody>
+          <a:bodyPr wrap="square" lIns="0" tIns="0" rIns="0" bIns="0" anchor="t">
+            <a:spAutoFit/>
+          </a:bodyPr>
+          <a:lstStyle/>
+          <a:p>
+            <a:pPr algn="l">
+              <a:lnSpc>
+                <a:spcPct val="110000"/>
+              </a:lnSpc>
+            </a:pPr>
+            <a:r>
+              <a:rPr sz="1100" b="1" i="0">
+                <a:solidFill>
+                  <a:srgbClr val="313131"/>
+                </a:solidFill>
+                <a:latin typeface="Calibri"/>
+              </a:rPr>
+              <a:t>Доходность для дистрибьютора</a:t>
+            </a:r>
+          </a:p>
+        </p:txBody>
+      </p:sp>
+      <p:sp>
+        <p:nvSpPr>
+          <p:cNvPr id="14" name="TextBox 13"/>
+          <p:cNvSpPr txBox="1"/>
+          <p:nvPr/>
+        </p:nvSpPr>
+        <p:spPr>
+          <a:xfrm>
+            <a:off x="1675003" y="4515866"/>
+            <a:ext cx="2468880" cy="1051560"/>
+          </a:xfrm>
+          <a:prstGeom prst="rect">
+            <a:avLst/>
+          </a:prstGeom>
+          <a:noFill/>
+        </p:spPr>
+        <p:txBody>
+          <a:bodyPr wrap="square" lIns="0" tIns="0" rIns="0" bIns="0" anchor="t">
+            <a:spAutoFit/>
+          </a:bodyPr>
+          <a:lstStyle/>
+          <a:p>
+            <a:pPr algn="l">
+              <a:lnSpc>
+                <a:spcPct val="125000"/>
+              </a:lnSpc>
+            </a:pPr>
+            <a:r>
+              <a:rPr sz="850" b="0" i="0">
+                <a:solidFill>
+                  <a:srgbClr val="6B6B6B"/>
+                </a:solidFill>
+                <a:latin typeface="Calibri"/>
+              </a:rPr>
+              <a:t>Расчёт маржинальности B2B-канала. Демонстрируем дистрибьютору, что работа с B2B-партнёрами выгодна — доходность выше, чем в рознице, при меньших операционных затратах</a:t>
+            </a:r>
+          </a:p>
+        </p:txBody>
+      </p:sp>
+      <p:sp>
+        <p:nvSpPr>
+          <p:cNvPr id="15" name="Rounded Rectangle 14"/>
+          <p:cNvSpPr/>
+          <p:nvPr/>
+        </p:nvSpPr>
+        <p:spPr>
+          <a:xfrm>
+            <a:off x="1492123" y="1510665"/>
+            <a:ext cx="2788920" cy="2011680"/>
+          </a:xfrm>
+          <a:prstGeom prst="roundRect">
+            <a:avLst>
+              <a:gd name="adj" fmla="val 5000"/>
+            </a:avLst>
+          </a:prstGeom>
+          <a:solidFill>
+            <a:srgbClr val="FFFFFF"/>
+          </a:solidFill>
+          <a:ln w="9525">
+            <a:solidFill>
+              <a:srgbClr val="F5F5F5"/>
+            </a:solidFill>
+          </a:ln>
+          <a:effectLst/>
+        </p:spPr>
+        <p:style>
+          <a:lnRef idx="1">
+            <a:schemeClr val="accent1"/>
+          </a:lnRef>
+          <a:fillRef idx="3">
+            <a:schemeClr val="accent1"/>
+          </a:fillRef>
+          <a:effectRef idx="2">
+            <a:schemeClr val="accent1"/>
+          </a:effectRef>
+          <a:fontRef idx="minor">
+            <a:schemeClr val="lt1"/>
+          </a:fontRef>
+        </p:style>
+        <p:txBody>
+          <a:bodyPr rtlCol="0" anchor="ctr"/>
+          <a:lstStyle/>
+          <a:p>
+            <a:pPr algn="ctr"/>
+            <a:endParaRPr/>
+          </a:p>
+        </p:txBody>
+      </p:sp>
+      <p:sp>
+        <p:nvSpPr>
+          <p:cNvPr id="16" name="Rectangle 15"/>
+          <p:cNvSpPr/>
+          <p:nvPr/>
+        </p:nvSpPr>
+        <p:spPr>
+          <a:xfrm>
+            <a:off x="1492123" y="1510665"/>
+            <a:ext cx="73152" cy="2011680"/>
+          </a:xfrm>
+          <a:prstGeom prst="rect">
+            <a:avLst/>
+          </a:prstGeom>
+          <a:solidFill>
+            <a:srgbClr val="D55E0A"/>
+          </a:solidFill>
+          <a:ln>
+            <a:noFill/>
+          </a:ln>
+          <a:effectLst/>
+        </p:spPr>
+        <p:style>
+          <a:lnRef idx="1">
+            <a:schemeClr val="accent1"/>
+          </a:lnRef>
+          <a:fillRef idx="3">
+            <a:schemeClr val="accent1"/>
+          </a:fillRef>
+          <a:effectRef idx="2">
+            <a:schemeClr val="accent1"/>
+          </a:effectRef>
+          <a:fontRef idx="minor">
+            <a:schemeClr val="lt1"/>
+          </a:fontRef>
+        </p:style>
+        <p:txBody>
+          <a:bodyPr rtlCol="0" anchor="ctr"/>
+          <a:lstStyle/>
+          <a:p>
+            <a:pPr algn="ctr"/>
+            <a:endParaRPr/>
+          </a:p>
+        </p:txBody>
+      </p:sp>
+      <p:sp>
+        <p:nvSpPr>
+          <p:cNvPr id="17" name="TextBox 16"/>
+          <p:cNvSpPr txBox="1"/>
+          <p:nvPr/>
+        </p:nvSpPr>
+        <p:spPr>
+          <a:xfrm>
+            <a:off x="1675003" y="1602105"/>
+            <a:ext cx="640080" cy="274320"/>
+          </a:xfrm>
+          <a:prstGeom prst="rect">
+            <a:avLst/>
+          </a:prstGeom>
+          <a:noFill/>
+        </p:spPr>
+        <p:txBody>
+          <a:bodyPr wrap="square" lIns="0" tIns="0" rIns="0" bIns="0" anchor="t">
+            <a:spAutoFit/>
+          </a:bodyPr>
+          <a:lstStyle/>
+          <a:p>
+            <a:pPr algn="l">
+              <a:lnSpc>
+                <a:spcPct val="100000"/>
+              </a:lnSpc>
+            </a:pPr>
+            <a:r>
+              <a:rPr sz="1800" b="1" i="0" dirty="0" smtClean="0">
+                <a:solidFill>
+                  <a:srgbClr val="D55E0A"/>
+                </a:solidFill>
+                <a:latin typeface="Calibri"/>
+              </a:rPr>
+              <a:t>0</a:t>
+            </a:r>
+            <a:r>
+              <a:rPr lang="en-US" sz="1800" b="1" i="0" dirty="0" smtClean="0">
+                <a:solidFill>
+                  <a:srgbClr val="D55E0A"/>
+                </a:solidFill>
+                <a:latin typeface="Calibri"/>
+              </a:rPr>
+              <a:t>1</a:t>
+            </a:r>
+            <a:endParaRPr sz="1800" b="1" i="0" dirty="0">
+              <a:solidFill>
+                <a:srgbClr val="D55E0A"/>
+              </a:solidFill>
+              <a:latin typeface="Calibri"/>
+            </a:endParaRPr>
+          </a:p>
+        </p:txBody>
+      </p:sp>
+      <p:sp>
+        <p:nvSpPr>
+          <p:cNvPr id="18" name="TextBox 17"/>
+          <p:cNvSpPr txBox="1"/>
+          <p:nvPr/>
+        </p:nvSpPr>
+        <p:spPr>
+          <a:xfrm>
+            <a:off x="2360803" y="1629537"/>
+            <a:ext cx="1783080" cy="228600"/>
+          </a:xfrm>
+          <a:prstGeom prst="rect">
+            <a:avLst/>
+          </a:prstGeom>
+          <a:noFill/>
+        </p:spPr>
+        <p:txBody>
+          <a:bodyPr wrap="square" lIns="0" tIns="0" rIns="0" bIns="0" anchor="t">
+            <a:spAutoFit/>
+          </a:bodyPr>
+          <a:lstStyle/>
+          <a:p>
+            <a:pPr algn="r">
+              <a:lnSpc>
+                <a:spcPct val="100000"/>
+              </a:lnSpc>
+            </a:pPr>
+            <a:r>
+              <a:rPr sz="800" b="1" i="0">
+                <a:solidFill>
+                  <a:srgbClr val="6B6B6B"/>
+                </a:solidFill>
+                <a:latin typeface="Calibri"/>
+              </a:rPr>
+              <a:t>ТЕСТ-ОБРАЗЕЦ</a:t>
+            </a:r>
+          </a:p>
+        </p:txBody>
+      </p:sp>
+      <p:sp>
+        <p:nvSpPr>
+          <p:cNvPr id="19" name="TextBox 18"/>
+          <p:cNvSpPr txBox="1"/>
+          <p:nvPr/>
+        </p:nvSpPr>
+        <p:spPr>
+          <a:xfrm>
+            <a:off x="1675003" y="1967865"/>
+            <a:ext cx="2468880" cy="372410"/>
+          </a:xfrm>
+          <a:prstGeom prst="rect">
+            <a:avLst/>
+          </a:prstGeom>
+          <a:noFill/>
+        </p:spPr>
+        <p:txBody>
+          <a:bodyPr wrap="square" lIns="0" tIns="0" rIns="0" bIns="0" anchor="t">
+            <a:spAutoFit/>
+          </a:bodyPr>
+          <a:lstStyle/>
+          <a:p>
+            <a:pPr algn="l">
+              <a:lnSpc>
+                <a:spcPct val="110000"/>
+              </a:lnSpc>
+            </a:pPr>
+            <a:r>
+              <a:rPr sz="1100" b="1" i="0" dirty="0" err="1">
+                <a:solidFill>
+                  <a:srgbClr val="313131"/>
+                </a:solidFill>
+                <a:latin typeface="Calibri"/>
+              </a:rPr>
+              <a:t>Пробник</a:t>
+            </a:r>
+            <a:r>
+              <a:rPr sz="1100" b="1" i="0" dirty="0">
+                <a:solidFill>
+                  <a:srgbClr val="313131"/>
+                </a:solidFill>
+                <a:latin typeface="Calibri"/>
+              </a:rPr>
+              <a:t> TITAN 0,4 л (</a:t>
+            </a:r>
+            <a:r>
+              <a:rPr sz="1100" b="1" i="0" dirty="0" err="1">
+                <a:solidFill>
+                  <a:srgbClr val="313131"/>
+                </a:solidFill>
+                <a:latin typeface="Calibri"/>
+              </a:rPr>
+              <a:t>глянец</a:t>
+            </a:r>
+            <a:r>
+              <a:rPr sz="1100" b="1" i="0" dirty="0" smtClean="0">
+                <a:solidFill>
+                  <a:srgbClr val="313131"/>
+                </a:solidFill>
+                <a:latin typeface="Calibri"/>
+              </a:rPr>
+              <a:t>)</a:t>
+            </a:r>
+            <a:r>
+              <a:rPr lang="ru-RU" sz="1100" b="1" i="0" dirty="0" smtClean="0">
+                <a:solidFill>
+                  <a:srgbClr val="313131"/>
+                </a:solidFill>
+                <a:latin typeface="Calibri"/>
+              </a:rPr>
+              <a:t> + веерные железные </a:t>
+            </a:r>
+            <a:r>
+              <a:rPr lang="ru-RU" sz="1100" b="1" i="0" dirty="0" err="1" smtClean="0">
+                <a:solidFill>
+                  <a:srgbClr val="313131"/>
+                </a:solidFill>
+                <a:latin typeface="Calibri"/>
+              </a:rPr>
+              <a:t>выкрасы</a:t>
+            </a:r>
+            <a:endParaRPr sz="1100" b="1" i="0" dirty="0">
+              <a:solidFill>
+                <a:srgbClr val="313131"/>
+              </a:solidFill>
+              <a:latin typeface="Calibri"/>
+            </a:endParaRPr>
+          </a:p>
+        </p:txBody>
+      </p:sp>
+      <p:sp>
+        <p:nvSpPr>
+          <p:cNvPr id="20" name="TextBox 19"/>
+          <p:cNvSpPr txBox="1"/>
+          <p:nvPr/>
+        </p:nvSpPr>
+        <p:spPr>
+          <a:xfrm>
+            <a:off x="1675003" y="2379345"/>
+            <a:ext cx="2468880" cy="817531"/>
+          </a:xfrm>
+          <a:prstGeom prst="rect">
+            <a:avLst/>
+          </a:prstGeom>
+          <a:noFill/>
+        </p:spPr>
+        <p:txBody>
+          <a:bodyPr wrap="square" lIns="0" tIns="0" rIns="0" bIns="0" anchor="t">
+            <a:spAutoFit/>
+          </a:bodyPr>
+          <a:lstStyle/>
+          <a:p>
+            <a:pPr algn="l">
+              <a:lnSpc>
+                <a:spcPct val="125000"/>
+              </a:lnSpc>
+            </a:pPr>
+            <a:r>
+              <a:rPr sz="850" b="0" i="0" dirty="0" err="1">
+                <a:solidFill>
+                  <a:srgbClr val="6B6B6B"/>
+                </a:solidFill>
+                <a:latin typeface="Calibri"/>
+              </a:rPr>
+              <a:t>Тестовый</a:t>
+            </a:r>
+            <a:r>
+              <a:rPr sz="850" b="0" i="0" dirty="0">
+                <a:solidFill>
+                  <a:srgbClr val="6B6B6B"/>
+                </a:solidFill>
+                <a:latin typeface="Calibri"/>
+              </a:rPr>
+              <a:t> </a:t>
+            </a:r>
+            <a:r>
+              <a:rPr sz="850" b="0" i="0" dirty="0" err="1">
+                <a:solidFill>
+                  <a:srgbClr val="6B6B6B"/>
+                </a:solidFill>
+                <a:latin typeface="Calibri"/>
+              </a:rPr>
+              <a:t>образец</a:t>
+            </a:r>
+            <a:r>
+              <a:rPr sz="850" b="0" i="0" dirty="0">
+                <a:solidFill>
+                  <a:srgbClr val="6B6B6B"/>
+                </a:solidFill>
+                <a:latin typeface="Calibri"/>
+              </a:rPr>
+              <a:t> </a:t>
+            </a:r>
+            <a:r>
+              <a:rPr sz="850" b="0" i="0" dirty="0" err="1">
+                <a:solidFill>
+                  <a:srgbClr val="6B6B6B"/>
+                </a:solidFill>
+                <a:latin typeface="Calibri"/>
+              </a:rPr>
+              <a:t>для</a:t>
+            </a:r>
+            <a:r>
+              <a:rPr sz="850" b="0" i="0" dirty="0">
+                <a:solidFill>
+                  <a:srgbClr val="6B6B6B"/>
+                </a:solidFill>
+                <a:latin typeface="Calibri"/>
+              </a:rPr>
+              <a:t> B2B-партнёра. </a:t>
+            </a:r>
+            <a:r>
+              <a:rPr sz="850" b="0" i="0" dirty="0" err="1">
+                <a:solidFill>
+                  <a:srgbClr val="6B6B6B"/>
+                </a:solidFill>
+                <a:latin typeface="Calibri"/>
+              </a:rPr>
+              <a:t>Малая</a:t>
+            </a:r>
+            <a:r>
+              <a:rPr sz="850" b="0" i="0" dirty="0">
+                <a:solidFill>
+                  <a:srgbClr val="6B6B6B"/>
+                </a:solidFill>
+                <a:latin typeface="Calibri"/>
+              </a:rPr>
+              <a:t> </a:t>
+            </a:r>
+            <a:r>
+              <a:rPr sz="850" b="0" i="0" dirty="0" err="1">
+                <a:solidFill>
+                  <a:srgbClr val="6B6B6B"/>
+                </a:solidFill>
+                <a:latin typeface="Calibri"/>
+              </a:rPr>
+              <a:t>фасовка</a:t>
+            </a:r>
+            <a:r>
+              <a:rPr sz="850" b="0" i="0" dirty="0">
+                <a:solidFill>
+                  <a:srgbClr val="6B6B6B"/>
+                </a:solidFill>
+                <a:latin typeface="Calibri"/>
+              </a:rPr>
+              <a:t> — </a:t>
+            </a:r>
+            <a:r>
+              <a:rPr sz="850" b="0" i="0" dirty="0" err="1">
+                <a:solidFill>
+                  <a:srgbClr val="6B6B6B"/>
+                </a:solidFill>
+                <a:latin typeface="Calibri"/>
+              </a:rPr>
+              <a:t>низкий</a:t>
+            </a:r>
+            <a:r>
+              <a:rPr sz="850" b="0" i="0" dirty="0">
+                <a:solidFill>
+                  <a:srgbClr val="6B6B6B"/>
+                </a:solidFill>
+                <a:latin typeface="Calibri"/>
+              </a:rPr>
+              <a:t> </a:t>
+            </a:r>
+            <a:r>
+              <a:rPr sz="850" b="0" i="0" dirty="0" err="1">
+                <a:solidFill>
+                  <a:srgbClr val="6B6B6B"/>
+                </a:solidFill>
+                <a:latin typeface="Calibri"/>
+              </a:rPr>
+              <a:t>порог</a:t>
+            </a:r>
+            <a:r>
+              <a:rPr sz="850" b="0" i="0" dirty="0">
+                <a:solidFill>
+                  <a:srgbClr val="6B6B6B"/>
+                </a:solidFill>
+                <a:latin typeface="Calibri"/>
+              </a:rPr>
+              <a:t> </a:t>
+            </a:r>
+            <a:r>
+              <a:rPr sz="850" b="0" i="0" dirty="0" err="1">
+                <a:solidFill>
+                  <a:srgbClr val="6B6B6B"/>
+                </a:solidFill>
+                <a:latin typeface="Calibri"/>
+              </a:rPr>
+              <a:t>входа</a:t>
+            </a:r>
+            <a:r>
+              <a:rPr sz="850" b="0" i="0" dirty="0">
+                <a:solidFill>
+                  <a:srgbClr val="6B6B6B"/>
+                </a:solidFill>
+                <a:latin typeface="Calibri"/>
+              </a:rPr>
+              <a:t>. </a:t>
+            </a:r>
+            <a:r>
+              <a:rPr sz="850" b="0" i="0" dirty="0" err="1">
+                <a:solidFill>
+                  <a:srgbClr val="6B6B6B"/>
+                </a:solidFill>
+                <a:latin typeface="Calibri"/>
+              </a:rPr>
+              <a:t>Партнёр</a:t>
+            </a:r>
+            <a:r>
+              <a:rPr sz="850" b="0" i="0" dirty="0">
+                <a:solidFill>
+                  <a:srgbClr val="6B6B6B"/>
+                </a:solidFill>
+                <a:latin typeface="Calibri"/>
+              </a:rPr>
+              <a:t> </a:t>
+            </a:r>
+            <a:r>
+              <a:rPr sz="850" b="0" i="0" dirty="0" err="1">
+                <a:solidFill>
+                  <a:srgbClr val="6B6B6B"/>
+                </a:solidFill>
+                <a:latin typeface="Calibri"/>
+              </a:rPr>
+              <a:t>может</a:t>
+            </a:r>
+            <a:r>
+              <a:rPr sz="850" b="0" i="0" dirty="0">
+                <a:solidFill>
+                  <a:srgbClr val="6B6B6B"/>
+                </a:solidFill>
+                <a:latin typeface="Calibri"/>
+              </a:rPr>
+              <a:t> </a:t>
+            </a:r>
+            <a:r>
+              <a:rPr sz="850" b="0" i="0" dirty="0" err="1">
+                <a:solidFill>
+                  <a:srgbClr val="6B6B6B"/>
+                </a:solidFill>
+                <a:latin typeface="Calibri"/>
+              </a:rPr>
+              <a:t>попробовать</a:t>
+            </a:r>
+            <a:r>
+              <a:rPr sz="850" b="0" i="0" dirty="0">
+                <a:solidFill>
+                  <a:srgbClr val="6B6B6B"/>
+                </a:solidFill>
+                <a:latin typeface="Calibri"/>
+              </a:rPr>
+              <a:t> </a:t>
+            </a:r>
+            <a:r>
+              <a:rPr sz="850" b="0" i="0" dirty="0" err="1">
+                <a:solidFill>
+                  <a:srgbClr val="6B6B6B"/>
+                </a:solidFill>
+                <a:latin typeface="Calibri"/>
+              </a:rPr>
+              <a:t>продукт</a:t>
+            </a:r>
+            <a:r>
+              <a:rPr sz="850" b="0" i="0" dirty="0">
+                <a:solidFill>
+                  <a:srgbClr val="6B6B6B"/>
+                </a:solidFill>
+                <a:latin typeface="Calibri"/>
+              </a:rPr>
+              <a:t> </a:t>
+            </a:r>
+            <a:r>
+              <a:rPr sz="850" b="0" i="0" dirty="0" err="1">
+                <a:solidFill>
+                  <a:srgbClr val="6B6B6B"/>
+                </a:solidFill>
+                <a:latin typeface="Calibri"/>
+              </a:rPr>
+              <a:t>без</a:t>
+            </a:r>
+            <a:r>
+              <a:rPr sz="850" b="0" i="0" dirty="0">
+                <a:solidFill>
+                  <a:srgbClr val="6B6B6B"/>
+                </a:solidFill>
+                <a:latin typeface="Calibri"/>
+              </a:rPr>
+              <a:t> </a:t>
+            </a:r>
+            <a:r>
+              <a:rPr sz="850" b="0" i="0" dirty="0" err="1">
+                <a:solidFill>
+                  <a:srgbClr val="6B6B6B"/>
+                </a:solidFill>
+                <a:latin typeface="Calibri"/>
+              </a:rPr>
+              <a:t>больших</a:t>
+            </a:r>
+            <a:r>
+              <a:rPr sz="850" b="0" i="0" dirty="0">
+                <a:solidFill>
+                  <a:srgbClr val="6B6B6B"/>
+                </a:solidFill>
+                <a:latin typeface="Calibri"/>
+              </a:rPr>
+              <a:t> </a:t>
+            </a:r>
+            <a:r>
+              <a:rPr sz="850" b="0" i="0" dirty="0" err="1">
+                <a:solidFill>
+                  <a:srgbClr val="6B6B6B"/>
+                </a:solidFill>
+                <a:latin typeface="Calibri"/>
+              </a:rPr>
+              <a:t>затрат</a:t>
+            </a:r>
+            <a:r>
+              <a:rPr sz="850" b="0" i="0" dirty="0">
+                <a:solidFill>
+                  <a:srgbClr val="6B6B6B"/>
+                </a:solidFill>
+                <a:latin typeface="Calibri"/>
+              </a:rPr>
+              <a:t>, </a:t>
+            </a:r>
+            <a:r>
+              <a:rPr sz="850" b="0" i="0" dirty="0" err="1">
+                <a:solidFill>
+                  <a:srgbClr val="6B6B6B"/>
+                </a:solidFill>
+                <a:latin typeface="Calibri"/>
+              </a:rPr>
+              <a:t>оценить</a:t>
+            </a:r>
+            <a:r>
+              <a:rPr sz="850" b="0" i="0" dirty="0">
+                <a:solidFill>
+                  <a:srgbClr val="6B6B6B"/>
+                </a:solidFill>
+                <a:latin typeface="Calibri"/>
+              </a:rPr>
+              <a:t> </a:t>
+            </a:r>
+            <a:r>
+              <a:rPr sz="850" b="0" i="0" dirty="0" err="1">
+                <a:solidFill>
+                  <a:srgbClr val="6B6B6B"/>
+                </a:solidFill>
+                <a:latin typeface="Calibri"/>
+              </a:rPr>
+              <a:t>качество</a:t>
+            </a:r>
+            <a:r>
+              <a:rPr sz="850" b="0" i="0" dirty="0">
+                <a:solidFill>
+                  <a:srgbClr val="6B6B6B"/>
+                </a:solidFill>
+                <a:latin typeface="Calibri"/>
+              </a:rPr>
+              <a:t> и </a:t>
+            </a:r>
+            <a:r>
+              <a:rPr sz="850" b="0" i="0" dirty="0" err="1">
+                <a:solidFill>
+                  <a:srgbClr val="6B6B6B"/>
+                </a:solidFill>
+                <a:latin typeface="Calibri"/>
+              </a:rPr>
+              <a:t>принять</a:t>
+            </a:r>
+            <a:r>
+              <a:rPr sz="850" b="0" i="0" dirty="0">
+                <a:solidFill>
+                  <a:srgbClr val="6B6B6B"/>
+                </a:solidFill>
+                <a:latin typeface="Calibri"/>
+              </a:rPr>
+              <a:t> </a:t>
+            </a:r>
+            <a:r>
+              <a:rPr sz="850" b="0" i="0" dirty="0" err="1">
+                <a:solidFill>
+                  <a:srgbClr val="6B6B6B"/>
+                </a:solidFill>
+                <a:latin typeface="Calibri"/>
+              </a:rPr>
+              <a:t>решение</a:t>
+            </a:r>
+            <a:r>
+              <a:rPr sz="850" b="0" i="0" dirty="0">
+                <a:solidFill>
+                  <a:srgbClr val="6B6B6B"/>
+                </a:solidFill>
+                <a:latin typeface="Calibri"/>
+              </a:rPr>
+              <a:t> о </a:t>
+            </a:r>
+            <a:r>
+              <a:rPr sz="850" b="0" i="0" dirty="0" err="1" smtClean="0">
+                <a:solidFill>
+                  <a:srgbClr val="6B6B6B"/>
+                </a:solidFill>
+                <a:latin typeface="Calibri"/>
+              </a:rPr>
+              <a:t>закупке</a:t>
+            </a:r>
+            <a:r>
+              <a:rPr lang="ru-RU" sz="850" dirty="0" smtClean="0">
+                <a:solidFill>
+                  <a:srgbClr val="6B6B6B"/>
+                </a:solidFill>
+                <a:latin typeface="Calibri"/>
+              </a:rPr>
+              <a:t>. Также ознакомиться с цветовой палитрой.</a:t>
+            </a:r>
+            <a:endParaRPr sz="850" b="0" i="0" dirty="0">
+              <a:solidFill>
+                <a:srgbClr val="6B6B6B"/>
+              </a:solidFill>
+              <a:latin typeface="Calibri"/>
+            </a:endParaRPr>
+          </a:p>
+        </p:txBody>
+      </p:sp>
+      <p:sp>
+        <p:nvSpPr>
+          <p:cNvPr id="21" name="Rounded Rectangle 20"/>
+          <p:cNvSpPr/>
+          <p:nvPr/>
+        </p:nvSpPr>
+        <p:spPr>
+          <a:xfrm>
+            <a:off x="4390771" y="1510665"/>
+            <a:ext cx="2788920" cy="2011680"/>
+          </a:xfrm>
+          <a:prstGeom prst="roundRect">
+            <a:avLst>
+              <a:gd name="adj" fmla="val 5000"/>
+            </a:avLst>
+          </a:prstGeom>
+          <a:solidFill>
+            <a:srgbClr val="FFFFFF"/>
+          </a:solidFill>
+          <a:ln w="9525">
+            <a:solidFill>
+              <a:srgbClr val="F5F5F5"/>
+            </a:solidFill>
+          </a:ln>
+          <a:effectLst/>
+        </p:spPr>
+        <p:style>
+          <a:lnRef idx="1">
+            <a:schemeClr val="accent1"/>
+          </a:lnRef>
+          <a:fillRef idx="3">
+            <a:schemeClr val="accent1"/>
+          </a:fillRef>
+          <a:effectRef idx="2">
+            <a:schemeClr val="accent1"/>
+          </a:effectRef>
+          <a:fontRef idx="minor">
+            <a:schemeClr val="lt1"/>
+          </a:fontRef>
+        </p:style>
+        <p:txBody>
+          <a:bodyPr rtlCol="0" anchor="ctr"/>
+          <a:lstStyle/>
+          <a:p>
+            <a:pPr algn="ctr"/>
+            <a:endParaRPr/>
+          </a:p>
+        </p:txBody>
+      </p:sp>
+      <p:sp>
+        <p:nvSpPr>
+          <p:cNvPr id="22" name="Rectangle 21"/>
+          <p:cNvSpPr/>
+          <p:nvPr/>
+        </p:nvSpPr>
+        <p:spPr>
+          <a:xfrm>
+            <a:off x="4390771" y="1510665"/>
+            <a:ext cx="73152" cy="2011680"/>
+          </a:xfrm>
+          <a:prstGeom prst="rect">
+            <a:avLst/>
+          </a:prstGeom>
+          <a:solidFill>
+            <a:srgbClr val="F47629"/>
+          </a:solidFill>
+          <a:ln>
+            <a:noFill/>
+          </a:ln>
+          <a:effectLst/>
+        </p:spPr>
+        <p:style>
+          <a:lnRef idx="1">
+            <a:schemeClr val="accent1"/>
+          </a:lnRef>
+          <a:fillRef idx="3">
+            <a:schemeClr val="accent1"/>
+          </a:fillRef>
+          <a:effectRef idx="2">
+            <a:schemeClr val="accent1"/>
+          </a:effectRef>
+          <a:fontRef idx="minor">
+            <a:schemeClr val="lt1"/>
+          </a:fontRef>
+        </p:style>
+        <p:txBody>
+          <a:bodyPr rtlCol="0" anchor="ctr"/>
+          <a:lstStyle/>
+          <a:p>
+            <a:pPr algn="ctr"/>
+            <a:endParaRPr/>
+          </a:p>
+        </p:txBody>
+      </p:sp>
+      <p:sp>
+        <p:nvSpPr>
+          <p:cNvPr id="23" name="TextBox 22"/>
+          <p:cNvSpPr txBox="1"/>
+          <p:nvPr/>
+        </p:nvSpPr>
+        <p:spPr>
+          <a:xfrm>
+            <a:off x="4573651" y="1602105"/>
+            <a:ext cx="640080" cy="274320"/>
+          </a:xfrm>
+          <a:prstGeom prst="rect">
+            <a:avLst/>
+          </a:prstGeom>
+          <a:noFill/>
+        </p:spPr>
+        <p:txBody>
+          <a:bodyPr wrap="square" lIns="0" tIns="0" rIns="0" bIns="0" anchor="t">
+            <a:spAutoFit/>
+          </a:bodyPr>
+          <a:lstStyle/>
+          <a:p>
+            <a:pPr algn="l">
+              <a:lnSpc>
+                <a:spcPct val="100000"/>
+              </a:lnSpc>
+            </a:pPr>
+            <a:r>
+              <a:rPr sz="1800" b="1" i="0" dirty="0" smtClean="0">
+                <a:solidFill>
+                  <a:srgbClr val="F47629"/>
+                </a:solidFill>
+                <a:latin typeface="Calibri"/>
+              </a:rPr>
+              <a:t>0</a:t>
+            </a:r>
+            <a:r>
+              <a:rPr lang="en-US" sz="1800" b="1" i="0" dirty="0" smtClean="0">
+                <a:solidFill>
+                  <a:srgbClr val="F47629"/>
+                </a:solidFill>
+                <a:latin typeface="Calibri"/>
+              </a:rPr>
+              <a:t>2</a:t>
+            </a:r>
+            <a:endParaRPr sz="1800" b="1" i="0" dirty="0">
+              <a:solidFill>
+                <a:srgbClr val="F47629"/>
+              </a:solidFill>
+              <a:latin typeface="Calibri"/>
+            </a:endParaRPr>
+          </a:p>
+        </p:txBody>
+      </p:sp>
+      <p:sp>
+        <p:nvSpPr>
+          <p:cNvPr id="24" name="TextBox 23"/>
+          <p:cNvSpPr txBox="1"/>
+          <p:nvPr/>
+        </p:nvSpPr>
+        <p:spPr>
+          <a:xfrm>
+            <a:off x="5259451" y="1629537"/>
+            <a:ext cx="1783080" cy="228600"/>
+          </a:xfrm>
+          <a:prstGeom prst="rect">
+            <a:avLst/>
+          </a:prstGeom>
+          <a:noFill/>
+        </p:spPr>
+        <p:txBody>
+          <a:bodyPr wrap="square" lIns="0" tIns="0" rIns="0" bIns="0" anchor="t">
+            <a:spAutoFit/>
+          </a:bodyPr>
+          <a:lstStyle/>
+          <a:p>
+            <a:pPr algn="r">
+              <a:lnSpc>
+                <a:spcPct val="100000"/>
+              </a:lnSpc>
+            </a:pPr>
+            <a:r>
+              <a:rPr sz="800" b="1" i="0">
+                <a:solidFill>
+                  <a:srgbClr val="6B6B6B"/>
+                </a:solidFill>
+                <a:latin typeface="Calibri"/>
+              </a:rPr>
+              <a:t>ИНСТРУМЕНТ</a:t>
+            </a:r>
+          </a:p>
+        </p:txBody>
+      </p:sp>
+      <p:sp>
+        <p:nvSpPr>
+          <p:cNvPr id="25" name="TextBox 24"/>
+          <p:cNvSpPr txBox="1"/>
+          <p:nvPr/>
+        </p:nvSpPr>
+        <p:spPr>
+          <a:xfrm>
+            <a:off x="4573651" y="1967865"/>
+            <a:ext cx="2468880" cy="411480"/>
+          </a:xfrm>
+          <a:prstGeom prst="rect">
+            <a:avLst/>
+          </a:prstGeom>
+          <a:noFill/>
+        </p:spPr>
+        <p:txBody>
+          <a:bodyPr wrap="square" lIns="0" tIns="0" rIns="0" bIns="0" anchor="t">
+            <a:spAutoFit/>
+          </a:bodyPr>
+          <a:lstStyle/>
+          <a:p>
+            <a:pPr algn="l">
+              <a:lnSpc>
+                <a:spcPct val="110000"/>
+              </a:lnSpc>
+            </a:pPr>
+            <a:r>
+              <a:rPr sz="1100" b="1" i="0" dirty="0" err="1">
+                <a:solidFill>
+                  <a:srgbClr val="313131"/>
+                </a:solidFill>
+                <a:latin typeface="Calibri"/>
+              </a:rPr>
+              <a:t>Листовка</a:t>
+            </a:r>
+            <a:r>
+              <a:rPr sz="1100" b="1" i="0" dirty="0">
+                <a:solidFill>
+                  <a:srgbClr val="313131"/>
+                </a:solidFill>
+                <a:latin typeface="Calibri"/>
+              </a:rPr>
+              <a:t> </a:t>
+            </a:r>
+            <a:r>
+              <a:rPr sz="1100" b="1" i="0" dirty="0" err="1">
+                <a:solidFill>
+                  <a:srgbClr val="313131"/>
+                </a:solidFill>
+                <a:latin typeface="Calibri"/>
+              </a:rPr>
+              <a:t>для</a:t>
+            </a:r>
+            <a:r>
+              <a:rPr sz="1100" b="1" i="0" dirty="0">
+                <a:solidFill>
+                  <a:srgbClr val="313131"/>
+                </a:solidFill>
+                <a:latin typeface="Calibri"/>
+              </a:rPr>
+              <a:t> B2B-сегмента</a:t>
+            </a:r>
+          </a:p>
+        </p:txBody>
+      </p:sp>
+      <p:sp>
+        <p:nvSpPr>
+          <p:cNvPr id="26" name="TextBox 25"/>
+          <p:cNvSpPr txBox="1"/>
+          <p:nvPr/>
+        </p:nvSpPr>
+        <p:spPr>
+          <a:xfrm>
+            <a:off x="4573651" y="2379345"/>
+            <a:ext cx="2468880" cy="1051560"/>
+          </a:xfrm>
+          <a:prstGeom prst="rect">
+            <a:avLst/>
+          </a:prstGeom>
+          <a:noFill/>
+        </p:spPr>
+        <p:txBody>
+          <a:bodyPr wrap="square" lIns="0" tIns="0" rIns="0" bIns="0" anchor="t">
+            <a:spAutoFit/>
+          </a:bodyPr>
+          <a:lstStyle/>
+          <a:p>
+            <a:pPr algn="l">
+              <a:lnSpc>
+                <a:spcPct val="125000"/>
+              </a:lnSpc>
+            </a:pPr>
+            <a:r>
+              <a:rPr sz="850" b="0" i="0">
+                <a:solidFill>
+                  <a:srgbClr val="6B6B6B"/>
+                </a:solidFill>
+                <a:latin typeface="Calibri"/>
+              </a:rPr>
+              <a:t>Отдельная листовка с расчётом выгоды TITAN для B2B-клиента: срок службы 10 лет, совокупная стоимость владения, экономия vs ПФ-115. Фокус на окупаемость, а не на цену банки</a:t>
+            </a:r>
+          </a:p>
+        </p:txBody>
+      </p:sp>
+      <p:sp>
+        <p:nvSpPr>
+          <p:cNvPr id="29" name="TextBox 28"/>
+          <p:cNvSpPr txBox="1"/>
+          <p:nvPr/>
+        </p:nvSpPr>
+        <p:spPr>
+          <a:xfrm>
+            <a:off x="4512183" y="3723513"/>
+            <a:ext cx="640080" cy="274320"/>
+          </a:xfrm>
+          <a:prstGeom prst="rect">
+            <a:avLst/>
+          </a:prstGeom>
+          <a:noFill/>
+        </p:spPr>
+        <p:txBody>
+          <a:bodyPr wrap="square" lIns="0" tIns="0" rIns="0" bIns="0" anchor="t">
+            <a:spAutoFit/>
+          </a:bodyPr>
+          <a:lstStyle/>
+          <a:p>
+            <a:pPr algn="l">
+              <a:lnSpc>
+                <a:spcPct val="100000"/>
+              </a:lnSpc>
+            </a:pPr>
+            <a:r>
+              <a:rPr sz="1800" b="1" i="0" dirty="0" smtClean="0">
+                <a:solidFill>
+                  <a:srgbClr val="D55E0A"/>
+                </a:solidFill>
+                <a:latin typeface="Calibri"/>
+              </a:rPr>
+              <a:t>0</a:t>
+            </a:r>
+            <a:r>
+              <a:rPr lang="ru-RU" sz="1800" b="1" i="0" dirty="0" smtClean="0">
+                <a:solidFill>
+                  <a:srgbClr val="D55E0A"/>
+                </a:solidFill>
+                <a:latin typeface="Calibri"/>
+              </a:rPr>
+              <a:t>5</a:t>
+            </a:r>
+            <a:endParaRPr sz="1800" b="1" i="0" dirty="0">
+              <a:solidFill>
+                <a:srgbClr val="D55E0A"/>
+              </a:solidFill>
+              <a:latin typeface="Calibri"/>
+            </a:endParaRPr>
+          </a:p>
+        </p:txBody>
+      </p:sp>
+      <p:sp>
+        <p:nvSpPr>
+          <p:cNvPr id="30" name="TextBox 29"/>
+          <p:cNvSpPr txBox="1"/>
+          <p:nvPr/>
+        </p:nvSpPr>
+        <p:spPr>
+          <a:xfrm>
+            <a:off x="5197983" y="3750945"/>
+            <a:ext cx="1783080" cy="228600"/>
+          </a:xfrm>
+          <a:prstGeom prst="rect">
+            <a:avLst/>
+          </a:prstGeom>
+          <a:noFill/>
+        </p:spPr>
+        <p:txBody>
+          <a:bodyPr wrap="square" lIns="0" tIns="0" rIns="0" bIns="0" anchor="t">
+            <a:spAutoFit/>
+          </a:bodyPr>
+          <a:lstStyle/>
+          <a:p>
+            <a:pPr algn="r">
+              <a:lnSpc>
+                <a:spcPct val="100000"/>
+              </a:lnSpc>
+            </a:pPr>
+            <a:r>
+              <a:rPr sz="800" b="1" i="0">
+                <a:solidFill>
+                  <a:srgbClr val="6B6B6B"/>
+                </a:solidFill>
+                <a:latin typeface="Calibri"/>
+              </a:rPr>
+              <a:t>МАРЖА</a:t>
+            </a:r>
+          </a:p>
+        </p:txBody>
+      </p:sp>
+      <p:sp>
+        <p:nvSpPr>
+          <p:cNvPr id="31" name="TextBox 30"/>
+          <p:cNvSpPr txBox="1"/>
+          <p:nvPr/>
+        </p:nvSpPr>
+        <p:spPr>
+          <a:xfrm>
+            <a:off x="4512183" y="4089273"/>
+            <a:ext cx="2468880" cy="411480"/>
+          </a:xfrm>
+          <a:prstGeom prst="rect">
+            <a:avLst/>
+          </a:prstGeom>
+          <a:noFill/>
+        </p:spPr>
+        <p:txBody>
+          <a:bodyPr wrap="square" lIns="0" tIns="0" rIns="0" bIns="0" anchor="t">
+            <a:spAutoFit/>
+          </a:bodyPr>
+          <a:lstStyle/>
+          <a:p>
+            <a:pPr algn="l">
+              <a:lnSpc>
+                <a:spcPct val="110000"/>
+              </a:lnSpc>
+            </a:pPr>
+            <a:r>
+              <a:rPr sz="1100" b="1" i="0">
+                <a:solidFill>
+                  <a:srgbClr val="313131"/>
+                </a:solidFill>
+                <a:latin typeface="Calibri"/>
+              </a:rPr>
+              <a:t>Смещение к крупной фасовке</a:t>
+            </a:r>
+          </a:p>
+        </p:txBody>
+      </p:sp>
+      <p:sp>
+        <p:nvSpPr>
+          <p:cNvPr id="32" name="TextBox 31"/>
+          <p:cNvSpPr txBox="1"/>
+          <p:nvPr/>
+        </p:nvSpPr>
+        <p:spPr>
+          <a:xfrm>
+            <a:off x="4512183" y="4500753"/>
+            <a:ext cx="2468880" cy="817531"/>
+          </a:xfrm>
+          <a:prstGeom prst="rect">
+            <a:avLst/>
+          </a:prstGeom>
+          <a:noFill/>
+        </p:spPr>
+        <p:txBody>
+          <a:bodyPr wrap="square" lIns="0" tIns="0" rIns="0" bIns="0" anchor="t">
+            <a:spAutoFit/>
+          </a:bodyPr>
+          <a:lstStyle/>
+          <a:p>
+            <a:pPr algn="l">
+              <a:lnSpc>
+                <a:spcPct val="125000"/>
+              </a:lnSpc>
+            </a:pPr>
+            <a:r>
+              <a:rPr sz="850" b="0" i="0" dirty="0" err="1">
+                <a:solidFill>
+                  <a:srgbClr val="6B6B6B"/>
+                </a:solidFill>
+                <a:latin typeface="Calibri"/>
+              </a:rPr>
+              <a:t>Расчёт</a:t>
+            </a:r>
+            <a:r>
+              <a:rPr sz="850" b="0" i="0" dirty="0">
+                <a:solidFill>
+                  <a:srgbClr val="6B6B6B"/>
+                </a:solidFill>
+                <a:latin typeface="Calibri"/>
+              </a:rPr>
+              <a:t> </a:t>
+            </a:r>
+            <a:r>
+              <a:rPr sz="850" b="0" i="0" dirty="0" err="1">
+                <a:solidFill>
+                  <a:srgbClr val="6B6B6B"/>
+                </a:solidFill>
+                <a:latin typeface="Calibri"/>
+              </a:rPr>
+              <a:t>маржинальности</a:t>
+            </a:r>
+            <a:r>
+              <a:rPr sz="850" b="0" i="0" dirty="0">
+                <a:solidFill>
+                  <a:srgbClr val="6B6B6B"/>
+                </a:solidFill>
+                <a:latin typeface="Calibri"/>
+              </a:rPr>
+              <a:t> </a:t>
+            </a:r>
+            <a:r>
+              <a:rPr sz="850" b="0" i="0" dirty="0" err="1">
+                <a:solidFill>
+                  <a:srgbClr val="6B6B6B"/>
+                </a:solidFill>
+                <a:latin typeface="Calibri"/>
+              </a:rPr>
+              <a:t>по</a:t>
+            </a:r>
+            <a:r>
+              <a:rPr sz="850" b="0" i="0" dirty="0">
+                <a:solidFill>
+                  <a:srgbClr val="6B6B6B"/>
+                </a:solidFill>
+                <a:latin typeface="Calibri"/>
+              </a:rPr>
+              <a:t> </a:t>
+            </a:r>
+            <a:r>
+              <a:rPr sz="850" b="0" i="0" dirty="0" err="1" smtClean="0">
+                <a:solidFill>
+                  <a:srgbClr val="6B6B6B"/>
+                </a:solidFill>
+                <a:latin typeface="Calibri"/>
+              </a:rPr>
+              <a:t>фасовкам</a:t>
+            </a:r>
+            <a:r>
+              <a:rPr lang="ru-RU" sz="850" b="0" i="0" dirty="0" smtClean="0">
+                <a:solidFill>
+                  <a:srgbClr val="6B6B6B"/>
+                </a:solidFill>
+                <a:latin typeface="Calibri"/>
+              </a:rPr>
+              <a:t>, </a:t>
+            </a:r>
+            <a:r>
+              <a:rPr lang="ru-RU" sz="850" b="0" i="0" dirty="0" err="1" smtClean="0">
+                <a:solidFill>
+                  <a:srgbClr val="6B6B6B"/>
+                </a:solidFill>
+                <a:latin typeface="Calibri"/>
+              </a:rPr>
+              <a:t>абсолюная</a:t>
+            </a:r>
+            <a:r>
+              <a:rPr lang="ru-RU" sz="850" b="0" i="0" dirty="0" smtClean="0">
+                <a:solidFill>
+                  <a:srgbClr val="6B6B6B"/>
+                </a:solidFill>
+                <a:latin typeface="Calibri"/>
+              </a:rPr>
+              <a:t> прибыль</a:t>
+            </a:r>
+            <a:r>
+              <a:rPr sz="850" b="0" i="0" dirty="0" smtClean="0">
+                <a:solidFill>
+                  <a:srgbClr val="6B6B6B"/>
+                </a:solidFill>
+                <a:latin typeface="Calibri"/>
+              </a:rPr>
+              <a:t>. </a:t>
+            </a:r>
+            <a:r>
+              <a:rPr sz="850" b="0" i="0" dirty="0">
+                <a:solidFill>
+                  <a:srgbClr val="6B6B6B"/>
+                </a:solidFill>
+                <a:latin typeface="Calibri"/>
+              </a:rPr>
+              <a:t>B2B-клиенту </a:t>
+            </a:r>
+            <a:r>
+              <a:rPr sz="850" b="0" i="0" dirty="0" err="1">
+                <a:solidFill>
+                  <a:srgbClr val="6B6B6B"/>
+                </a:solidFill>
+                <a:latin typeface="Calibri"/>
+              </a:rPr>
+              <a:t>выгоднее</a:t>
+            </a:r>
+            <a:r>
+              <a:rPr sz="850" b="0" i="0" dirty="0">
+                <a:solidFill>
+                  <a:srgbClr val="6B6B6B"/>
+                </a:solidFill>
+                <a:latin typeface="Calibri"/>
+              </a:rPr>
+              <a:t> </a:t>
+            </a:r>
+            <a:r>
+              <a:rPr lang="en-US" sz="850" dirty="0" smtClean="0">
+                <a:solidFill>
+                  <a:srgbClr val="6B6B6B"/>
+                </a:solidFill>
+                <a:latin typeface="Calibri"/>
+              </a:rPr>
+              <a:t>8,5</a:t>
+            </a:r>
+            <a:r>
+              <a:rPr sz="850" b="0" i="0" dirty="0" smtClean="0">
+                <a:solidFill>
+                  <a:srgbClr val="6B6B6B"/>
+                </a:solidFill>
+                <a:latin typeface="Calibri"/>
+              </a:rPr>
+              <a:t> </a:t>
+            </a:r>
+            <a:r>
+              <a:rPr sz="850" b="0" i="0" dirty="0">
+                <a:solidFill>
+                  <a:srgbClr val="6B6B6B"/>
+                </a:solidFill>
+                <a:latin typeface="Calibri"/>
+              </a:rPr>
+              <a:t>л / </a:t>
+            </a:r>
+            <a:r>
+              <a:rPr lang="en-US" sz="850" b="0" i="0" dirty="0" smtClean="0">
+                <a:solidFill>
+                  <a:srgbClr val="6B6B6B"/>
+                </a:solidFill>
+                <a:latin typeface="Calibri"/>
+              </a:rPr>
+              <a:t>10</a:t>
+            </a:r>
+            <a:r>
+              <a:rPr sz="850" b="0" i="0" dirty="0" smtClean="0">
+                <a:solidFill>
+                  <a:srgbClr val="6B6B6B"/>
+                </a:solidFill>
+                <a:latin typeface="Calibri"/>
+              </a:rPr>
+              <a:t> </a:t>
+            </a:r>
+            <a:r>
+              <a:rPr sz="850" b="0" i="0" dirty="0" err="1">
+                <a:solidFill>
+                  <a:srgbClr val="6B6B6B"/>
+                </a:solidFill>
+                <a:latin typeface="Calibri"/>
+              </a:rPr>
+              <a:t>кг</a:t>
+            </a:r>
+            <a:r>
+              <a:rPr sz="850" b="0" i="0" dirty="0">
+                <a:solidFill>
+                  <a:srgbClr val="6B6B6B"/>
+                </a:solidFill>
+                <a:latin typeface="Calibri"/>
+              </a:rPr>
+              <a:t>, </a:t>
+            </a:r>
+            <a:r>
+              <a:rPr sz="850" b="0" i="0" dirty="0" err="1">
+                <a:solidFill>
+                  <a:srgbClr val="6B6B6B"/>
+                </a:solidFill>
+                <a:latin typeface="Calibri"/>
+              </a:rPr>
+              <a:t>чем</a:t>
+            </a:r>
+            <a:r>
+              <a:rPr sz="850" b="0" i="0" dirty="0">
+                <a:solidFill>
+                  <a:srgbClr val="6B6B6B"/>
+                </a:solidFill>
+                <a:latin typeface="Calibri"/>
+              </a:rPr>
+              <a:t> 0,75 л. </a:t>
+            </a:r>
+            <a:r>
+              <a:rPr sz="850" b="0" i="0" dirty="0" err="1">
+                <a:solidFill>
+                  <a:srgbClr val="6B6B6B"/>
+                </a:solidFill>
+                <a:latin typeface="Calibri"/>
+              </a:rPr>
+              <a:t>Дистрибьютор</a:t>
+            </a:r>
+            <a:r>
+              <a:rPr sz="850" b="0" i="0" dirty="0">
+                <a:solidFill>
+                  <a:srgbClr val="6B6B6B"/>
+                </a:solidFill>
+                <a:latin typeface="Calibri"/>
+              </a:rPr>
+              <a:t> </a:t>
+            </a:r>
+            <a:r>
+              <a:rPr sz="850" b="0" i="0" dirty="0" err="1">
+                <a:solidFill>
+                  <a:srgbClr val="6B6B6B"/>
+                </a:solidFill>
+                <a:latin typeface="Calibri"/>
+              </a:rPr>
+              <a:t>зарабатывает</a:t>
+            </a:r>
+            <a:r>
+              <a:rPr sz="850" b="0" i="0" dirty="0">
+                <a:solidFill>
+                  <a:srgbClr val="6B6B6B"/>
+                </a:solidFill>
+                <a:latin typeface="Calibri"/>
+              </a:rPr>
+              <a:t> </a:t>
+            </a:r>
+            <a:r>
+              <a:rPr sz="850" b="0" i="0" dirty="0" err="1">
+                <a:solidFill>
+                  <a:srgbClr val="6B6B6B"/>
+                </a:solidFill>
+                <a:latin typeface="Calibri"/>
+              </a:rPr>
+              <a:t>больше</a:t>
+            </a:r>
+            <a:r>
+              <a:rPr sz="850" b="0" i="0" dirty="0">
+                <a:solidFill>
+                  <a:srgbClr val="6B6B6B"/>
+                </a:solidFill>
+                <a:latin typeface="Calibri"/>
+              </a:rPr>
+              <a:t> </a:t>
+            </a:r>
+            <a:r>
+              <a:rPr sz="850" b="0" i="0" dirty="0" err="1">
+                <a:solidFill>
+                  <a:srgbClr val="6B6B6B"/>
+                </a:solidFill>
+                <a:latin typeface="Calibri"/>
+              </a:rPr>
+              <a:t>на</a:t>
+            </a:r>
+            <a:r>
+              <a:rPr sz="850" b="0" i="0" dirty="0">
+                <a:solidFill>
+                  <a:srgbClr val="6B6B6B"/>
+                </a:solidFill>
+                <a:latin typeface="Calibri"/>
+              </a:rPr>
+              <a:t> </a:t>
+            </a:r>
+            <a:r>
+              <a:rPr sz="850" b="0" i="0" dirty="0" err="1">
+                <a:solidFill>
+                  <a:srgbClr val="6B6B6B"/>
+                </a:solidFill>
+                <a:latin typeface="Calibri"/>
+              </a:rPr>
+              <a:t>крупной</a:t>
+            </a:r>
+            <a:r>
+              <a:rPr sz="850" b="0" i="0" dirty="0">
+                <a:solidFill>
+                  <a:srgbClr val="6B6B6B"/>
+                </a:solidFill>
+                <a:latin typeface="Calibri"/>
+              </a:rPr>
+              <a:t> </a:t>
+            </a:r>
+            <a:r>
+              <a:rPr sz="850" b="0" i="0" dirty="0" err="1">
+                <a:solidFill>
+                  <a:srgbClr val="6B6B6B"/>
+                </a:solidFill>
+                <a:latin typeface="Calibri"/>
+              </a:rPr>
+              <a:t>фасовке</a:t>
+            </a:r>
+            <a:r>
+              <a:rPr sz="850" b="0" i="0" dirty="0">
+                <a:solidFill>
+                  <a:srgbClr val="6B6B6B"/>
+                </a:solidFill>
+                <a:latin typeface="Calibri"/>
+              </a:rPr>
+              <a:t> — </a:t>
+            </a:r>
+            <a:r>
+              <a:rPr sz="850" b="0" i="0" dirty="0" err="1">
+                <a:solidFill>
+                  <a:srgbClr val="6B6B6B"/>
+                </a:solidFill>
+                <a:latin typeface="Calibri"/>
+              </a:rPr>
+              <a:t>мотивируем</a:t>
+            </a:r>
+            <a:r>
+              <a:rPr sz="850" b="0" i="0" dirty="0">
+                <a:solidFill>
+                  <a:srgbClr val="6B6B6B"/>
+                </a:solidFill>
+                <a:latin typeface="Calibri"/>
+              </a:rPr>
+              <a:t> </a:t>
+            </a:r>
+            <a:r>
+              <a:rPr sz="850" b="0" i="0" dirty="0" err="1">
+                <a:solidFill>
+                  <a:srgbClr val="6B6B6B"/>
+                </a:solidFill>
+                <a:latin typeface="Calibri"/>
+              </a:rPr>
+              <a:t>его</a:t>
+            </a:r>
+            <a:r>
+              <a:rPr sz="850" b="0" i="0" dirty="0">
+                <a:solidFill>
+                  <a:srgbClr val="6B6B6B"/>
+                </a:solidFill>
+                <a:latin typeface="Calibri"/>
+              </a:rPr>
+              <a:t> </a:t>
+            </a:r>
+            <a:r>
+              <a:rPr sz="850" b="0" i="0" dirty="0" err="1">
+                <a:solidFill>
+                  <a:srgbClr val="6B6B6B"/>
+                </a:solidFill>
+                <a:latin typeface="Calibri"/>
+              </a:rPr>
+              <a:t>продвигать</a:t>
+            </a:r>
+            <a:r>
+              <a:rPr sz="850" b="0" i="0" dirty="0">
+                <a:solidFill>
+                  <a:srgbClr val="6B6B6B"/>
+                </a:solidFill>
+                <a:latin typeface="Calibri"/>
+              </a:rPr>
+              <a:t> </a:t>
+            </a:r>
+            <a:r>
+              <a:rPr sz="850" b="0" i="0" dirty="0" err="1">
+                <a:solidFill>
+                  <a:srgbClr val="6B6B6B"/>
+                </a:solidFill>
+                <a:latin typeface="Calibri"/>
+              </a:rPr>
+              <a:t>именно</a:t>
+            </a:r>
+            <a:r>
+              <a:rPr sz="850" b="0" i="0" dirty="0">
+                <a:solidFill>
+                  <a:srgbClr val="6B6B6B"/>
+                </a:solidFill>
+                <a:latin typeface="Calibri"/>
+              </a:rPr>
+              <a:t> </a:t>
+            </a:r>
+            <a:r>
+              <a:rPr sz="850" b="0" i="0" dirty="0" err="1">
+                <a:solidFill>
+                  <a:srgbClr val="6B6B6B"/>
+                </a:solidFill>
+                <a:latin typeface="Calibri"/>
+              </a:rPr>
+              <a:t>её</a:t>
+            </a:r>
+            <a:endParaRPr sz="850" b="0" i="0" dirty="0">
+              <a:solidFill>
+                <a:srgbClr val="6B6B6B"/>
+              </a:solidFill>
+              <a:latin typeface="Calibri"/>
+            </a:endParaRPr>
+          </a:p>
+        </p:txBody>
+      </p:sp>
+      <p:sp>
+        <p:nvSpPr>
+          <p:cNvPr id="33" name="Rounded Rectangle 32"/>
+          <p:cNvSpPr/>
+          <p:nvPr/>
+        </p:nvSpPr>
+        <p:spPr>
+          <a:xfrm>
+            <a:off x="7269480" y="1483233"/>
+            <a:ext cx="2788920" cy="2011680"/>
+          </a:xfrm>
+          <a:prstGeom prst="roundRect">
+            <a:avLst>
+              <a:gd name="adj" fmla="val 5000"/>
+            </a:avLst>
+          </a:prstGeom>
+          <a:solidFill>
+            <a:srgbClr val="FFFFFF"/>
+          </a:solidFill>
+          <a:ln w="9525">
+            <a:solidFill>
+              <a:srgbClr val="F5F5F5"/>
+            </a:solidFill>
+          </a:ln>
+          <a:effectLst/>
+        </p:spPr>
+        <p:style>
+          <a:lnRef idx="1">
+            <a:schemeClr val="accent1"/>
+          </a:lnRef>
+          <a:fillRef idx="3">
+            <a:schemeClr val="accent1"/>
+          </a:fillRef>
+          <a:effectRef idx="2">
+            <a:schemeClr val="accent1"/>
+          </a:effectRef>
+          <a:fontRef idx="minor">
+            <a:schemeClr val="lt1"/>
+          </a:fontRef>
+        </p:style>
+        <p:txBody>
+          <a:bodyPr rtlCol="0" anchor="ctr"/>
+          <a:lstStyle/>
+          <a:p>
+            <a:pPr algn="ctr"/>
+            <a:endParaRPr/>
+          </a:p>
+        </p:txBody>
+      </p:sp>
+      <p:sp>
+        <p:nvSpPr>
+          <p:cNvPr id="34" name="Rectangle 33"/>
+          <p:cNvSpPr/>
+          <p:nvPr/>
+        </p:nvSpPr>
+        <p:spPr>
+          <a:xfrm>
+            <a:off x="7269480" y="1483233"/>
+            <a:ext cx="73152" cy="2011680"/>
+          </a:xfrm>
+          <a:prstGeom prst="rect">
+            <a:avLst/>
+          </a:prstGeom>
+          <a:solidFill>
+            <a:srgbClr val="F47629"/>
+          </a:solidFill>
+          <a:ln>
+            <a:noFill/>
+          </a:ln>
+          <a:effectLst/>
+        </p:spPr>
+        <p:style>
+          <a:lnRef idx="1">
+            <a:schemeClr val="accent1"/>
+          </a:lnRef>
+          <a:fillRef idx="3">
+            <a:schemeClr val="accent1"/>
+          </a:fillRef>
+          <a:effectRef idx="2">
+            <a:schemeClr val="accent1"/>
+          </a:effectRef>
+          <a:fontRef idx="minor">
+            <a:schemeClr val="lt1"/>
+          </a:fontRef>
+        </p:style>
+        <p:txBody>
+          <a:bodyPr rtlCol="0" anchor="ctr"/>
+          <a:lstStyle/>
+          <a:p>
+            <a:pPr algn="ctr"/>
+            <a:endParaRPr/>
+          </a:p>
+        </p:txBody>
+      </p:sp>
+      <p:sp>
+        <p:nvSpPr>
+          <p:cNvPr id="35" name="TextBox 34"/>
+          <p:cNvSpPr txBox="1"/>
+          <p:nvPr/>
+        </p:nvSpPr>
+        <p:spPr>
+          <a:xfrm>
+            <a:off x="7452360" y="1574673"/>
+            <a:ext cx="640080" cy="274320"/>
+          </a:xfrm>
+          <a:prstGeom prst="rect">
+            <a:avLst/>
+          </a:prstGeom>
+          <a:noFill/>
+        </p:spPr>
+        <p:txBody>
+          <a:bodyPr wrap="square" lIns="0" tIns="0" rIns="0" bIns="0" anchor="t">
+            <a:spAutoFit/>
+          </a:bodyPr>
+          <a:lstStyle/>
+          <a:p>
+            <a:pPr algn="l">
+              <a:lnSpc>
+                <a:spcPct val="100000"/>
+              </a:lnSpc>
+            </a:pPr>
+            <a:r>
+              <a:rPr sz="1800" b="1" i="0" dirty="0" smtClean="0">
+                <a:solidFill>
+                  <a:srgbClr val="F47629"/>
+                </a:solidFill>
+                <a:latin typeface="Calibri"/>
+              </a:rPr>
+              <a:t>0</a:t>
+            </a:r>
+            <a:r>
+              <a:rPr lang="en-US" b="1" dirty="0" smtClean="0">
+                <a:solidFill>
+                  <a:srgbClr val="F47629"/>
+                </a:solidFill>
+                <a:latin typeface="Calibri"/>
+              </a:rPr>
+              <a:t>3</a:t>
+            </a:r>
+            <a:endParaRPr sz="1800" b="1" i="0" dirty="0">
+              <a:solidFill>
+                <a:srgbClr val="F47629"/>
+              </a:solidFill>
+              <a:latin typeface="Calibri"/>
+            </a:endParaRPr>
+          </a:p>
+        </p:txBody>
+      </p:sp>
+      <p:sp>
+        <p:nvSpPr>
+          <p:cNvPr id="36" name="TextBox 35"/>
+          <p:cNvSpPr txBox="1"/>
+          <p:nvPr/>
+        </p:nvSpPr>
+        <p:spPr>
+          <a:xfrm>
+            <a:off x="8138160" y="1602105"/>
+            <a:ext cx="1783080" cy="228600"/>
+          </a:xfrm>
+          <a:prstGeom prst="rect">
+            <a:avLst/>
+          </a:prstGeom>
+          <a:noFill/>
+        </p:spPr>
+        <p:txBody>
+          <a:bodyPr wrap="square" lIns="0" tIns="0" rIns="0" bIns="0" anchor="t">
+            <a:spAutoFit/>
+          </a:bodyPr>
+          <a:lstStyle/>
+          <a:p>
+            <a:pPr algn="r">
+              <a:lnSpc>
+                <a:spcPct val="100000"/>
+              </a:lnSpc>
+            </a:pPr>
+            <a:r>
+              <a:rPr sz="800" b="1" i="0">
+                <a:solidFill>
+                  <a:srgbClr val="6B6B6B"/>
+                </a:solidFill>
+                <a:latin typeface="Calibri"/>
+              </a:rPr>
+              <a:t>ВЛИЯНИЕ</a:t>
+            </a:r>
+          </a:p>
+        </p:txBody>
+      </p:sp>
+      <p:sp>
+        <p:nvSpPr>
+          <p:cNvPr id="37" name="TextBox 36"/>
+          <p:cNvSpPr txBox="1"/>
+          <p:nvPr/>
+        </p:nvSpPr>
+        <p:spPr>
+          <a:xfrm>
+            <a:off x="7452360" y="1940433"/>
+            <a:ext cx="2468880" cy="411480"/>
+          </a:xfrm>
+          <a:prstGeom prst="rect">
+            <a:avLst/>
+          </a:prstGeom>
+          <a:noFill/>
+        </p:spPr>
+        <p:txBody>
+          <a:bodyPr wrap="square" lIns="0" tIns="0" rIns="0" bIns="0" anchor="t">
+            <a:spAutoFit/>
+          </a:bodyPr>
+          <a:lstStyle/>
+          <a:p>
+            <a:pPr algn="l">
+              <a:lnSpc>
+                <a:spcPct val="110000"/>
+              </a:lnSpc>
+            </a:pPr>
+            <a:r>
+              <a:rPr sz="1100" b="1" i="0">
+                <a:solidFill>
+                  <a:srgbClr val="313131"/>
+                </a:solidFill>
+                <a:latin typeface="Calibri"/>
+              </a:rPr>
+              <a:t>Региональный B2B-инфлюенсер</a:t>
+            </a:r>
+          </a:p>
+        </p:txBody>
+      </p:sp>
+      <p:sp>
+        <p:nvSpPr>
+          <p:cNvPr id="38" name="TextBox 37"/>
+          <p:cNvSpPr txBox="1"/>
+          <p:nvPr/>
+        </p:nvSpPr>
+        <p:spPr>
+          <a:xfrm>
+            <a:off x="7452360" y="2351913"/>
+            <a:ext cx="2468880" cy="1051560"/>
+          </a:xfrm>
+          <a:prstGeom prst="rect">
+            <a:avLst/>
+          </a:prstGeom>
+          <a:noFill/>
+        </p:spPr>
+        <p:txBody>
+          <a:bodyPr wrap="square" lIns="0" tIns="0" rIns="0" bIns="0" anchor="t">
+            <a:spAutoFit/>
+          </a:bodyPr>
+          <a:lstStyle/>
+          <a:p>
+            <a:pPr algn="l">
+              <a:lnSpc>
+                <a:spcPct val="125000"/>
+              </a:lnSpc>
+            </a:pPr>
+            <a:r>
+              <a:rPr sz="850" b="0" i="0">
+                <a:solidFill>
+                  <a:srgbClr val="6B6B6B"/>
+                </a:solidFill>
+                <a:latin typeface="Calibri"/>
+              </a:rPr>
+              <a:t>Выявление регионального лидера мнений в сфере B2B (производитель металлоконструкций, владелец крупного цеха, руководитель строительной компании). Его рекомендация работает лучше любой рекламы</a:t>
+            </a:r>
+          </a:p>
+        </p:txBody>
+      </p:sp>
+      <p:sp>
+        <p:nvSpPr>
+          <p:cNvPr id="40" name="Rectangle 39"/>
+          <p:cNvSpPr/>
+          <p:nvPr/>
+        </p:nvSpPr>
+        <p:spPr>
+          <a:xfrm>
+            <a:off x="4375023" y="3659505"/>
+            <a:ext cx="73152" cy="2011680"/>
+          </a:xfrm>
+          <a:prstGeom prst="rect">
+            <a:avLst/>
+          </a:prstGeom>
+          <a:solidFill>
+            <a:srgbClr val="D55E0A"/>
+          </a:solidFill>
+          <a:ln>
+            <a:noFill/>
+          </a:ln>
+          <a:effectLst/>
+        </p:spPr>
+        <p:style>
+          <a:lnRef idx="1">
+            <a:schemeClr val="accent1"/>
+          </a:lnRef>
+          <a:fillRef idx="3">
+            <a:schemeClr val="accent1"/>
+          </a:fillRef>
+          <a:effectRef idx="2">
+            <a:schemeClr val="accent1"/>
+          </a:effectRef>
+          <a:fontRef idx="minor">
+            <a:schemeClr val="lt1"/>
+          </a:fontRef>
+        </p:style>
+        <p:txBody>
+          <a:bodyPr rtlCol="0" anchor="ctr"/>
+          <a:lstStyle/>
+          <a:p>
+            <a:pPr algn="ctr"/>
+            <a:endParaRPr/>
+          </a:p>
+        </p:txBody>
+      </p:sp>
+      <p:sp>
+        <p:nvSpPr>
+          <p:cNvPr id="63" name="Rectangle 62"/>
+          <p:cNvSpPr/>
+          <p:nvPr/>
+        </p:nvSpPr>
+        <p:spPr>
+          <a:xfrm>
+            <a:off x="0" y="6675120"/>
+            <a:ext cx="12191695" cy="182880"/>
+          </a:xfrm>
+          <a:prstGeom prst="rect">
+            <a:avLst/>
+          </a:prstGeom>
+          <a:solidFill>
+            <a:srgbClr val="F47629"/>
+          </a:solidFill>
+          <a:ln>
+            <a:noFill/>
+          </a:ln>
+          <a:effectLst/>
+        </p:spPr>
+        <p:style>
+          <a:lnRef idx="1">
+            <a:schemeClr val="accent1"/>
+          </a:lnRef>
+          <a:fillRef idx="3">
+            <a:schemeClr val="accent1"/>
+          </a:fillRef>
+          <a:effectRef idx="2">
+            <a:schemeClr val="accent1"/>
+          </a:effectRef>
+          <a:fontRef idx="minor">
+            <a:schemeClr val="lt1"/>
+          </a:fontRef>
+        </p:style>
+        <p:txBody>
+          <a:bodyPr rtlCol="0" anchor="ctr"/>
+          <a:lstStyle/>
+          <a:p>
+            <a:pPr algn="ctr"/>
+            <a:endParaRPr/>
+          </a:p>
+        </p:txBody>
+      </p:sp>
+      <p:sp>
+        <p:nvSpPr>
+          <p:cNvPr id="64" name="Rounded Rectangle 32"/>
+          <p:cNvSpPr/>
+          <p:nvPr/>
+        </p:nvSpPr>
+        <p:spPr>
+          <a:xfrm>
+            <a:off x="7273671" y="3632073"/>
+            <a:ext cx="2788920" cy="2011680"/>
+          </a:xfrm>
+          <a:prstGeom prst="roundRect">
+            <a:avLst>
+              <a:gd name="adj" fmla="val 5000"/>
+            </a:avLst>
+          </a:prstGeom>
+          <a:solidFill>
+            <a:srgbClr val="FFFFFF"/>
+          </a:solidFill>
+          <a:ln w="9525">
+            <a:solidFill>
+              <a:srgbClr val="F5F5F5"/>
+            </a:solidFill>
+          </a:ln>
+          <a:effectLst/>
+        </p:spPr>
+        <p:style>
+          <a:lnRef idx="1">
+            <a:schemeClr val="accent1"/>
+          </a:lnRef>
+          <a:fillRef idx="3">
+            <a:schemeClr val="accent1"/>
+          </a:fillRef>
+          <a:effectRef idx="2">
+            <a:schemeClr val="accent1"/>
+          </a:effectRef>
+          <a:fontRef idx="minor">
+            <a:schemeClr val="lt1"/>
+          </a:fontRef>
+        </p:style>
+        <p:txBody>
+          <a:bodyPr rtlCol="0" anchor="ctr"/>
+          <a:lstStyle/>
+          <a:p>
+            <a:pPr algn="ctr"/>
+            <a:endParaRPr/>
+          </a:p>
+        </p:txBody>
+      </p:sp>
+      <p:sp>
+        <p:nvSpPr>
+          <p:cNvPr id="65" name="Rectangle 33"/>
+          <p:cNvSpPr/>
+          <p:nvPr/>
+        </p:nvSpPr>
+        <p:spPr>
+          <a:xfrm>
+            <a:off x="7273671" y="3632073"/>
+            <a:ext cx="73152" cy="2011680"/>
+          </a:xfrm>
+          <a:prstGeom prst="rect">
+            <a:avLst/>
+          </a:prstGeom>
+          <a:solidFill>
+            <a:srgbClr val="F47629"/>
+          </a:solidFill>
+          <a:ln>
+            <a:noFill/>
+          </a:ln>
+          <a:effectLst/>
+        </p:spPr>
+        <p:style>
+          <a:lnRef idx="1">
+            <a:schemeClr val="accent1"/>
+          </a:lnRef>
+          <a:fillRef idx="3">
+            <a:schemeClr val="accent1"/>
+          </a:fillRef>
+          <a:effectRef idx="2">
+            <a:schemeClr val="accent1"/>
+          </a:effectRef>
+          <a:fontRef idx="minor">
+            <a:schemeClr val="lt1"/>
+          </a:fontRef>
+        </p:style>
+        <p:txBody>
+          <a:bodyPr rtlCol="0" anchor="ctr"/>
+          <a:lstStyle/>
+          <a:p>
+            <a:pPr algn="ctr"/>
+            <a:endParaRPr/>
+          </a:p>
+        </p:txBody>
+      </p:sp>
+      <p:sp>
+        <p:nvSpPr>
+          <p:cNvPr id="66" name="TextBox 65"/>
+          <p:cNvSpPr txBox="1"/>
+          <p:nvPr/>
+        </p:nvSpPr>
+        <p:spPr>
+          <a:xfrm>
+            <a:off x="7456551" y="3723513"/>
+            <a:ext cx="640080" cy="274320"/>
+          </a:xfrm>
+          <a:prstGeom prst="rect">
+            <a:avLst/>
+          </a:prstGeom>
+          <a:noFill/>
+        </p:spPr>
+        <p:txBody>
+          <a:bodyPr wrap="square" lIns="0" tIns="0" rIns="0" bIns="0" anchor="t">
+            <a:spAutoFit/>
+          </a:bodyPr>
+          <a:lstStyle/>
+          <a:p>
+            <a:pPr algn="l">
+              <a:lnSpc>
+                <a:spcPct val="100000"/>
+              </a:lnSpc>
+            </a:pPr>
+            <a:r>
+              <a:rPr sz="1800" b="1" i="0" dirty="0" smtClean="0">
+                <a:solidFill>
+                  <a:srgbClr val="F47629"/>
+                </a:solidFill>
+                <a:latin typeface="Calibri"/>
+              </a:rPr>
+              <a:t>0</a:t>
+            </a:r>
+            <a:r>
+              <a:rPr lang="ru-RU" sz="1800" b="1" i="0" dirty="0" smtClean="0">
+                <a:solidFill>
+                  <a:srgbClr val="F47629"/>
+                </a:solidFill>
+                <a:latin typeface="Calibri"/>
+              </a:rPr>
+              <a:t>6</a:t>
+            </a:r>
+            <a:endParaRPr sz="1800" b="1" i="0" dirty="0">
+              <a:solidFill>
+                <a:srgbClr val="F47629"/>
+              </a:solidFill>
+              <a:latin typeface="Calibri"/>
+            </a:endParaRPr>
+          </a:p>
+        </p:txBody>
+      </p:sp>
+      <p:sp>
+        <p:nvSpPr>
+          <p:cNvPr id="67" name="TextBox 66"/>
+          <p:cNvSpPr txBox="1"/>
+          <p:nvPr/>
+        </p:nvSpPr>
+        <p:spPr>
+          <a:xfrm>
+            <a:off x="8142351" y="3750945"/>
+            <a:ext cx="1783080" cy="228600"/>
+          </a:xfrm>
+          <a:prstGeom prst="rect">
+            <a:avLst/>
+          </a:prstGeom>
+          <a:noFill/>
+        </p:spPr>
+        <p:txBody>
+          <a:bodyPr wrap="square" lIns="0" tIns="0" rIns="0" bIns="0" anchor="t">
+            <a:spAutoFit/>
+          </a:bodyPr>
+          <a:lstStyle/>
+          <a:p>
+            <a:pPr algn="r">
+              <a:lnSpc>
+                <a:spcPct val="100000"/>
+              </a:lnSpc>
+            </a:pPr>
+            <a:r>
+              <a:rPr sz="800" b="1" i="0">
+                <a:solidFill>
+                  <a:srgbClr val="6B6B6B"/>
+                </a:solidFill>
+                <a:latin typeface="Calibri"/>
+              </a:rPr>
+              <a:t>ВЛИЯНИЕ</a:t>
+            </a:r>
+          </a:p>
+        </p:txBody>
+      </p:sp>
+      <p:sp>
+        <p:nvSpPr>
+          <p:cNvPr id="68" name="TextBox 67"/>
+          <p:cNvSpPr txBox="1"/>
+          <p:nvPr/>
+        </p:nvSpPr>
+        <p:spPr>
+          <a:xfrm>
+            <a:off x="7456551" y="4089273"/>
+            <a:ext cx="2468880" cy="186205"/>
+          </a:xfrm>
+          <a:prstGeom prst="rect">
+            <a:avLst/>
+          </a:prstGeom>
+          <a:noFill/>
+        </p:spPr>
+        <p:txBody>
+          <a:bodyPr wrap="square" lIns="0" tIns="0" rIns="0" bIns="0" anchor="t">
+            <a:spAutoFit/>
+          </a:bodyPr>
+          <a:lstStyle/>
+          <a:p>
+            <a:pPr algn="l">
+              <a:lnSpc>
+                <a:spcPct val="110000"/>
+              </a:lnSpc>
+            </a:pPr>
+            <a:r>
+              <a:rPr lang="ru-RU" sz="1100" b="1" i="0" dirty="0" smtClean="0">
+                <a:solidFill>
+                  <a:srgbClr val="313131"/>
+                </a:solidFill>
+                <a:latin typeface="Calibri"/>
+              </a:rPr>
+              <a:t>Портфолио </a:t>
+            </a:r>
+            <a:r>
+              <a:rPr lang="en-US" sz="1100" b="1" dirty="0" smtClean="0">
+                <a:solidFill>
+                  <a:srgbClr val="313131"/>
+                </a:solidFill>
+                <a:latin typeface="Calibri"/>
+              </a:rPr>
+              <a:t>B2B</a:t>
+            </a:r>
+            <a:r>
+              <a:rPr lang="ru-RU" sz="1100" b="1" dirty="0" smtClean="0">
+                <a:solidFill>
+                  <a:srgbClr val="313131"/>
+                </a:solidFill>
+                <a:latin typeface="Calibri"/>
+              </a:rPr>
+              <a:t> объектов</a:t>
+            </a:r>
+            <a:r>
+              <a:rPr lang="en-US" sz="1100" b="1" dirty="0" smtClean="0">
+                <a:solidFill>
+                  <a:srgbClr val="313131"/>
+                </a:solidFill>
+                <a:latin typeface="Calibri"/>
+              </a:rPr>
+              <a:t> </a:t>
+            </a:r>
+            <a:endParaRPr sz="1100" b="1" i="0" dirty="0">
+              <a:solidFill>
+                <a:srgbClr val="313131"/>
+              </a:solidFill>
+              <a:latin typeface="Calibri"/>
+            </a:endParaRPr>
+          </a:p>
+        </p:txBody>
+      </p:sp>
+      <p:sp>
+        <p:nvSpPr>
+          <p:cNvPr id="69" name="TextBox 68"/>
+          <p:cNvSpPr txBox="1"/>
+          <p:nvPr/>
+        </p:nvSpPr>
+        <p:spPr>
+          <a:xfrm>
+            <a:off x="7456551" y="4500753"/>
+            <a:ext cx="2468880" cy="478464"/>
+          </a:xfrm>
+          <a:prstGeom prst="rect">
+            <a:avLst/>
+          </a:prstGeom>
+          <a:noFill/>
+        </p:spPr>
+        <p:txBody>
+          <a:bodyPr wrap="square" lIns="0" tIns="0" rIns="0" bIns="0" anchor="t">
+            <a:spAutoFit/>
+          </a:bodyPr>
+          <a:lstStyle/>
+          <a:p>
+            <a:pPr>
+              <a:lnSpc>
+                <a:spcPct val="125000"/>
+              </a:lnSpc>
+            </a:pPr>
+            <a:r>
+              <a:rPr lang="ru-RU" sz="850" dirty="0">
+                <a:solidFill>
+                  <a:srgbClr val="6B6B6B"/>
+                </a:solidFill>
+              </a:rPr>
+              <a:t>B2B-портфолио TITAN — самый маржинальный канал дистрибьютора: крупная фасовка + долгий срок службы = максимальная прибыль на единицу</a:t>
+            </a:r>
+            <a:endParaRPr sz="850" b="0" i="0" dirty="0">
+              <a:solidFill>
+                <a:srgbClr val="6B6B6B"/>
+              </a:solidFill>
+              <a:latin typeface="Calibri"/>
             </a:endParaRPr>
           </a:p>
         </p:txBody>
@@ -26140,7 +27949,7 @@
     </p:spTree>
     <p:extLst>
       <p:ext uri="{BB962C8B-B14F-4D97-AF65-F5344CB8AC3E}">
-        <p14:creationId xmlns:p14="http://schemas.microsoft.com/office/powerpoint/2010/main" val="3477436308"/>
+        <p14:creationId xmlns:p14="http://schemas.microsoft.com/office/powerpoint/2010/main" val="2362874966"/>
       </p:ext>
     </p:extLst>
   </p:cSld>
@@ -27682,16 +29491,7 @@
                 </a:solidFill>
                 <a:latin typeface="Arial"/>
               </a:rPr>
-              <a:t> от </a:t>
-            </a:r>
-            <a:r>
-              <a:rPr lang="ru-RU" sz="1400" b="1" dirty="0" smtClean="0">
-                <a:solidFill>
-                  <a:srgbClr val="00B050"/>
-                </a:solidFill>
-                <a:latin typeface="Arial"/>
-              </a:rPr>
-              <a:t>общей АКБ</a:t>
+              <a:t> от общей АКБ</a:t>
             </a:r>
             <a:r>
               <a:rPr lang="en-US" sz="1400" b="1" dirty="0" smtClean="0">
@@ -27839,13 +29639,7 @@
               <a:rPr lang="ru-RU" sz="1400" b="1" dirty="0" smtClean="0">
                 <a:latin typeface="Arial"/>
               </a:rPr>
-              <a:t>РТТ                                 </a:t>
-            </a:r>
-            <a:r>
-              <a:rPr lang="ru-RU" sz="1400" b="1" dirty="0" smtClean="0">
-                <a:latin typeface="Arial"/>
-              </a:rPr>
-              <a:t> </a:t>
+              <a:t>РТТ                                  </a:t>
             </a:r>
             <a:r>
               <a:rPr lang="en-US" sz="1400" b="1" dirty="0" smtClean="0">
@@ -28914,6 +30708,435 @@
 </p:sld>
 </file>
 
+<file path=ppt/slides/slide20.xml><?xml version="1.0" encoding="utf-8"?>
+<p:sld xmlns:a="http://schemas.openxmlformats.org/drawingml/2006/main" xmlns:r="http://schemas.openxmlformats.org/officeDocument/2006/relationships" xmlns:p="http://schemas.openxmlformats.org/presentationml/2006/main">
+  <p:cSld>
+    <p:spTree>
+      <p:nvGrpSpPr>
+        <p:cNvPr id="1" name=""/>
+        <p:cNvGrpSpPr/>
+        <p:nvPr/>
+      </p:nvGrpSpPr>
+      <p:grpSpPr>
+        <a:xfrm>
+          <a:off x="0" y="0"/>
+          <a:ext cx="0" cy="0"/>
+          <a:chOff x="0" y="0"/>
+          <a:chExt cx="0" cy="0"/>
+        </a:xfrm>
+      </p:grpSpPr>
+      <p:pic>
+        <p:nvPicPr>
+          <p:cNvPr id="2" name="Image 0" descr="preencoded.png"/>
+          <p:cNvPicPr>
+            <a:picLocks noChangeAspect="1"/>
+          </p:cNvPicPr>
+          <p:nvPr/>
+        </p:nvPicPr>
+        <p:blipFill>
+          <a:blip r:embed="rId3"/>
+          <a:srcRect/>
+          <a:stretch/>
+        </p:blipFill>
+        <p:spPr>
+          <a:xfrm>
+            <a:off x="6661152" y="-38100"/>
+            <a:ext cx="1695451" cy="806451"/>
+          </a:xfrm>
+          <a:prstGeom prst="rect">
+            <a:avLst/>
+          </a:prstGeom>
+        </p:spPr>
+      </p:pic>
+      <p:pic>
+        <p:nvPicPr>
+          <p:cNvPr id="3" name="Image 1" descr="preencoded.png"/>
+          <p:cNvPicPr>
+            <a:picLocks noChangeAspect="1"/>
+          </p:cNvPicPr>
+          <p:nvPr/>
+        </p:nvPicPr>
+        <p:blipFill>
+          <a:blip r:embed="rId4" cstate="hqprint">
+            <a:extLst>
+              <a:ext uri="{28A0092B-C50C-407E-A947-70E740481C1C}">
+                <a14:useLocalDpi xmlns:a14="http://schemas.microsoft.com/office/drawing/2010/main"/>
+              </a:ext>
+            </a:extLst>
+          </a:blip>
+          <a:srcRect r="584" b="-2003"/>
+          <a:stretch/>
+        </p:blipFill>
+        <p:spPr>
+          <a:xfrm>
+            <a:off x="7905753" y="2070101"/>
+            <a:ext cx="4324351" cy="3879851"/>
+          </a:xfrm>
+          <a:prstGeom prst="rect">
+            <a:avLst/>
+          </a:prstGeom>
+        </p:spPr>
+      </p:pic>
+      <p:pic>
+        <p:nvPicPr>
+          <p:cNvPr id="4" name="Image 2" descr="preencoded.png"/>
+          <p:cNvPicPr>
+            <a:picLocks noChangeAspect="1"/>
+          </p:cNvPicPr>
+          <p:nvPr/>
+        </p:nvPicPr>
+        <p:blipFill>
+          <a:blip r:embed="rId5" cstate="hqprint">
+            <a:extLst>
+              <a:ext uri="{28A0092B-C50C-407E-A947-70E740481C1C}">
+                <a14:useLocalDpi xmlns:a14="http://schemas.microsoft.com/office/drawing/2010/main"/>
+              </a:ext>
+            </a:extLst>
+          </a:blip>
+          <a:srcRect r="-551" b="12331"/>
+          <a:stretch/>
+        </p:blipFill>
+        <p:spPr>
+          <a:xfrm>
+            <a:off x="3087371" y="2832100"/>
+            <a:ext cx="4632052" cy="4038600"/>
+          </a:xfrm>
+          <a:prstGeom prst="rect">
+            <a:avLst/>
+          </a:prstGeom>
+        </p:spPr>
+      </p:pic>
+      <p:pic>
+        <p:nvPicPr>
+          <p:cNvPr id="5" name="Image 3" descr="preencoded.png"/>
+          <p:cNvPicPr>
+            <a:picLocks noChangeAspect="1"/>
+          </p:cNvPicPr>
+          <p:nvPr/>
+        </p:nvPicPr>
+        <p:blipFill>
+          <a:blip r:embed="rId6"/>
+          <a:srcRect/>
+          <a:stretch/>
+        </p:blipFill>
+        <p:spPr>
+          <a:xfrm>
+            <a:off x="5880351" y="327910"/>
+            <a:ext cx="2595599" cy="2595599"/>
+          </a:xfrm>
+          <a:prstGeom prst="rect">
+            <a:avLst/>
+          </a:prstGeom>
+        </p:spPr>
+      </p:pic>
+      <p:pic>
+        <p:nvPicPr>
+          <p:cNvPr id="7" name="Image 4" descr="preencoded.png"/>
+          <p:cNvPicPr>
+            <a:picLocks noChangeAspect="1"/>
+          </p:cNvPicPr>
+          <p:nvPr/>
+        </p:nvPicPr>
+        <p:blipFill>
+          <a:blip r:embed="rId7"/>
+          <a:srcRect/>
+          <a:stretch/>
+        </p:blipFill>
+        <p:spPr>
+          <a:xfrm>
+            <a:off x="438153" y="509403"/>
+            <a:ext cx="3790951" cy="3730997"/>
+          </a:xfrm>
+          <a:prstGeom prst="rect">
+            <a:avLst/>
+          </a:prstGeom>
+        </p:spPr>
+      </p:pic>
+      <p:sp>
+        <p:nvSpPr>
+          <p:cNvPr id="8" name="Text 1"/>
+          <p:cNvSpPr/>
+          <p:nvPr/>
+        </p:nvSpPr>
+        <p:spPr>
+          <a:xfrm>
+            <a:off x="438153" y="6337302"/>
+            <a:ext cx="361951" cy="165100"/>
+          </a:xfrm>
+          <a:prstGeom prst="rect">
+            <a:avLst/>
+          </a:prstGeom>
+          <a:noFill/>
+          <a:ln/>
+        </p:spPr>
+        <p:txBody>
+          <a:bodyPr wrap="square" lIns="0" tIns="0" rIns="0" bIns="0" rtlCol="0" anchor="ctr"/>
+          <a:lstStyle/>
+          <a:p>
+            <a:pPr defTabSz="1219140">
+              <a:lnSpc>
+                <a:spcPts val="1255"/>
+              </a:lnSpc>
+            </a:pPr>
+            <a:r>
+              <a:rPr lang="en-US" sz="1100" kern="0" spc="-12" dirty="0">
+                <a:solidFill>
+                  <a:srgbClr val="000000">
+                    <a:alpha val="99000"/>
+                  </a:srgbClr>
+                </a:solidFill>
+                <a:latin typeface="Roboto Mono" pitchFamily="34" charset="0"/>
+                <a:ea typeface="Roboto Mono" pitchFamily="34" charset="-122"/>
+                <a:cs typeface="Roboto Mono" pitchFamily="34" charset="-120"/>
+              </a:rPr>
+              <a:t>2026</a:t>
+            </a:r>
+            <a:endParaRPr lang="en-US" sz="1100" dirty="0">
+              <a:solidFill>
+                <a:prstClr val="black"/>
+              </a:solidFill>
+            </a:endParaRPr>
+          </a:p>
+        </p:txBody>
+      </p:sp>
+      <p:pic>
+        <p:nvPicPr>
+          <p:cNvPr id="9" name="Image 5" descr="preencoded.png"/>
+          <p:cNvPicPr>
+            <a:picLocks noChangeAspect="1"/>
+          </p:cNvPicPr>
+          <p:nvPr/>
+        </p:nvPicPr>
+        <p:blipFill>
+          <a:blip r:embed="rId8" cstate="hqprint">
+            <a:extLst>
+              <a:ext uri="{28A0092B-C50C-407E-A947-70E740481C1C}">
+                <a14:useLocalDpi xmlns:a14="http://schemas.microsoft.com/office/drawing/2010/main"/>
+              </a:ext>
+            </a:extLst>
+          </a:blip>
+          <a:srcRect r="780" b="6250"/>
+          <a:stretch/>
+        </p:blipFill>
+        <p:spPr>
+          <a:xfrm>
+            <a:off x="4114800" y="5238752"/>
+            <a:ext cx="8077200" cy="1619251"/>
+          </a:xfrm>
+          <a:prstGeom prst="rect">
+            <a:avLst/>
+          </a:prstGeom>
+        </p:spPr>
+      </p:pic>
+      <p:pic>
+        <p:nvPicPr>
+          <p:cNvPr id="10" name="Image 6" descr="preencoded.png"/>
+          <p:cNvPicPr>
+            <a:picLocks noChangeAspect="1"/>
+          </p:cNvPicPr>
+          <p:nvPr/>
+        </p:nvPicPr>
+        <p:blipFill>
+          <a:blip r:embed="rId9"/>
+          <a:srcRect/>
+          <a:stretch/>
+        </p:blipFill>
+        <p:spPr>
+          <a:xfrm>
+            <a:off x="9395166" y="1984265"/>
+            <a:ext cx="2939076" cy="4126841"/>
+          </a:xfrm>
+          <a:prstGeom prst="rect">
+            <a:avLst/>
+          </a:prstGeom>
+        </p:spPr>
+      </p:pic>
+      <p:pic>
+        <p:nvPicPr>
+          <p:cNvPr id="11" name="Image 7" descr="preencoded.png"/>
+          <p:cNvPicPr>
+            <a:picLocks noChangeAspect="1"/>
+          </p:cNvPicPr>
+          <p:nvPr/>
+        </p:nvPicPr>
+        <p:blipFill>
+          <a:blip r:embed="rId10"/>
+          <a:srcRect/>
+          <a:stretch/>
+        </p:blipFill>
+        <p:spPr>
+          <a:xfrm>
+            <a:off x="10344153" y="527053"/>
+            <a:ext cx="1250951" cy="1250951"/>
+          </a:xfrm>
+          <a:prstGeom prst="rect">
+            <a:avLst/>
+          </a:prstGeom>
+        </p:spPr>
+      </p:pic>
+      <p:pic>
+        <p:nvPicPr>
+          <p:cNvPr id="12" name="Image 8" descr="preencoded.png"/>
+          <p:cNvPicPr>
+            <a:picLocks noChangeAspect="1"/>
+          </p:cNvPicPr>
+          <p:nvPr/>
+        </p:nvPicPr>
+        <p:blipFill>
+          <a:blip r:embed="rId11"/>
+          <a:srcRect/>
+          <a:stretch/>
+        </p:blipFill>
+        <p:spPr>
+          <a:xfrm>
+            <a:off x="7107728" y="1950264"/>
+            <a:ext cx="3127517" cy="4198037"/>
+          </a:xfrm>
+          <a:prstGeom prst="rect">
+            <a:avLst/>
+          </a:prstGeom>
+        </p:spPr>
+      </p:pic>
+      <p:pic>
+        <p:nvPicPr>
+          <p:cNvPr id="13" name="Image 9" descr="preencoded.png"/>
+          <p:cNvPicPr>
+            <a:picLocks noChangeAspect="1"/>
+          </p:cNvPicPr>
+          <p:nvPr/>
+        </p:nvPicPr>
+        <p:blipFill>
+          <a:blip r:embed="rId12"/>
+          <a:srcRect/>
+          <a:stretch/>
+        </p:blipFill>
+        <p:spPr>
+          <a:xfrm>
+            <a:off x="4069696" y="1778001"/>
+            <a:ext cx="4830464" cy="4830464"/>
+          </a:xfrm>
+          <a:prstGeom prst="rect">
+            <a:avLst/>
+          </a:prstGeom>
+        </p:spPr>
+      </p:pic>
+      <p:sp>
+        <p:nvSpPr>
+          <p:cNvPr id="14" name="Text 2"/>
+          <p:cNvSpPr/>
+          <p:nvPr/>
+        </p:nvSpPr>
+        <p:spPr>
+          <a:xfrm>
+            <a:off x="8915400" y="4883149"/>
+            <a:ext cx="3276600" cy="1016000"/>
+          </a:xfrm>
+          <a:prstGeom prst="rect">
+            <a:avLst/>
+          </a:prstGeom>
+          <a:solidFill>
+            <a:srgbClr val="E30614"/>
+          </a:solidFill>
+          <a:ln/>
+        </p:spPr>
+        <p:txBody>
+          <a:bodyPr wrap="square" lIns="121914" tIns="60957" rIns="121914" bIns="60957" rtlCol="0" anchor="ctr"/>
+          <a:lstStyle/>
+          <a:p>
+            <a:pPr defTabSz="1219140"/>
+            <a:endParaRPr lang="en-US" dirty="0">
+              <a:solidFill>
+                <a:prstClr val="black"/>
+              </a:solidFill>
+            </a:endParaRPr>
+          </a:p>
+        </p:txBody>
+      </p:sp>
+      <p:sp>
+        <p:nvSpPr>
+          <p:cNvPr id="15" name="Text 3"/>
+          <p:cNvSpPr/>
+          <p:nvPr/>
+        </p:nvSpPr>
+        <p:spPr>
+          <a:xfrm>
+            <a:off x="8915400" y="5016500"/>
+            <a:ext cx="3276600" cy="812800"/>
+          </a:xfrm>
+          <a:prstGeom prst="rect">
+            <a:avLst/>
+          </a:prstGeom>
+          <a:noFill/>
+          <a:ln/>
+        </p:spPr>
+        <p:txBody>
+          <a:bodyPr wrap="square" lIns="0" tIns="0" rIns="0" bIns="0" rtlCol="0" anchor="ctr"/>
+          <a:lstStyle/>
+          <a:p>
+            <a:pPr algn="ctr" defTabSz="1219140">
+              <a:lnSpc>
+                <a:spcPts val="3021"/>
+              </a:lnSpc>
+            </a:pPr>
+            <a:r>
+              <a:rPr lang="en-US" sz="2900" kern="0" spc="-63" dirty="0">
+                <a:solidFill>
+                  <a:srgbClr val="FFFFFF">
+                    <a:alpha val="99000"/>
+                  </a:srgbClr>
+                </a:solidFill>
+                <a:latin typeface="Roboto Mono" pitchFamily="34" charset="0"/>
+                <a:ea typeface="Roboto Mono" pitchFamily="34" charset="-122"/>
+                <a:cs typeface="Roboto Mono" pitchFamily="34" charset="-120"/>
+              </a:rPr>
+              <a:t>У КОРРОЗИИ</a:t>
+            </a:r>
+            <a:endParaRPr lang="en-US" sz="2900" dirty="0">
+              <a:solidFill>
+                <a:prstClr val="black"/>
+              </a:solidFill>
+            </a:endParaRPr>
+          </a:p>
+          <a:p>
+            <a:pPr algn="ctr" defTabSz="1219140">
+              <a:lnSpc>
+                <a:spcPts val="3021"/>
+              </a:lnSpc>
+            </a:pPr>
+            <a:r>
+              <a:rPr lang="en-US" sz="2900" kern="0" spc="-63" dirty="0">
+                <a:solidFill>
+                  <a:srgbClr val="FFFFFF">
+                    <a:alpha val="99000"/>
+                  </a:srgbClr>
+                </a:solidFill>
+                <a:latin typeface="Roboto Mono" pitchFamily="34" charset="0"/>
+                <a:ea typeface="Roboto Mono" pitchFamily="34" charset="-122"/>
+                <a:cs typeface="Roboto Mono" pitchFamily="34" charset="-120"/>
+              </a:rPr>
+              <a:t>НЕТ ШАНСОВ</a:t>
+            </a:r>
+            <a:endParaRPr lang="en-US" sz="2900" dirty="0">
+              <a:solidFill>
+                <a:prstClr val="black"/>
+              </a:solidFill>
+            </a:endParaRPr>
+          </a:p>
+        </p:txBody>
+      </p:sp>
+    </p:spTree>
+    <p:extLst>
+      <p:ext uri="{BB962C8B-B14F-4D97-AF65-F5344CB8AC3E}">
+        <p14:creationId xmlns:p14="http://schemas.microsoft.com/office/powerpoint/2010/main" val="3477436308"/>
+      </p:ext>
+    </p:extLst>
+  </p:cSld>
+  <p:clrMapOvr>
+    <a:masterClrMapping/>
+  </p:clrMapOvr>
+</p:sld>
+</file>
+
 <file path=ppt/slides/slide3.xml><?xml version="1.0" encoding="utf-8"?>
 <p:sld xmlns:a="http://schemas.openxmlformats.org/drawingml/2006/main" xmlns:r="http://schemas.openxmlformats.org/officeDocument/2006/relationships" xmlns:p="http://schemas.openxmlformats.org/presentationml/2006/main">
   <p:cSld>
@@ -52850,7 +55073,7 @@
   <a:extraClrSchemeLst/>
   <a:extLst>
     <a:ext uri="{05A4C25C-085E-4340-85A3-A5531E510DB2}">
-      <thm15:themeFamily xmlns:thm15="http://schemas.microsoft.com/office/thememl/2012/main" xmlns="" name="Office Theme" id="{62F939B6-93AF-4DB8-9C6B-D6C7DFDC589F}" vid="{4A3C46E8-61CC-4603-A589-7422A47A8E4A}"/>
+      <thm15:themeFamily xmlns="" xmlns:thm15="http://schemas.microsoft.com/office/thememl/2012/main" name="Office Theme" id="{62F939B6-93AF-4DB8-9C6B-D6C7DFDC589F}" vid="{4A3C46E8-61CC-4603-A589-7422A47A8E4A}"/>
     </a:ext>
   </a:extLst>
 </a:theme>
